--- a/slides/aula-01-abertura-papel-da-analise.pptx
+++ b/slides/aula-01-abertura-papel-da-analise.pptx
@@ -9573,7 +9573,7 @@
                 <a:ea typeface="Calibri" pitchFamily="34" charset="-122"/>
                 <a:cs typeface="Calibri" pitchFamily="34" charset="-120"/>
               </a:rPr>
-              <a:t>Todos os integrantes rodando npm install, npm test e npm start.</a:t>
+              <a:t>Rodar npm install, npm run db:migrar, npm test e npm start. O banco é SQLite, embutido no Node: nada a instalar.</a:t>
             </a:r>
             <a:endParaRPr lang="en-US" sz="1500" dirty="0"/>
           </a:p>

--- a/slides/aula-01-abertura-papel-da-analise.pptx
+++ b/slides/aula-01-abertura-papel-da-analise.pptx
@@ -9715,7 +9715,7 @@
                 <a:ea typeface="Calibri" pitchFamily="34" charset="-122"/>
                 <a:cs typeface="Calibri" pitchFamily="34" charset="-120"/>
               </a:rPr>
-              <a:t>Em duplas ou trios — escolham 1 das 3 opções</a:t>
+              <a:t>Em grupo (3 a 5 pessoas) — escolham 1 das 3 opções</a:t>
             </a:r>
             <a:endParaRPr lang="en-US" sz="1300" dirty="0"/>
           </a:p>

--- a/slides/aula-01-abertura-papel-da-analise.pptx
+++ b/slides/aula-01-abertura-papel-da-analise.pptx
@@ -31,9 +31,10 @@
     <p:sldId id="279" r:id="rId25"/>
     <p:sldId id="280" r:id="rId26"/>
     <p:sldId id="281" r:id="rId27"/>
+    <p:sldId id="282" r:id="rId28"/>
   </p:sldIdLst>
   <p:notesMasterIdLst>
-    <p:notesMasterId r:id="rId28"/>
+    <p:notesMasterId r:id="rId29"/>
   </p:notesMasterIdLst>
   <p:sldSz cx="9144000" cy="5143500"/>
   <p:notesSz cx="5143500" cy="9144000"/>
@@ -967,7 +968,7 @@
           <a:p>
             <a:r>
               <a:rPr lang="en-US" dirty="0"/>
-              <a:t>Ler as duas colunas em voz alta. É o momento de fechar o acordo. Abrir a atividade do Teams na hora e mostrar onde entregam o aceite.</a:t>
+              <a:t>Resumo visual da avaliação: os 10 pontos, as regras da prova e da consulta, e os critérios da defesa. Deixar no telão enquanto tiram dúvidas — é o slide que eles vão fotografar.</a:t>
             </a:r>
             <a:endParaRPr lang="en-US" dirty="0"/>
           </a:p>
@@ -1055,7 +1056,7 @@
           <a:p>
             <a:r>
               <a:rPr lang="en-US" dirty="0"/>
-              <a:t>Abrir a atividade do Teams na hora. O repositório precisa ser público — é por ele que acompanho commits, PRs e CI.</a:t>
+              <a:t>Ler as duas colunas em voz alta. É o momento de fechar o acordo.</a:t>
             </a:r>
             <a:endParaRPr lang="en-US" dirty="0"/>
           </a:p>
@@ -1143,7 +1144,7 @@
           <a:p>
             <a:r>
               <a:rPr lang="en-US" dirty="0"/>
-              <a:t>Divisor de seção. Momento de mudar o ritmo.</a:t>
+              <a:t>Abrir a atividade do Teams na hora. O repositório precisa ser público — é por ele que acompanho commits, PRs e CI.</a:t>
             </a:r>
             <a:endParaRPr lang="en-US" dirty="0"/>
           </a:p>
@@ -1231,7 +1232,7 @@
           <a:p>
             <a:r>
               <a:rPr lang="en-US" dirty="0"/>
-              <a:t>Perguntar: o que vocês fariam com dados incompletos? Deixar o desconforto aparecer.</a:t>
+              <a:t>Divisor de seção. Momento de mudar o ritmo.</a:t>
             </a:r>
             <a:endParaRPr lang="en-US" dirty="0"/>
           </a:p>
@@ -1407,7 +1408,7 @@
           <a:p>
             <a:r>
               <a:rPr lang="en-US" dirty="0"/>
-              <a:t>Este é o ponto da aula. Se eles saírem só com isso, foi bom.</a:t>
+              <a:t>Perguntar: o que vocês fariam com dados incompletos? Deixar o desconforto aparecer.</a:t>
             </a:r>
             <a:endParaRPr lang="en-US" dirty="0"/>
           </a:p>
@@ -1671,7 +1672,7 @@
           <a:p>
             <a:r>
               <a:rPr lang="en-US" dirty="0"/>
-              <a:t>Mostrar a solução de referência rodando por 30 segundos. Só isso — não entregar o código.</a:t>
+              <a:t>Este é o ponto da aula. Se eles saírem só com isso, foi bom.</a:t>
             </a:r>
             <a:endParaRPr lang="en-US" dirty="0"/>
           </a:p>
@@ -1847,7 +1848,7 @@
           <a:p>
             <a:r>
               <a:rPr lang="en-US" dirty="0"/>
-              <a:t>Circular entre os grupos. Questionar decisões e introduzir restrições novas.</a:t>
+              <a:t>Mostrar a solução de referência rodando por 30 segundos. Só isso — não entregar o código.</a:t>
             </a:r>
             <a:endParaRPr lang="en-US" dirty="0"/>
           </a:p>
@@ -1935,7 +1936,7 @@
           <a:p>
             <a:r>
               <a:rPr lang="en-US" dirty="0"/>
-              <a:t>Correção binária: entregou no prazo e no formato, pontuou.</a:t>
+              <a:t>Circular entre os grupos. Questionar decisões e introduzir restrições novas.</a:t>
             </a:r>
             <a:endParaRPr lang="en-US" dirty="0"/>
           </a:p>
@@ -2023,7 +2024,7 @@
           <a:p>
             <a:r>
               <a:rPr lang="en-US" dirty="0"/>
-              <a:t>Se for colaboradora: exigir o registro do que a IA gerou e do que eles mudaram.</a:t>
+              <a:t>As três atividades são complementares: a 1 produz, a 2 transforma, a 3 usa e critica IA. Correção binária: entregou as três no prazo e no formato, pontuou.</a:t>
             </a:r>
             <a:endParaRPr lang="en-US" dirty="0"/>
           </a:p>
@@ -2111,7 +2112,7 @@
           <a:p>
             <a:r>
               <a:rPr lang="en-US" dirty="0"/>
-              <a:t>Reservar 1 min ao final. Nunca entregar resumo pronto — a consulta é evidência de aprendizagem.</a:t>
+              <a:t>Se for colaboradora: exigir o registro do que a IA gerou e do que eles mudaram.</a:t>
             </a:r>
             <a:endParaRPr lang="en-US" dirty="0"/>
           </a:p>
@@ -2135,6 +2136,94 @@
             <a:fld id="{F7021451-1387-4CA6-816F-3879F97B5CBC}" type="slidenum">
               <a:rPr lang="en-US"/>
               <a:t>26</a:t>
+            </a:fld>
+            <a:endParaRPr lang="en-US"/>
+          </a:p>
+        </p:txBody>
+      </p:sp>
+    </p:spTree>
+    <p:extLst>
+      <p:ext uri="{BB962C8B-B14F-4D97-AF65-F5344CB8AC3E}">
+        <p14:creationId xmlns:p14="http://schemas.microsoft.com/office/powerpoint/2010/main" val="1024086991"/>
+      </p:ext>
+    </p:extLst>
+  </p:cSld>
+  <p:clrMapOvr>
+    <a:masterClrMapping/>
+  </p:clrMapOvr>
+</p:notes>
+</file>
+
+<file path=ppt/notesSlides/notesSlide27.xml><?xml version="1.0" encoding="utf-8"?>
+<p:notes xmlns:a="http://schemas.openxmlformats.org/drawingml/2006/main" xmlns:r="http://schemas.openxmlformats.org/officeDocument/2006/relationships" xmlns:p="http://schemas.openxmlformats.org/presentationml/2006/main">
+  <p:cSld>
+    <p:spTree>
+      <p:nvGrpSpPr>
+        <p:cNvPr id="1" name=""/>
+        <p:cNvGrpSpPr/>
+        <p:nvPr/>
+      </p:nvGrpSpPr>
+      <p:grpSpPr>
+        <a:xfrm>
+          <a:off x="0" y="0"/>
+          <a:ext cx="0" cy="0"/>
+          <a:chOff x="0" y="0"/>
+          <a:chExt cx="0" cy="0"/>
+        </a:xfrm>
+      </p:grpSpPr>
+      <p:sp>
+        <p:nvSpPr>
+          <p:cNvPr id="2" name="Slide Image Placeholder 1"/>
+          <p:cNvSpPr>
+            <a:spLocks noGrp="1" noRot="1" noChangeAspect="1"/>
+          </p:cNvSpPr>
+          <p:nvPr>
+            <p:ph type="sldImg"/>
+          </p:nvPr>
+        </p:nvSpPr>
+        <p:spPr/>
+      </p:sp>
+      <p:sp>
+        <p:nvSpPr>
+          <p:cNvPr id="3" name="Notes Placeholder 2"/>
+          <p:cNvSpPr>
+            <a:spLocks noGrp="1"/>
+          </p:cNvSpPr>
+          <p:nvPr>
+            <p:ph type="body" idx="1"/>
+          </p:nvPr>
+        </p:nvSpPr>
+        <p:spPr/>
+        <p:txBody>
+          <a:bodyPr/>
+          <a:lstStyle/>
+          <a:p>
+            <a:r>
+              <a:rPr lang="en-US" dirty="0"/>
+              <a:t>Reservar 1 min ao final. Nunca entregar resumo pronto — a consulta é evidência de aprendizagem.</a:t>
+            </a:r>
+            <a:endParaRPr lang="en-US" dirty="0"/>
+          </a:p>
+        </p:txBody>
+      </p:sp>
+      <p:sp>
+        <p:nvSpPr>
+          <p:cNvPr id="4" name="Slide Number Placeholder 3"/>
+          <p:cNvSpPr>
+            <a:spLocks noGrp="1"/>
+          </p:cNvSpPr>
+          <p:nvPr>
+            <p:ph type="sldNum" sz="quarter" idx="10"/>
+          </p:nvPr>
+        </p:nvSpPr>
+        <p:spPr/>
+        <p:txBody>
+          <a:bodyPr/>
+          <a:lstStyle/>
+          <a:p>
+            <a:fld id="{F7021451-1387-4CA6-816F-3879F97B5CBC}" type="slidenum">
+              <a:rPr lang="en-US"/>
+              <a:t>27</a:t>
             </a:fld>
             <a:endParaRPr lang="en-US"/>
           </a:p>
@@ -4217,7 +4306,28 @@
                 <a:ea typeface="Calibri" pitchFamily="34" charset="-122"/>
                 <a:cs typeface="Calibri" pitchFamily="34" charset="-120"/>
               </a:rPr>
-              <a:t>Um repositório por grupo, a partir do template-repo.</a:t>
+              <a:t>O grupo é a unidade de todo trabalho: os três trabalhos maiores e os trabalhos de sala.</a:t>
+            </a:r>
+            <a:endParaRPr lang="en-US" sz="1500" dirty="0"/>
+          </a:p>
+          <a:p>
+            <a:pPr marL="342900" indent="-342900">
+              <a:spcAft>
+                <a:spcPts val="1000"/>
+              </a:spcAft>
+              <a:buSzPct val="100000"/>
+              <a:buChar char="•"/>
+            </a:pPr>
+            <a:r>
+              <a:rPr lang="en-US" sz="1500" dirty="0">
+                <a:solidFill>
+                  <a:srgbClr val="36454F"/>
+                </a:solidFill>
+                <a:latin typeface="Calibri" pitchFamily="34" charset="0"/>
+                <a:ea typeface="Calibri" pitchFamily="34" charset="-122"/>
+                <a:cs typeface="Calibri" pitchFamily="34" charset="-120"/>
+              </a:rPr>
+              <a:t>Um repositório público por grupo, a partir do template-repo.</a:t>
             </a:r>
             <a:endParaRPr lang="en-US" sz="1500" dirty="0"/>
           </a:p>
@@ -4422,7 +4532,7 @@
                 <a:ea typeface="Calibri" pitchFamily="34" charset="-122"/>
                 <a:cs typeface="Calibri" pitchFamily="34" charset="-120"/>
               </a:rPr>
-              <a:t>A presença é registrada por chamada. As entregas têm data e hora e valem independentemente de presença.</a:t>
+              <a:t>A presença é registrada por chamada. As entregas são feitas pelo Teams, com data e hora, e valem independentemente de presença.</a:t>
             </a:r>
             <a:endParaRPr lang="en-US" sz="1700" dirty="0"/>
           </a:p>
@@ -4453,8 +4563,77 @@
               <a:tblGrid>
                 <a:gridCol w="2286000"/>
                 <a:gridCol w="1005840"/>
+                <a:gridCol w="4937760"/>
               </a:tblGrid>
               <a:tr h="310896">
+                <a:tc>
+                  <a:txBody>
+                    <a:bodyPr/>
+                    <a:lstStyle/>
+                    <a:p>
+                      <a:pPr indent="0" marL="0">
+                        <a:buNone/>
+                      </a:pPr>
+                      <a:r>
+                        <a:rPr lang="en-US" sz="1200" b="1" dirty="0">
+                          <a:solidFill>
+                            <a:srgbClr val="FFFFFF"/>
+                          </a:solidFill>
+                          <a:latin typeface="Calibri" pitchFamily="34" charset="0"/>
+                          <a:ea typeface="Calibri" pitchFamily="34" charset="-122"/>
+                          <a:cs typeface="Calibri" pitchFamily="34" charset="-120"/>
+                        </a:rPr>
+                        <a:t>Data</a:t>
+                      </a:r>
+                      <a:endParaRPr lang="en-US" sz="1200" dirty="0">
+                        <a:latin typeface="Calibri" charset="0"/>
+                        <a:ea typeface="Calibri" charset="0"/>
+                        <a:cs typeface="Calibri" charset="0"/>
+                      </a:endParaRPr>
+                    </a:p>
+                  </a:txBody>
+                  <a:tcPr marL="91440" marR="91440" marT="45720" marB="45720" anchor="ctr">
+                    <a:lnL w="12700" cap="flat" cmpd="sng" algn="ctr">
+                      <a:solidFill>
+                        <a:srgbClr val="D6E0D2"/>
+                      </a:solidFill>
+                      <a:prstDash val="solid"/>
+                      <a:round/>
+                      <a:headEnd type="none" w="med" len="med"/>
+                      <a:tailEnd type="none" w="med" len="med"/>
+                    </a:lnL>
+                    <a:lnR w="12700" cap="flat" cmpd="sng" algn="ctr">
+                      <a:solidFill>
+                        <a:srgbClr val="D6E0D2"/>
+                      </a:solidFill>
+                      <a:prstDash val="solid"/>
+                      <a:round/>
+                      <a:headEnd type="none" w="med" len="med"/>
+                      <a:tailEnd type="none" w="med" len="med"/>
+                    </a:lnR>
+                    <a:lnT w="12700" cap="flat" cmpd="sng" algn="ctr">
+                      <a:solidFill>
+                        <a:srgbClr val="D6E0D2"/>
+                      </a:solidFill>
+                      <a:prstDash val="solid"/>
+                      <a:round/>
+                      <a:headEnd type="none" w="med" len="med"/>
+                      <a:tailEnd type="none" w="med" len="med"/>
+                    </a:lnT>
+                    <a:lnB w="12700" cap="flat" cmpd="sng" algn="ctr">
+                      <a:solidFill>
+                        <a:srgbClr val="D6E0D2"/>
+                      </a:solidFill>
+                      <a:prstDash val="solid"/>
+                      <a:round/>
+                      <a:headEnd type="none" w="med" len="med"/>
+                      <a:tailEnd type="none" w="med" len="med"/>
+                    </a:lnB>
+                    <a:solidFill>
+                      <a:srgbClr val="2C5F2D"/>
+                    </a:solidFill>
+                  </a:tcPr>
+                </a:tc>
                 <a:tc>
                   <a:txBody>
                     <a:bodyPr/>
@@ -4610,6 +4789,71 @@
                           <a:ea typeface="Calibri" pitchFamily="34" charset="-122"/>
                           <a:cs typeface="Calibri" pitchFamily="34" charset="-120"/>
                         </a:rPr>
+                        <a:t>03/09</a:t>
+                      </a:r>
+                      <a:endParaRPr lang="en-US" sz="1200" dirty="0">
+                        <a:latin typeface="Calibri" charset="0"/>
+                        <a:ea typeface="Calibri" charset="0"/>
+                        <a:cs typeface="Calibri" charset="0"/>
+                      </a:endParaRPr>
+                    </a:p>
+                  </a:txBody>
+                  <a:tcPr marL="91440" marR="91440" marT="45720" marB="45720" anchor="ctr">
+                    <a:lnL w="12700" cap="flat" cmpd="sng" algn="ctr">
+                      <a:solidFill>
+                        <a:srgbClr val="D6E0D2"/>
+                      </a:solidFill>
+                      <a:prstDash val="solid"/>
+                      <a:round/>
+                      <a:headEnd type="none" w="med" len="med"/>
+                      <a:tailEnd type="none" w="med" len="med"/>
+                    </a:lnL>
+                    <a:lnR w="12700" cap="flat" cmpd="sng" algn="ctr">
+                      <a:solidFill>
+                        <a:srgbClr val="D6E0D2"/>
+                      </a:solidFill>
+                      <a:prstDash val="solid"/>
+                      <a:round/>
+                      <a:headEnd type="none" w="med" len="med"/>
+                      <a:tailEnd type="none" w="med" len="med"/>
+                    </a:lnR>
+                    <a:lnT w="12700" cap="flat" cmpd="sng" algn="ctr">
+                      <a:solidFill>
+                        <a:srgbClr val="D6E0D2"/>
+                      </a:solidFill>
+                      <a:prstDash val="solid"/>
+                      <a:round/>
+                      <a:headEnd type="none" w="med" len="med"/>
+                      <a:tailEnd type="none" w="med" len="med"/>
+                    </a:lnT>
+                    <a:lnB w="12700" cap="flat" cmpd="sng" algn="ctr">
+                      <a:solidFill>
+                        <a:srgbClr val="D6E0D2"/>
+                      </a:solidFill>
+                      <a:prstDash val="solid"/>
+                      <a:round/>
+                      <a:headEnd type="none" w="med" len="med"/>
+                      <a:tailEnd type="none" w="med" len="med"/>
+                    </a:lnB>
+                  </a:tcPr>
+                </a:tc>
+                <a:tc>
+                  <a:txBody>
+                    <a:bodyPr/>
+                    <a:lstStyle/>
+                    <a:p>
+                      <a:pPr indent="0" marL="0">
+                        <a:buNone/>
+                      </a:pPr>
+                      <a:r>
+                        <a:rPr lang="en-US" sz="1200" dirty="0">
+                          <a:solidFill>
+                            <a:srgbClr val="36454F"/>
+                          </a:solidFill>
+                          <a:latin typeface="Calibri" pitchFamily="34" charset="0"/>
+                          <a:ea typeface="Calibri" pitchFamily="34" charset="-122"/>
+                          <a:cs typeface="Calibri" pitchFamily="34" charset="-120"/>
+                        </a:rPr>
                         <a:t>Aula 5</a:t>
                       </a:r>
                       <a:endParaRPr lang="en-US" sz="1200" dirty="0">
@@ -4742,6 +4986,71 @@
                           <a:ea typeface="Calibri" pitchFamily="34" charset="-122"/>
                           <a:cs typeface="Calibri" pitchFamily="34" charset="-120"/>
                         </a:rPr>
+                        <a:t>15/10</a:t>
+                      </a:r>
+                      <a:endParaRPr lang="en-US" sz="1200" dirty="0">
+                        <a:latin typeface="Calibri" charset="0"/>
+                        <a:ea typeface="Calibri" charset="0"/>
+                        <a:cs typeface="Calibri" charset="0"/>
+                      </a:endParaRPr>
+                    </a:p>
+                  </a:txBody>
+                  <a:tcPr marL="91440" marR="91440" marT="45720" marB="45720" anchor="ctr">
+                    <a:lnL w="12700" cap="flat" cmpd="sng" algn="ctr">
+                      <a:solidFill>
+                        <a:srgbClr val="D6E0D2"/>
+                      </a:solidFill>
+                      <a:prstDash val="solid"/>
+                      <a:round/>
+                      <a:headEnd type="none" w="med" len="med"/>
+                      <a:tailEnd type="none" w="med" len="med"/>
+                    </a:lnL>
+                    <a:lnR w="12700" cap="flat" cmpd="sng" algn="ctr">
+                      <a:solidFill>
+                        <a:srgbClr val="D6E0D2"/>
+                      </a:solidFill>
+                      <a:prstDash val="solid"/>
+                      <a:round/>
+                      <a:headEnd type="none" w="med" len="med"/>
+                      <a:tailEnd type="none" w="med" len="med"/>
+                    </a:lnR>
+                    <a:lnT w="12700" cap="flat" cmpd="sng" algn="ctr">
+                      <a:solidFill>
+                        <a:srgbClr val="D6E0D2"/>
+                      </a:solidFill>
+                      <a:prstDash val="solid"/>
+                      <a:round/>
+                      <a:headEnd type="none" w="med" len="med"/>
+                      <a:tailEnd type="none" w="med" len="med"/>
+                    </a:lnT>
+                    <a:lnB w="12700" cap="flat" cmpd="sng" algn="ctr">
+                      <a:solidFill>
+                        <a:srgbClr val="D6E0D2"/>
+                      </a:solidFill>
+                      <a:prstDash val="solid"/>
+                      <a:round/>
+                      <a:headEnd type="none" w="med" len="med"/>
+                      <a:tailEnd type="none" w="med" len="med"/>
+                    </a:lnB>
+                  </a:tcPr>
+                </a:tc>
+                <a:tc>
+                  <a:txBody>
+                    <a:bodyPr/>
+                    <a:lstStyle/>
+                    <a:p>
+                      <a:pPr indent="0" marL="0">
+                        <a:buNone/>
+                      </a:pPr>
+                      <a:r>
+                        <a:rPr lang="en-US" sz="1200" dirty="0">
+                          <a:solidFill>
+                            <a:srgbClr val="36454F"/>
+                          </a:solidFill>
+                          <a:latin typeface="Calibri" pitchFamily="34" charset="0"/>
+                          <a:ea typeface="Calibri" pitchFamily="34" charset="-122"/>
+                          <a:cs typeface="Calibri" pitchFamily="34" charset="-120"/>
+                        </a:rPr>
                         <a:t>Aula 10</a:t>
                       </a:r>
                       <a:endParaRPr lang="en-US" sz="1200" dirty="0">
@@ -4874,6 +5183,71 @@
                           <a:ea typeface="Calibri" pitchFamily="34" charset="-122"/>
                           <a:cs typeface="Calibri" pitchFamily="34" charset="-120"/>
                         </a:rPr>
+                        <a:t>26/11</a:t>
+                      </a:r>
+                      <a:endParaRPr lang="en-US" sz="1200" dirty="0">
+                        <a:latin typeface="Calibri" charset="0"/>
+                        <a:ea typeface="Calibri" charset="0"/>
+                        <a:cs typeface="Calibri" charset="0"/>
+                      </a:endParaRPr>
+                    </a:p>
+                  </a:txBody>
+                  <a:tcPr marL="91440" marR="91440" marT="45720" marB="45720" anchor="ctr">
+                    <a:lnL w="12700" cap="flat" cmpd="sng" algn="ctr">
+                      <a:solidFill>
+                        <a:srgbClr val="D6E0D2"/>
+                      </a:solidFill>
+                      <a:prstDash val="solid"/>
+                      <a:round/>
+                      <a:headEnd type="none" w="med" len="med"/>
+                      <a:tailEnd type="none" w="med" len="med"/>
+                    </a:lnL>
+                    <a:lnR w="12700" cap="flat" cmpd="sng" algn="ctr">
+                      <a:solidFill>
+                        <a:srgbClr val="D6E0D2"/>
+                      </a:solidFill>
+                      <a:prstDash val="solid"/>
+                      <a:round/>
+                      <a:headEnd type="none" w="med" len="med"/>
+                      <a:tailEnd type="none" w="med" len="med"/>
+                    </a:lnR>
+                    <a:lnT w="12700" cap="flat" cmpd="sng" algn="ctr">
+                      <a:solidFill>
+                        <a:srgbClr val="D6E0D2"/>
+                      </a:solidFill>
+                      <a:prstDash val="solid"/>
+                      <a:round/>
+                      <a:headEnd type="none" w="med" len="med"/>
+                      <a:tailEnd type="none" w="med" len="med"/>
+                    </a:lnT>
+                    <a:lnB w="12700" cap="flat" cmpd="sng" algn="ctr">
+                      <a:solidFill>
+                        <a:srgbClr val="D6E0D2"/>
+                      </a:solidFill>
+                      <a:prstDash val="solid"/>
+                      <a:round/>
+                      <a:headEnd type="none" w="med" len="med"/>
+                      <a:tailEnd type="none" w="med" len="med"/>
+                    </a:lnB>
+                  </a:tcPr>
+                </a:tc>
+                <a:tc>
+                  <a:txBody>
+                    <a:bodyPr/>
+                    <a:lstStyle/>
+                    <a:p>
+                      <a:pPr indent="0" marL="0">
+                        <a:buNone/>
+                      </a:pPr>
+                      <a:r>
+                        <a:rPr lang="en-US" sz="1200" dirty="0">
+                          <a:solidFill>
+                            <a:srgbClr val="36454F"/>
+                          </a:solidFill>
+                          <a:latin typeface="Calibri" pitchFamily="34" charset="0"/>
+                          <a:ea typeface="Calibri" pitchFamily="34" charset="-122"/>
+                          <a:cs typeface="Calibri" pitchFamily="34" charset="-120"/>
+                        </a:rPr>
                         <a:t>Aula 15</a:t>
                       </a:r>
                       <a:endParaRPr lang="en-US" sz="1200" dirty="0">
@@ -5006,7 +5380,7 @@
                           <a:ea typeface="Calibri" pitchFamily="34" charset="-122"/>
                           <a:cs typeface="Calibri" pitchFamily="34" charset="-120"/>
                         </a:rPr>
-                        <a:t>Aula 16</a:t>
+                        <a:t>03/12</a:t>
                       </a:r>
                       <a:endParaRPr lang="en-US" sz="1200" dirty="0">
                         <a:latin typeface="Calibri" charset="0"/>
@@ -5071,7 +5445,7 @@
                           <a:ea typeface="Calibri" pitchFamily="34" charset="-122"/>
                           <a:cs typeface="Calibri" pitchFamily="34" charset="-120"/>
                         </a:rPr>
-                        <a:t>Prova substitutiva cumulativa — substitui a menor nota de prova</a:t>
+                        <a:t>Aula 16</a:t>
                       </a:r>
                       <a:endParaRPr lang="en-US" sz="1200" dirty="0">
                         <a:latin typeface="Calibri" charset="0"/>
@@ -5119,6 +5493,71 @@
                     </a:lnB>
                   </a:tcPr>
                 </a:tc>
+                <a:tc>
+                  <a:txBody>
+                    <a:bodyPr/>
+                    <a:lstStyle/>
+                    <a:p>
+                      <a:pPr indent="0" marL="0">
+                        <a:buNone/>
+                      </a:pPr>
+                      <a:r>
+                        <a:rPr lang="en-US" sz="1200" dirty="0">
+                          <a:solidFill>
+                            <a:srgbClr val="36454F"/>
+                          </a:solidFill>
+                          <a:latin typeface="Calibri" pitchFamily="34" charset="0"/>
+                          <a:ea typeface="Calibri" pitchFamily="34" charset="-122"/>
+                          <a:cs typeface="Calibri" pitchFamily="34" charset="-120"/>
+                        </a:rPr>
+                        <a:t>Substitutiva — substitui a nota de prova mais baixa</a:t>
+                      </a:r>
+                      <a:endParaRPr lang="en-US" sz="1200" dirty="0">
+                        <a:latin typeface="Calibri" charset="0"/>
+                        <a:ea typeface="Calibri" charset="0"/>
+                        <a:cs typeface="Calibri" charset="0"/>
+                      </a:endParaRPr>
+                    </a:p>
+                  </a:txBody>
+                  <a:tcPr marL="91440" marR="91440" marT="45720" marB="45720" anchor="ctr">
+                    <a:lnL w="12700" cap="flat" cmpd="sng" algn="ctr">
+                      <a:solidFill>
+                        <a:srgbClr val="D6E0D2"/>
+                      </a:solidFill>
+                      <a:prstDash val="solid"/>
+                      <a:round/>
+                      <a:headEnd type="none" w="med" len="med"/>
+                      <a:tailEnd type="none" w="med" len="med"/>
+                    </a:lnL>
+                    <a:lnR w="12700" cap="flat" cmpd="sng" algn="ctr">
+                      <a:solidFill>
+                        <a:srgbClr val="D6E0D2"/>
+                      </a:solidFill>
+                      <a:prstDash val="solid"/>
+                      <a:round/>
+                      <a:headEnd type="none" w="med" len="med"/>
+                      <a:tailEnd type="none" w="med" len="med"/>
+                    </a:lnR>
+                    <a:lnT w="12700" cap="flat" cmpd="sng" algn="ctr">
+                      <a:solidFill>
+                        <a:srgbClr val="D6E0D2"/>
+                      </a:solidFill>
+                      <a:prstDash val="solid"/>
+                      <a:round/>
+                      <a:headEnd type="none" w="med" len="med"/>
+                      <a:tailEnd type="none" w="med" len="med"/>
+                    </a:lnT>
+                    <a:lnB w="12700" cap="flat" cmpd="sng" algn="ctr">
+                      <a:solidFill>
+                        <a:srgbClr val="D6E0D2"/>
+                      </a:solidFill>
+                      <a:prstDash val="solid"/>
+                      <a:round/>
+                      <a:headEnd type="none" w="med" len="med"/>
+                      <a:tailEnd type="none" w="med" len="med"/>
+                    </a:lnB>
+                  </a:tcPr>
+                </a:tc>
               </a:tr>
             </a:tbl>
           </a:graphicData>
@@ -5157,7 +5596,7 @@
                 <a:ea typeface="Calibri" pitchFamily="34" charset="-122"/>
                 <a:cs typeface="Calibri" pitchFamily="34" charset="-120"/>
               </a:rPr>
-              <a:t>Quem falta ainda entrega no prazo, mas perde a orientação e o retorno do momento.</a:t>
+              <a:t>Há também três noites de trabalho remoto: 27/08, 08/10 e 19/11, sempre na quinta anterior à entrega.</a:t>
             </a:r>
             <a:endParaRPr lang="en-US" sz="1250" dirty="0"/>
           </a:p>
@@ -5188,533 +5627,29 @@
           <a:chExt cx="0" cy="0"/>
         </a:xfrm>
       </p:grpSpPr>
-      <p:sp>
-        <p:nvSpPr>
-          <p:cNvPr id="2" name="Text 0"/>
-          <p:cNvSpPr/>
-          <p:nvPr/>
-        </p:nvSpPr>
-        <p:spPr>
-          <a:xfrm>
-            <a:off x="457200" y="310896"/>
-            <a:ext cx="8229600" cy="548640"/>
+      <p:pic>
+        <p:nvPicPr>
+          <p:cNvPr id="2" name="Image 0" descr="/sessions/adoring-ecstatic-planck/mnt/ANÁLISE, PROJETO E DESENVOLVIMENTO ÁGIL/g1126-analise-projeto-desenvolvimento-agil-guia-dos-professores/slides-gerador/assets/guia-avaliacao.jpg">    </p:cNvPr>
+          <p:cNvPicPr>
+            <a:picLocks noChangeAspect="1"/>
+          </p:cNvPicPr>
+          <p:nvPr/>
+        </p:nvPicPr>
+        <p:blipFill>
+          <a:blip r:embed="rId1"/>
+          <a:srcRect l="0" r="0" t="0" b="0"/>
+          <a:stretch/>
+        </p:blipFill>
+        <p:spPr>
+          <a:xfrm>
+            <a:off x="457200" y="320040"/>
+            <a:ext cx="8229600" cy="4503420"/>
           </a:xfrm>
           <a:prstGeom prst="rect">
             <a:avLst/>
           </a:prstGeom>
-          <a:noFill/>
-          <a:ln/>
-        </p:spPr>
-        <p:txBody>
-          <a:bodyPr wrap="square" lIns="0" tIns="0" rIns="0" bIns="0" rtlCol="0" anchor="ctr"/>
-          <a:lstStyle/>
-          <a:p>
-            <a:pPr indent="0" marL="0">
-              <a:buNone/>
-            </a:pPr>
-            <a:r>
-              <a:rPr lang="en-US" sz="3000" b="1" dirty="0">
-                <a:solidFill>
-                  <a:srgbClr val="2C5F2D"/>
-                </a:solidFill>
-                <a:latin typeface="Cambria" pitchFamily="34" charset="0"/>
-                <a:ea typeface="Cambria" pitchFamily="34" charset="-122"/>
-                <a:cs typeface="Cambria" pitchFamily="34" charset="-120"/>
-              </a:rPr>
-              <a:t>As duas vias do contrato</a:t>
-            </a:r>
-            <a:endParaRPr lang="en-US" sz="3000" dirty="0"/>
-          </a:p>
-        </p:txBody>
-      </p:sp>
-      <p:sp>
-        <p:nvSpPr>
-          <p:cNvPr id="3" name="Shape 1"/>
-          <p:cNvSpPr/>
-          <p:nvPr/>
-        </p:nvSpPr>
-        <p:spPr>
-          <a:xfrm>
-            <a:off x="457200" y="1051560"/>
-            <a:ext cx="3977640" cy="3017520"/>
-          </a:xfrm>
-          <a:prstGeom prst="roundRect">
-            <a:avLst>
-              <a:gd name="adj" fmla="val 4242"/>
-            </a:avLst>
-          </a:prstGeom>
-          <a:solidFill>
-            <a:srgbClr val="F1F5EF"/>
-          </a:solidFill>
-          <a:ln w="19050">
-            <a:solidFill>
-              <a:srgbClr val="2C5F2D"/>
-            </a:solidFill>
-            <a:prstDash val="solid"/>
-          </a:ln>
-        </p:spPr>
-      </p:sp>
-      <p:sp>
-        <p:nvSpPr>
-          <p:cNvPr id="4" name="Text 2"/>
-          <p:cNvSpPr/>
-          <p:nvPr/>
-        </p:nvSpPr>
-        <p:spPr>
-          <a:xfrm>
-            <a:off x="658368" y="1197864"/>
-            <a:ext cx="3575304" cy="365760"/>
-          </a:xfrm>
-          <a:prstGeom prst="rect">
-            <a:avLst/>
-          </a:prstGeom>
-          <a:noFill/>
-          <a:ln/>
-        </p:spPr>
-        <p:txBody>
-          <a:bodyPr wrap="square" lIns="0" tIns="0" rIns="0" bIns="0" rtlCol="0" anchor="ctr"/>
-          <a:lstStyle/>
-          <a:p>
-            <a:pPr indent="0" marL="0">
-              <a:buNone/>
-            </a:pPr>
-            <a:r>
-              <a:rPr lang="en-US" sz="1400" b="1" dirty="0">
-                <a:solidFill>
-                  <a:srgbClr val="2C5F2D"/>
-                </a:solidFill>
-                <a:latin typeface="Calibri" pitchFamily="34" charset="0"/>
-                <a:ea typeface="Calibri" pitchFamily="34" charset="-122"/>
-                <a:cs typeface="Calibri" pitchFamily="34" charset="-120"/>
-              </a:rPr>
-              <a:t>Eu me comprometo a</a:t>
-            </a:r>
-            <a:endParaRPr lang="en-US" sz="1400" dirty="0"/>
-          </a:p>
-        </p:txBody>
-      </p:sp>
-      <p:sp>
-        <p:nvSpPr>
-          <p:cNvPr id="5" name="Text 3"/>
-          <p:cNvSpPr/>
-          <p:nvPr/>
-        </p:nvSpPr>
-        <p:spPr>
-          <a:xfrm>
-            <a:off x="658368" y="1600200"/>
-            <a:ext cx="3575304" cy="2331720"/>
-          </a:xfrm>
-          <a:prstGeom prst="rect">
-            <a:avLst/>
-          </a:prstGeom>
-          <a:noFill/>
-          <a:ln/>
-        </p:spPr>
-        <p:txBody>
-          <a:bodyPr wrap="square" lIns="0" tIns="0" rIns="0" bIns="0" rtlCol="0" anchor="t"/>
-          <a:lstStyle/>
-          <a:p>
-            <a:pPr marL="342900" indent="-342900">
-              <a:spcAft>
-                <a:spcPts val="700"/>
-              </a:spcAft>
-              <a:buSzPct val="100000"/>
-              <a:buChar char="•"/>
-            </a:pPr>
-            <a:r>
-              <a:rPr lang="en-US" sz="1250" dirty="0">
-                <a:solidFill>
-                  <a:srgbClr val="36454F"/>
-                </a:solidFill>
-                <a:latin typeface="Calibri" pitchFamily="34" charset="0"/>
-                <a:ea typeface="Calibri" pitchFamily="34" charset="-122"/>
-                <a:cs typeface="Calibri" pitchFamily="34" charset="-120"/>
-              </a:rPr>
-              <a:t>Rotina previsível e horário respeitado</a:t>
-            </a:r>
-            <a:endParaRPr lang="en-US" sz="1250" dirty="0"/>
-          </a:p>
-          <a:p>
-            <a:pPr marL="342900" indent="-342900">
-              <a:spcAft>
-                <a:spcPts val="700"/>
-              </a:spcAft>
-              <a:buSzPct val="100000"/>
-              <a:buChar char="•"/>
-            </a:pPr>
-            <a:r>
-              <a:rPr lang="en-US" sz="1250" dirty="0">
-                <a:solidFill>
-                  <a:srgbClr val="36454F"/>
-                </a:solidFill>
-                <a:latin typeface="Calibri" pitchFamily="34" charset="0"/>
-                <a:ea typeface="Calibri" pitchFamily="34" charset="-122"/>
-                <a:cs typeface="Calibri" pitchFamily="34" charset="-120"/>
-              </a:rPr>
-              <a:t>Instruções e critérios claros antes da tarefa</a:t>
-            </a:r>
-            <a:endParaRPr lang="en-US" sz="1250" dirty="0"/>
-          </a:p>
-          <a:p>
-            <a:pPr marL="342900" indent="-342900">
-              <a:spcAft>
-                <a:spcPts val="700"/>
-              </a:spcAft>
-              <a:buSzPct val="100000"/>
-              <a:buChar char="•"/>
-            </a:pPr>
-            <a:r>
-              <a:rPr lang="en-US" sz="1250" dirty="0">
-                <a:solidFill>
-                  <a:srgbClr val="36454F"/>
-                </a:solidFill>
-                <a:latin typeface="Calibri" pitchFamily="34" charset="0"/>
-                <a:ea typeface="Calibri" pitchFamily="34" charset="-122"/>
-                <a:cs typeface="Calibri" pitchFamily="34" charset="-120"/>
-              </a:rPr>
-              <a:t>Critérios de correção estáveis</a:t>
-            </a:r>
-            <a:endParaRPr lang="en-US" sz="1250" dirty="0"/>
-          </a:p>
-          <a:p>
-            <a:pPr marL="342900" indent="-342900">
-              <a:spcAft>
-                <a:spcPts val="700"/>
-              </a:spcAft>
-              <a:buSzPct val="100000"/>
-              <a:buChar char="•"/>
-            </a:pPr>
-            <a:r>
-              <a:rPr lang="en-US" sz="1250" dirty="0">
-                <a:solidFill>
-                  <a:srgbClr val="36454F"/>
-                </a:solidFill>
-                <a:latin typeface="Calibri" pitchFamily="34" charset="0"/>
-                <a:ea typeface="Calibri" pitchFamily="34" charset="-122"/>
-                <a:cs typeface="Calibri" pitchFamily="34" charset="-120"/>
-              </a:rPr>
-              <a:t>Retorno próximo do momento da execução</a:t>
-            </a:r>
-            <a:endParaRPr lang="en-US" sz="1250" dirty="0"/>
-          </a:p>
-          <a:p>
-            <a:pPr marL="342900" indent="-342900">
-              <a:spcAft>
-                <a:spcPts val="700"/>
-              </a:spcAft>
-              <a:buSzPct val="100000"/>
-              <a:buChar char="•"/>
-            </a:pPr>
-            <a:r>
-              <a:rPr lang="en-US" sz="1250" dirty="0">
-                <a:solidFill>
-                  <a:srgbClr val="36454F"/>
-                </a:solidFill>
-                <a:latin typeface="Calibri" pitchFamily="34" charset="0"/>
-                <a:ea typeface="Calibri" pitchFamily="34" charset="-122"/>
-                <a:cs typeface="Calibri" pitchFamily="34" charset="-120"/>
-              </a:rPr>
-              <a:t>Circular entre os grupos e ajudar a desatolar</a:t>
-            </a:r>
-            <a:endParaRPr lang="en-US" sz="1250" dirty="0"/>
-          </a:p>
-          <a:p>
-            <a:pPr marL="342900" indent="-342900">
-              <a:spcAft>
-                <a:spcPts val="700"/>
-              </a:spcAft>
-              <a:buSzPct val="100000"/>
-              <a:buChar char="•"/>
-            </a:pPr>
-            <a:r>
-              <a:rPr lang="en-US" sz="1250" dirty="0">
-                <a:solidFill>
-                  <a:srgbClr val="36454F"/>
-                </a:solidFill>
-                <a:latin typeface="Calibri" pitchFamily="34" charset="0"/>
-                <a:ea typeface="Calibri" pitchFamily="34" charset="-122"/>
-                <a:cs typeface="Calibri" pitchFamily="34" charset="-120"/>
-              </a:rPr>
-              <a:t>Datas de prova e entrega sem mudança</a:t>
-            </a:r>
-            <a:endParaRPr lang="en-US" sz="1250" dirty="0"/>
-          </a:p>
-        </p:txBody>
-      </p:sp>
-      <p:sp>
-        <p:nvSpPr>
-          <p:cNvPr id="6" name="Shape 4"/>
-          <p:cNvSpPr/>
-          <p:nvPr/>
-        </p:nvSpPr>
-        <p:spPr>
-          <a:xfrm>
-            <a:off x="4709160" y="1051560"/>
-            <a:ext cx="3977640" cy="3017520"/>
-          </a:xfrm>
-          <a:prstGeom prst="roundRect">
-            <a:avLst>
-              <a:gd name="adj" fmla="val 4242"/>
-            </a:avLst>
-          </a:prstGeom>
-          <a:solidFill>
-            <a:srgbClr val="EAF2E6"/>
-          </a:solidFill>
-          <a:ln w="19050">
-            <a:solidFill>
-              <a:srgbClr val="97BC62"/>
-            </a:solidFill>
-            <a:prstDash val="solid"/>
-          </a:ln>
-        </p:spPr>
-      </p:sp>
-      <p:sp>
-        <p:nvSpPr>
-          <p:cNvPr id="7" name="Text 5"/>
-          <p:cNvSpPr/>
-          <p:nvPr/>
-        </p:nvSpPr>
-        <p:spPr>
-          <a:xfrm>
-            <a:off x="4910328" y="1197864"/>
-            <a:ext cx="3575304" cy="365760"/>
-          </a:xfrm>
-          <a:prstGeom prst="rect">
-            <a:avLst/>
-          </a:prstGeom>
-          <a:noFill/>
-          <a:ln/>
-        </p:spPr>
-        <p:txBody>
-          <a:bodyPr wrap="square" lIns="0" tIns="0" rIns="0" bIns="0" rtlCol="0" anchor="ctr"/>
-          <a:lstStyle/>
-          <a:p>
-            <a:pPr indent="0" marL="0">
-              <a:buNone/>
-            </a:pPr>
-            <a:r>
-              <a:rPr lang="en-US" sz="1400" b="1" dirty="0">
-                <a:solidFill>
-                  <a:srgbClr val="1F3D1F"/>
-                </a:solidFill>
-                <a:latin typeface="Calibri" pitchFamily="34" charset="0"/>
-                <a:ea typeface="Calibri" pitchFamily="34" charset="-122"/>
-                <a:cs typeface="Calibri" pitchFamily="34" charset="-120"/>
-              </a:rPr>
-              <a:t>Você se compromete a</a:t>
-            </a:r>
-            <a:endParaRPr lang="en-US" sz="1400" dirty="0"/>
-          </a:p>
-        </p:txBody>
-      </p:sp>
-      <p:sp>
-        <p:nvSpPr>
-          <p:cNvPr id="8" name="Text 6"/>
-          <p:cNvSpPr/>
-          <p:nvPr/>
-        </p:nvSpPr>
-        <p:spPr>
-          <a:xfrm>
-            <a:off x="4910328" y="1600200"/>
-            <a:ext cx="3575304" cy="2331720"/>
-          </a:xfrm>
-          <a:prstGeom prst="rect">
-            <a:avLst/>
-          </a:prstGeom>
-          <a:noFill/>
-          <a:ln/>
-        </p:spPr>
-        <p:txBody>
-          <a:bodyPr wrap="square" lIns="0" tIns="0" rIns="0" bIns="0" rtlCol="0" anchor="t"/>
-          <a:lstStyle/>
-          <a:p>
-            <a:pPr marL="342900" indent="-342900">
-              <a:spcAft>
-                <a:spcPts val="600"/>
-              </a:spcAft>
-              <a:buSzPct val="100000"/>
-              <a:buChar char="•"/>
-            </a:pPr>
-            <a:r>
-              <a:rPr lang="en-US" sz="1250" dirty="0">
-                <a:solidFill>
-                  <a:srgbClr val="36454F"/>
-                </a:solidFill>
-                <a:latin typeface="Calibri" pitchFamily="34" charset="0"/>
-                <a:ea typeface="Calibri" pitchFamily="34" charset="-122"/>
-                <a:cs typeface="Calibri" pitchFamily="34" charset="-120"/>
-              </a:rPr>
-              <a:t>Produzir em aula</a:t>
-            </a:r>
-            <a:endParaRPr lang="en-US" sz="1250" dirty="0"/>
-          </a:p>
-          <a:p>
-            <a:pPr marL="342900" indent="-342900">
-              <a:spcAft>
-                <a:spcPts val="600"/>
-              </a:spcAft>
-              <a:buSzPct val="100000"/>
-              <a:buChar char="•"/>
-            </a:pPr>
-            <a:r>
-              <a:rPr lang="en-US" sz="1250" dirty="0">
-                <a:solidFill>
-                  <a:srgbClr val="36454F"/>
-                </a:solidFill>
-                <a:latin typeface="Calibri" pitchFamily="34" charset="0"/>
-                <a:ea typeface="Calibri" pitchFamily="34" charset="-122"/>
-                <a:cs typeface="Calibri" pitchFamily="34" charset="-120"/>
-              </a:rPr>
-              <a:t>Entregar no prazo, mesmo faltando</a:t>
-            </a:r>
-            <a:endParaRPr lang="en-US" sz="1250" dirty="0"/>
-          </a:p>
-          <a:p>
-            <a:pPr marL="342900" indent="-342900">
-              <a:spcAft>
-                <a:spcPts val="600"/>
-              </a:spcAft>
-              <a:buSzPct val="100000"/>
-              <a:buChar char="•"/>
-            </a:pPr>
-            <a:r>
-              <a:rPr lang="en-US" sz="1250" dirty="0">
-                <a:solidFill>
-                  <a:srgbClr val="36454F"/>
-                </a:solidFill>
-                <a:latin typeface="Calibri" pitchFamily="34" charset="0"/>
-                <a:ea typeface="Calibri" pitchFamily="34" charset="-122"/>
-                <a:cs typeface="Calibri" pitchFamily="34" charset="-120"/>
-              </a:rPr>
-              <a:t>Construir sua consulta à mão</a:t>
-            </a:r>
-            <a:endParaRPr lang="en-US" sz="1250" dirty="0"/>
-          </a:p>
-          <a:p>
-            <a:pPr marL="342900" indent="-342900">
-              <a:spcAft>
-                <a:spcPts val="600"/>
-              </a:spcAft>
-              <a:buSzPct val="100000"/>
-              <a:buChar char="•"/>
-            </a:pPr>
-            <a:r>
-              <a:rPr lang="en-US" sz="1250" dirty="0">
-                <a:solidFill>
-                  <a:srgbClr val="36454F"/>
-                </a:solidFill>
-                <a:latin typeface="Calibri" pitchFamily="34" charset="0"/>
-                <a:ea typeface="Calibri" pitchFamily="34" charset="-122"/>
-                <a:cs typeface="Calibri" pitchFamily="34" charset="-120"/>
-              </a:rPr>
-              <a:t>Respeitar o nível de IA e registrar o uso</a:t>
-            </a:r>
-            <a:endParaRPr lang="en-US" sz="1250" dirty="0"/>
-          </a:p>
-          <a:p>
-            <a:pPr marL="342900" indent="-342900">
-              <a:spcAft>
-                <a:spcPts val="600"/>
-              </a:spcAft>
-              <a:buSzPct val="100000"/>
-              <a:buChar char="•"/>
-            </a:pPr>
-            <a:r>
-              <a:rPr lang="en-US" sz="1250" dirty="0">
-                <a:solidFill>
-                  <a:srgbClr val="36454F"/>
-                </a:solidFill>
-                <a:latin typeface="Calibri" pitchFamily="34" charset="0"/>
-                <a:ea typeface="Calibri" pitchFamily="34" charset="-122"/>
-                <a:cs typeface="Calibri" pitchFamily="34" charset="-120"/>
-              </a:rPr>
-              <a:t>Contribuir de fato no repositório</a:t>
-            </a:r>
-            <a:endParaRPr lang="en-US" sz="1250" dirty="0"/>
-          </a:p>
-          <a:p>
-            <a:pPr marL="342900" indent="-342900">
-              <a:spcAft>
-                <a:spcPts val="600"/>
-              </a:spcAft>
-              <a:buSzPct val="100000"/>
-              <a:buChar char="•"/>
-            </a:pPr>
-            <a:r>
-              <a:rPr lang="en-US" sz="1250" dirty="0">
-                <a:solidFill>
-                  <a:srgbClr val="36454F"/>
-                </a:solidFill>
-                <a:latin typeface="Calibri" pitchFamily="34" charset="0"/>
-                <a:ea typeface="Calibri" pitchFamily="34" charset="-122"/>
-                <a:cs typeface="Calibri" pitchFamily="34" charset="-120"/>
-              </a:rPr>
-              <a:t>Saber explicar, corrigir e modificar tudo</a:t>
-            </a:r>
-            <a:endParaRPr lang="en-US" sz="1250" dirty="0"/>
-          </a:p>
-          <a:p>
-            <a:pPr marL="342900" indent="-342900">
-              <a:spcAft>
-                <a:spcPts val="600"/>
-              </a:spcAft>
-              <a:buSzPct val="100000"/>
-              <a:buChar char="•"/>
-            </a:pPr>
-            <a:r>
-              <a:rPr lang="en-US" sz="1250" dirty="0">
-                <a:solidFill>
-                  <a:srgbClr val="36454F"/>
-                </a:solidFill>
-                <a:latin typeface="Calibri" pitchFamily="34" charset="0"/>
-                <a:ea typeface="Calibri" pitchFamily="34" charset="-122"/>
-                <a:cs typeface="Calibri" pitchFamily="34" charset="-120"/>
-              </a:rPr>
-              <a:t>Avisar cedo quando algo travar</a:t>
-            </a:r>
-            <a:endParaRPr lang="en-US" sz="1250" dirty="0"/>
-          </a:p>
-        </p:txBody>
-      </p:sp>
-      <p:sp>
-        <p:nvSpPr>
-          <p:cNvPr id="9" name="Text 7"/>
-          <p:cNvSpPr/>
-          <p:nvPr/>
-        </p:nvSpPr>
-        <p:spPr>
-          <a:xfrm>
-            <a:off x="457200" y="4224528"/>
-            <a:ext cx="8229600" cy="365760"/>
-          </a:xfrm>
-          <a:prstGeom prst="rect">
-            <a:avLst/>
-          </a:prstGeom>
-          <a:noFill/>
-          <a:ln/>
-        </p:spPr>
-        <p:txBody>
-          <a:bodyPr wrap="square" lIns="0" tIns="0" rIns="0" bIns="0" rtlCol="0" anchor="ctr"/>
-          <a:lstStyle/>
-          <a:p>
-            <a:pPr indent="0" marL="0">
-              <a:buNone/>
-            </a:pPr>
-            <a:r>
-              <a:rPr lang="en-US" sz="1250" i="1" dirty="0">
-                <a:solidFill>
-                  <a:srgbClr val="6E7D72"/>
-                </a:solidFill>
-                <a:latin typeface="Calibri" pitchFamily="34" charset="0"/>
-                <a:ea typeface="Calibri" pitchFamily="34" charset="-122"/>
-                <a:cs typeface="Calibri" pitchFamily="34" charset="-120"/>
-              </a:rPr>
-              <a:t>O aceite é registrado no Teams — próximo slide.</a:t>
-            </a:r>
-            <a:endParaRPr lang="en-US" sz="1250" dirty="0"/>
-          </a:p>
-        </p:txBody>
-      </p:sp>
+        </p:spPr>
+      </p:pic>
     </p:spTree>
   </p:cSld>
   <p:clrMapOvr>
@@ -5773,7 +5708,7 @@
                 <a:ea typeface="Cambria" pitchFamily="34" charset="-122"/>
                 <a:cs typeface="Cambria" pitchFamily="34" charset="-120"/>
               </a:rPr>
-              <a:t>Sua primeira entrega: o aceite</a:t>
+              <a:t>As duas vias do contrato</a:t>
             </a:r>
             <a:endParaRPr lang="en-US" sz="3000" dirty="0"/>
           </a:p>
@@ -5781,14 +5716,41 @@
       </p:sp>
       <p:sp>
         <p:nvSpPr>
-          <p:cNvPr id="3" name="Text 1"/>
-          <p:cNvSpPr/>
-          <p:nvPr/>
-        </p:nvSpPr>
-        <p:spPr>
-          <a:xfrm>
-            <a:off x="457200" y="960120"/>
-            <a:ext cx="8229600" cy="685800"/>
+          <p:cNvPr id="3" name="Shape 1"/>
+          <p:cNvSpPr/>
+          <p:nvPr/>
+        </p:nvSpPr>
+        <p:spPr>
+          <a:xfrm>
+            <a:off x="457200" y="1051560"/>
+            <a:ext cx="3977640" cy="3017520"/>
+          </a:xfrm>
+          <a:prstGeom prst="roundRect">
+            <a:avLst>
+              <a:gd name="adj" fmla="val 4242"/>
+            </a:avLst>
+          </a:prstGeom>
+          <a:solidFill>
+            <a:srgbClr val="F1F5EF"/>
+          </a:solidFill>
+          <a:ln w="19050">
+            <a:solidFill>
+              <a:srgbClr val="2C5F2D"/>
+            </a:solidFill>
+            <a:prstDash val="solid"/>
+          </a:ln>
+        </p:spPr>
+      </p:sp>
+      <p:sp>
+        <p:nvSpPr>
+          <p:cNvPr id="4" name="Text 2"/>
+          <p:cNvSpPr/>
+          <p:nvPr/>
+        </p:nvSpPr>
+        <p:spPr>
+          <a:xfrm>
+            <a:off x="658368" y="1197864"/>
+            <a:ext cx="3575304" cy="365760"/>
           </a:xfrm>
           <a:prstGeom prst="rect">
             <a:avLst/>
@@ -5804,7 +5766,50 @@
               <a:buNone/>
             </a:pPr>
             <a:r>
-              <a:rPr lang="en-US" sz="1600" dirty="0">
+              <a:rPr lang="en-US" sz="1400" b="1" dirty="0">
+                <a:solidFill>
+                  <a:srgbClr val="2C5F2D"/>
+                </a:solidFill>
+                <a:latin typeface="Calibri" pitchFamily="34" charset="0"/>
+                <a:ea typeface="Calibri" pitchFamily="34" charset="-122"/>
+                <a:cs typeface="Calibri" pitchFamily="34" charset="-120"/>
+              </a:rPr>
+              <a:t>Eu me comprometo a</a:t>
+            </a:r>
+            <a:endParaRPr lang="en-US" sz="1400" dirty="0"/>
+          </a:p>
+        </p:txBody>
+      </p:sp>
+      <p:sp>
+        <p:nvSpPr>
+          <p:cNvPr id="5" name="Text 3"/>
+          <p:cNvSpPr/>
+          <p:nvPr/>
+        </p:nvSpPr>
+        <p:spPr>
+          <a:xfrm>
+            <a:off x="658368" y="1600200"/>
+            <a:ext cx="3575304" cy="2331720"/>
+          </a:xfrm>
+          <a:prstGeom prst="rect">
+            <a:avLst/>
+          </a:prstGeom>
+          <a:noFill/>
+          <a:ln/>
+        </p:spPr>
+        <p:txBody>
+          <a:bodyPr wrap="square" lIns="0" tIns="0" rIns="0" bIns="0" rtlCol="0" anchor="t"/>
+          <a:lstStyle/>
+          <a:p>
+            <a:pPr marL="342900" indent="-342900">
+              <a:spcAft>
+                <a:spcPts val="700"/>
+              </a:spcAft>
+              <a:buSzPct val="100000"/>
+              <a:buChar char="•"/>
+            </a:pPr>
+            <a:r>
+              <a:rPr lang="en-US" sz="1250" dirty="0">
                 <a:solidFill>
                   <a:srgbClr val="36454F"/>
                 </a:solidFill>
@@ -5812,30 +5817,135 @@
                 <a:ea typeface="Calibri" pitchFamily="34" charset="-122"/>
                 <a:cs typeface="Calibri" pitchFamily="34" charset="-120"/>
               </a:rPr>
-              <a:t>No Teams, atividade "Aceite do contrato pedagógico". Ao entregar, você aceita o contrato — não há assinatura em papel.</a:t>
-            </a:r>
-            <a:endParaRPr lang="en-US" sz="1600" dirty="0"/>
-          </a:p>
-        </p:txBody>
-      </p:sp>
-      <p:sp>
-        <p:nvSpPr>
-          <p:cNvPr id="4" name="Shape 2"/>
-          <p:cNvSpPr/>
-          <p:nvPr/>
-        </p:nvSpPr>
-        <p:spPr>
-          <a:xfrm>
-            <a:off x="457200" y="1828800"/>
-            <a:ext cx="8229600" cy="749808"/>
+              <a:t>Rotina previsível e horário respeitado</a:t>
+            </a:r>
+            <a:endParaRPr lang="en-US" sz="1250" dirty="0"/>
+          </a:p>
+          <a:p>
+            <a:pPr marL="342900" indent="-342900">
+              <a:spcAft>
+                <a:spcPts val="700"/>
+              </a:spcAft>
+              <a:buSzPct val="100000"/>
+              <a:buChar char="•"/>
+            </a:pPr>
+            <a:r>
+              <a:rPr lang="en-US" sz="1250" dirty="0">
+                <a:solidFill>
+                  <a:srgbClr val="36454F"/>
+                </a:solidFill>
+                <a:latin typeface="Calibri" pitchFamily="34" charset="0"/>
+                <a:ea typeface="Calibri" pitchFamily="34" charset="-122"/>
+                <a:cs typeface="Calibri" pitchFamily="34" charset="-120"/>
+              </a:rPr>
+              <a:t>Instruções e critérios claros antes da tarefa</a:t>
+            </a:r>
+            <a:endParaRPr lang="en-US" sz="1250" dirty="0"/>
+          </a:p>
+          <a:p>
+            <a:pPr marL="342900" indent="-342900">
+              <a:spcAft>
+                <a:spcPts val="700"/>
+              </a:spcAft>
+              <a:buSzPct val="100000"/>
+              <a:buChar char="•"/>
+            </a:pPr>
+            <a:r>
+              <a:rPr lang="en-US" sz="1250" dirty="0">
+                <a:solidFill>
+                  <a:srgbClr val="36454F"/>
+                </a:solidFill>
+                <a:latin typeface="Calibri" pitchFamily="34" charset="0"/>
+                <a:ea typeface="Calibri" pitchFamily="34" charset="-122"/>
+                <a:cs typeface="Calibri" pitchFamily="34" charset="-120"/>
+              </a:rPr>
+              <a:t>Critérios de correção estáveis</a:t>
+            </a:r>
+            <a:endParaRPr lang="en-US" sz="1250" dirty="0"/>
+          </a:p>
+          <a:p>
+            <a:pPr marL="342900" indent="-342900">
+              <a:spcAft>
+                <a:spcPts val="700"/>
+              </a:spcAft>
+              <a:buSzPct val="100000"/>
+              <a:buChar char="•"/>
+            </a:pPr>
+            <a:r>
+              <a:rPr lang="en-US" sz="1250" dirty="0">
+                <a:solidFill>
+                  <a:srgbClr val="36454F"/>
+                </a:solidFill>
+                <a:latin typeface="Calibri" pitchFamily="34" charset="0"/>
+                <a:ea typeface="Calibri" pitchFamily="34" charset="-122"/>
+                <a:cs typeface="Calibri" pitchFamily="34" charset="-120"/>
+              </a:rPr>
+              <a:t>Retorno próximo do momento da execução</a:t>
+            </a:r>
+            <a:endParaRPr lang="en-US" sz="1250" dirty="0"/>
+          </a:p>
+          <a:p>
+            <a:pPr marL="342900" indent="-342900">
+              <a:spcAft>
+                <a:spcPts val="700"/>
+              </a:spcAft>
+              <a:buSzPct val="100000"/>
+              <a:buChar char="•"/>
+            </a:pPr>
+            <a:r>
+              <a:rPr lang="en-US" sz="1250" dirty="0">
+                <a:solidFill>
+                  <a:srgbClr val="36454F"/>
+                </a:solidFill>
+                <a:latin typeface="Calibri" pitchFamily="34" charset="0"/>
+                <a:ea typeface="Calibri" pitchFamily="34" charset="-122"/>
+                <a:cs typeface="Calibri" pitchFamily="34" charset="-120"/>
+              </a:rPr>
+              <a:t>Circular entre os grupos e ajudar a desatolar</a:t>
+            </a:r>
+            <a:endParaRPr lang="en-US" sz="1250" dirty="0"/>
+          </a:p>
+          <a:p>
+            <a:pPr marL="342900" indent="-342900">
+              <a:spcAft>
+                <a:spcPts val="700"/>
+              </a:spcAft>
+              <a:buSzPct val="100000"/>
+              <a:buChar char="•"/>
+            </a:pPr>
+            <a:r>
+              <a:rPr lang="en-US" sz="1250" dirty="0">
+                <a:solidFill>
+                  <a:srgbClr val="36454F"/>
+                </a:solidFill>
+                <a:latin typeface="Calibri" pitchFamily="34" charset="0"/>
+                <a:ea typeface="Calibri" pitchFamily="34" charset="-122"/>
+                <a:cs typeface="Calibri" pitchFamily="34" charset="-120"/>
+              </a:rPr>
+              <a:t>Datas de prova e entrega sem mudança</a:t>
+            </a:r>
+            <a:endParaRPr lang="en-US" sz="1250" dirty="0"/>
+          </a:p>
+        </p:txBody>
+      </p:sp>
+      <p:sp>
+        <p:nvSpPr>
+          <p:cNvPr id="6" name="Shape 4"/>
+          <p:cNvSpPr/>
+          <p:nvPr/>
+        </p:nvSpPr>
+        <p:spPr>
+          <a:xfrm>
+            <a:off x="4709160" y="1051560"/>
+            <a:ext cx="3977640" cy="3017520"/>
           </a:xfrm>
           <a:prstGeom prst="roundRect">
             <a:avLst>
-              <a:gd name="adj" fmla="val 14634"/>
+              <a:gd name="adj" fmla="val 4242"/>
             </a:avLst>
           </a:prstGeom>
           <a:solidFill>
-            <a:srgbClr val="F1F5EF"/>
+            <a:srgbClr val="EAF2E6"/>
           </a:solidFill>
           <a:ln w="19050">
             <a:solidFill>
@@ -5847,73 +5957,14 @@
       </p:sp>
       <p:sp>
         <p:nvSpPr>
-          <p:cNvPr id="5" name="Shape 3"/>
-          <p:cNvSpPr/>
-          <p:nvPr/>
-        </p:nvSpPr>
-        <p:spPr>
-          <a:xfrm>
-            <a:off x="658368" y="2011680"/>
-            <a:ext cx="384048" cy="384048"/>
-          </a:xfrm>
-          <a:prstGeom prst="ellipse">
-            <a:avLst/>
-          </a:prstGeom>
-          <a:solidFill>
-            <a:srgbClr val="2C5F2D"/>
-          </a:solidFill>
-          <a:ln/>
-        </p:spPr>
-      </p:sp>
-      <p:sp>
-        <p:nvSpPr>
-          <p:cNvPr id="6" name="Text 4"/>
-          <p:cNvSpPr/>
-          <p:nvPr/>
-        </p:nvSpPr>
-        <p:spPr>
-          <a:xfrm>
-            <a:off x="658368" y="2011680"/>
-            <a:ext cx="384048" cy="384048"/>
-          </a:xfrm>
-          <a:prstGeom prst="rect">
-            <a:avLst/>
-          </a:prstGeom>
-          <a:noFill/>
-          <a:ln/>
-        </p:spPr>
-        <p:txBody>
-          <a:bodyPr wrap="square" lIns="0" tIns="0" rIns="0" bIns="0" rtlCol="0" anchor="ctr"/>
-          <a:lstStyle/>
-          <a:p>
-            <a:pPr algn="ctr" indent="0" marL="0">
-              <a:buNone/>
-            </a:pPr>
-            <a:r>
-              <a:rPr lang="en-US" sz="1500" b="1" dirty="0">
-                <a:solidFill>
-                  <a:srgbClr val="FFFFFF"/>
-                </a:solidFill>
-                <a:latin typeface="Calibri" pitchFamily="34" charset="0"/>
-                <a:ea typeface="Calibri" pitchFamily="34" charset="-122"/>
-                <a:cs typeface="Calibri" pitchFamily="34" charset="-120"/>
-              </a:rPr>
-              <a:t>1</a:t>
-            </a:r>
-            <a:endParaRPr lang="en-US" sz="1500" dirty="0"/>
-          </a:p>
-        </p:txBody>
-      </p:sp>
-      <p:sp>
-        <p:nvSpPr>
           <p:cNvPr id="7" name="Text 5"/>
           <p:cNvSpPr/>
           <p:nvPr/>
         </p:nvSpPr>
         <p:spPr>
           <a:xfrm>
-            <a:off x="1234440" y="1938528"/>
-            <a:ext cx="2834640" cy="292608"/>
+            <a:off x="4910328" y="1197864"/>
+            <a:ext cx="3575304" cy="365760"/>
           </a:xfrm>
           <a:prstGeom prst="rect">
             <a:avLst/>
@@ -5931,13 +5982,13 @@
             <a:r>
               <a:rPr lang="en-US" sz="1400" b="1" dirty="0">
                 <a:solidFill>
-                  <a:srgbClr val="2C5F2D"/>
-                </a:solidFill>
-                <a:latin typeface="Calibri" pitchFamily="34" charset="0"/>
-                <a:ea typeface="Calibri" pitchFamily="34" charset="-122"/>
-                <a:cs typeface="Calibri" pitchFamily="34" charset="-120"/>
-              </a:rPr>
-              <a:t>Aceite do contrato</a:t>
+                  <a:srgbClr val="1F3D1F"/>
+                </a:solidFill>
+                <a:latin typeface="Calibri" pitchFamily="34" charset="0"/>
+                <a:ea typeface="Calibri" pitchFamily="34" charset="-122"/>
+                <a:cs typeface="Calibri" pitchFamily="34" charset="-120"/>
+              </a:rPr>
+              <a:t>Você se compromete a</a:t>
             </a:r>
             <a:endParaRPr lang="en-US" sz="1400" dirty="0"/>
           </a:p>
@@ -5951,8 +6002,177 @@
         </p:nvSpPr>
         <p:spPr>
           <a:xfrm>
-            <a:off x="1234440" y="2231136"/>
-            <a:ext cx="7223760" cy="274320"/>
+            <a:off x="4910328" y="1600200"/>
+            <a:ext cx="3575304" cy="2331720"/>
+          </a:xfrm>
+          <a:prstGeom prst="rect">
+            <a:avLst/>
+          </a:prstGeom>
+          <a:noFill/>
+          <a:ln/>
+        </p:spPr>
+        <p:txBody>
+          <a:bodyPr wrap="square" lIns="0" tIns="0" rIns="0" bIns="0" rtlCol="0" anchor="t"/>
+          <a:lstStyle/>
+          <a:p>
+            <a:pPr marL="342900" indent="-342900">
+              <a:spcAft>
+                <a:spcPts val="600"/>
+              </a:spcAft>
+              <a:buSzPct val="100000"/>
+              <a:buChar char="•"/>
+            </a:pPr>
+            <a:r>
+              <a:rPr lang="en-US" sz="1250" dirty="0">
+                <a:solidFill>
+                  <a:srgbClr val="36454F"/>
+                </a:solidFill>
+                <a:latin typeface="Calibri" pitchFamily="34" charset="0"/>
+                <a:ea typeface="Calibri" pitchFamily="34" charset="-122"/>
+                <a:cs typeface="Calibri" pitchFamily="34" charset="-120"/>
+              </a:rPr>
+              <a:t>Produzir em aula</a:t>
+            </a:r>
+            <a:endParaRPr lang="en-US" sz="1250" dirty="0"/>
+          </a:p>
+          <a:p>
+            <a:pPr marL="342900" indent="-342900">
+              <a:spcAft>
+                <a:spcPts val="600"/>
+              </a:spcAft>
+              <a:buSzPct val="100000"/>
+              <a:buChar char="•"/>
+            </a:pPr>
+            <a:r>
+              <a:rPr lang="en-US" sz="1250" dirty="0">
+                <a:solidFill>
+                  <a:srgbClr val="36454F"/>
+                </a:solidFill>
+                <a:latin typeface="Calibri" pitchFamily="34" charset="0"/>
+                <a:ea typeface="Calibri" pitchFamily="34" charset="-122"/>
+                <a:cs typeface="Calibri" pitchFamily="34" charset="-120"/>
+              </a:rPr>
+              <a:t>Entregar no prazo, mesmo faltando</a:t>
+            </a:r>
+            <a:endParaRPr lang="en-US" sz="1250" dirty="0"/>
+          </a:p>
+          <a:p>
+            <a:pPr marL="342900" indent="-342900">
+              <a:spcAft>
+                <a:spcPts val="600"/>
+              </a:spcAft>
+              <a:buSzPct val="100000"/>
+              <a:buChar char="•"/>
+            </a:pPr>
+            <a:r>
+              <a:rPr lang="en-US" sz="1250" dirty="0">
+                <a:solidFill>
+                  <a:srgbClr val="36454F"/>
+                </a:solidFill>
+                <a:latin typeface="Calibri" pitchFamily="34" charset="0"/>
+                <a:ea typeface="Calibri" pitchFamily="34" charset="-122"/>
+                <a:cs typeface="Calibri" pitchFamily="34" charset="-120"/>
+              </a:rPr>
+              <a:t>Construir sua consulta à mão</a:t>
+            </a:r>
+            <a:endParaRPr lang="en-US" sz="1250" dirty="0"/>
+          </a:p>
+          <a:p>
+            <a:pPr marL="342900" indent="-342900">
+              <a:spcAft>
+                <a:spcPts val="600"/>
+              </a:spcAft>
+              <a:buSzPct val="100000"/>
+              <a:buChar char="•"/>
+            </a:pPr>
+            <a:r>
+              <a:rPr lang="en-US" sz="1250" dirty="0">
+                <a:solidFill>
+                  <a:srgbClr val="36454F"/>
+                </a:solidFill>
+                <a:latin typeface="Calibri" pitchFamily="34" charset="0"/>
+                <a:ea typeface="Calibri" pitchFamily="34" charset="-122"/>
+                <a:cs typeface="Calibri" pitchFamily="34" charset="-120"/>
+              </a:rPr>
+              <a:t>Respeitar o nível de IA e registrar o uso</a:t>
+            </a:r>
+            <a:endParaRPr lang="en-US" sz="1250" dirty="0"/>
+          </a:p>
+          <a:p>
+            <a:pPr marL="342900" indent="-342900">
+              <a:spcAft>
+                <a:spcPts val="600"/>
+              </a:spcAft>
+              <a:buSzPct val="100000"/>
+              <a:buChar char="•"/>
+            </a:pPr>
+            <a:r>
+              <a:rPr lang="en-US" sz="1250" dirty="0">
+                <a:solidFill>
+                  <a:srgbClr val="36454F"/>
+                </a:solidFill>
+                <a:latin typeface="Calibri" pitchFamily="34" charset="0"/>
+                <a:ea typeface="Calibri" pitchFamily="34" charset="-122"/>
+                <a:cs typeface="Calibri" pitchFamily="34" charset="-120"/>
+              </a:rPr>
+              <a:t>Contribuir de fato no repositório</a:t>
+            </a:r>
+            <a:endParaRPr lang="en-US" sz="1250" dirty="0"/>
+          </a:p>
+          <a:p>
+            <a:pPr marL="342900" indent="-342900">
+              <a:spcAft>
+                <a:spcPts val="600"/>
+              </a:spcAft>
+              <a:buSzPct val="100000"/>
+              <a:buChar char="•"/>
+            </a:pPr>
+            <a:r>
+              <a:rPr lang="en-US" sz="1250" dirty="0">
+                <a:solidFill>
+                  <a:srgbClr val="36454F"/>
+                </a:solidFill>
+                <a:latin typeface="Calibri" pitchFamily="34" charset="0"/>
+                <a:ea typeface="Calibri" pitchFamily="34" charset="-122"/>
+                <a:cs typeface="Calibri" pitchFamily="34" charset="-120"/>
+              </a:rPr>
+              <a:t>Saber explicar, corrigir e modificar tudo</a:t>
+            </a:r>
+            <a:endParaRPr lang="en-US" sz="1250" dirty="0"/>
+          </a:p>
+          <a:p>
+            <a:pPr marL="342900" indent="-342900">
+              <a:spcAft>
+                <a:spcPts val="600"/>
+              </a:spcAft>
+              <a:buSzPct val="100000"/>
+              <a:buChar char="•"/>
+            </a:pPr>
+            <a:r>
+              <a:rPr lang="en-US" sz="1250" dirty="0">
+                <a:solidFill>
+                  <a:srgbClr val="36454F"/>
+                </a:solidFill>
+                <a:latin typeface="Calibri" pitchFamily="34" charset="0"/>
+                <a:ea typeface="Calibri" pitchFamily="34" charset="-122"/>
+                <a:cs typeface="Calibri" pitchFamily="34" charset="-120"/>
+              </a:rPr>
+              <a:t>Avisar cedo quando algo travar</a:t>
+            </a:r>
+            <a:endParaRPr lang="en-US" sz="1250" dirty="0"/>
+          </a:p>
+        </p:txBody>
+      </p:sp>
+      <p:sp>
+        <p:nvSpPr>
+          <p:cNvPr id="9" name="Text 7"/>
+          <p:cNvSpPr/>
+          <p:nvPr/>
+        </p:nvSpPr>
+        <p:spPr>
+          <a:xfrm>
+            <a:off x="457200" y="4224528"/>
+            <a:ext cx="8229600" cy="365760"/>
           </a:xfrm>
           <a:prstGeom prst="rect">
             <a:avLst/>
@@ -5968,382 +6188,15 @@
               <a:buNone/>
             </a:pPr>
             <a:r>
-              <a:rPr lang="en-US" sz="1250" dirty="0">
-                <a:solidFill>
-                  <a:srgbClr val="36454F"/>
-                </a:solidFill>
-                <a:latin typeface="Calibri" pitchFamily="34" charset="0"/>
-                <a:ea typeface="Calibri" pitchFamily="34" charset="-122"/>
-                <a:cs typeface="Calibri" pitchFamily="34" charset="-120"/>
-              </a:rPr>
-              <a:t>A própria entrega registra que você leu e aceita</a:t>
-            </a:r>
-            <a:endParaRPr lang="en-US" sz="1250" dirty="0"/>
-          </a:p>
-        </p:txBody>
-      </p:sp>
-      <p:sp>
-        <p:nvSpPr>
-          <p:cNvPr id="9" name="Shape 7"/>
-          <p:cNvSpPr/>
-          <p:nvPr/>
-        </p:nvSpPr>
-        <p:spPr>
-          <a:xfrm>
-            <a:off x="457200" y="2706624"/>
-            <a:ext cx="8229600" cy="749808"/>
-          </a:xfrm>
-          <a:prstGeom prst="roundRect">
-            <a:avLst>
-              <a:gd name="adj" fmla="val 14634"/>
-            </a:avLst>
-          </a:prstGeom>
-          <a:solidFill>
-            <a:srgbClr val="F1F5EF"/>
-          </a:solidFill>
-          <a:ln w="19050">
-            <a:solidFill>
-              <a:srgbClr val="97BC62"/>
-            </a:solidFill>
-            <a:prstDash val="solid"/>
-          </a:ln>
-        </p:spPr>
-      </p:sp>
-      <p:sp>
-        <p:nvSpPr>
-          <p:cNvPr id="10" name="Shape 8"/>
-          <p:cNvSpPr/>
-          <p:nvPr/>
-        </p:nvSpPr>
-        <p:spPr>
-          <a:xfrm>
-            <a:off x="658368" y="2889504"/>
-            <a:ext cx="384048" cy="384048"/>
-          </a:xfrm>
-          <a:prstGeom prst="ellipse">
-            <a:avLst/>
-          </a:prstGeom>
-          <a:solidFill>
-            <a:srgbClr val="2C5F2D"/>
-          </a:solidFill>
-          <a:ln/>
-        </p:spPr>
-      </p:sp>
-      <p:sp>
-        <p:nvSpPr>
-          <p:cNvPr id="11" name="Text 9"/>
-          <p:cNvSpPr/>
-          <p:nvPr/>
-        </p:nvSpPr>
-        <p:spPr>
-          <a:xfrm>
-            <a:off x="658368" y="2889504"/>
-            <a:ext cx="384048" cy="384048"/>
-          </a:xfrm>
-          <a:prstGeom prst="rect">
-            <a:avLst/>
-          </a:prstGeom>
-          <a:noFill/>
-          <a:ln/>
-        </p:spPr>
-        <p:txBody>
-          <a:bodyPr wrap="square" lIns="0" tIns="0" rIns="0" bIns="0" rtlCol="0" anchor="ctr"/>
-          <a:lstStyle/>
-          <a:p>
-            <a:pPr algn="ctr" indent="0" marL="0">
-              <a:buNone/>
-            </a:pPr>
-            <a:r>
-              <a:rPr lang="en-US" sz="1500" b="1" dirty="0">
-                <a:solidFill>
-                  <a:srgbClr val="FFFFFF"/>
-                </a:solidFill>
-                <a:latin typeface="Calibri" pitchFamily="34" charset="0"/>
-                <a:ea typeface="Calibri" pitchFamily="34" charset="-122"/>
-                <a:cs typeface="Calibri" pitchFamily="34" charset="-120"/>
-              </a:rPr>
-              <a:t>2</a:t>
-            </a:r>
-            <a:endParaRPr lang="en-US" sz="1500" dirty="0"/>
-          </a:p>
-        </p:txBody>
-      </p:sp>
-      <p:sp>
-        <p:nvSpPr>
-          <p:cNvPr id="12" name="Text 10"/>
-          <p:cNvSpPr/>
-          <p:nvPr/>
-        </p:nvSpPr>
-        <p:spPr>
-          <a:xfrm>
-            <a:off x="1234440" y="2816352"/>
-            <a:ext cx="2834640" cy="292608"/>
-          </a:xfrm>
-          <a:prstGeom prst="rect">
-            <a:avLst/>
-          </a:prstGeom>
-          <a:noFill/>
-          <a:ln/>
-        </p:spPr>
-        <p:txBody>
-          <a:bodyPr wrap="square" lIns="0" tIns="0" rIns="0" bIns="0" rtlCol="0" anchor="ctr"/>
-          <a:lstStyle/>
-          <a:p>
-            <a:pPr indent="0" marL="0">
-              <a:buNone/>
-            </a:pPr>
-            <a:r>
-              <a:rPr lang="en-US" sz="1400" b="1" dirty="0">
-                <a:solidFill>
-                  <a:srgbClr val="2C5F2D"/>
-                </a:solidFill>
-                <a:latin typeface="Calibri" pitchFamily="34" charset="0"/>
-                <a:ea typeface="Calibri" pitchFamily="34" charset="-122"/>
-                <a:cs typeface="Calibri" pitchFamily="34" charset="-120"/>
-              </a:rPr>
-              <a:t>Membros do time</a:t>
-            </a:r>
-            <a:endParaRPr lang="en-US" sz="1400" dirty="0"/>
-          </a:p>
-        </p:txBody>
-      </p:sp>
-      <p:sp>
-        <p:nvSpPr>
-          <p:cNvPr id="13" name="Text 11"/>
-          <p:cNvSpPr/>
-          <p:nvPr/>
-        </p:nvSpPr>
-        <p:spPr>
-          <a:xfrm>
-            <a:off x="1234440" y="3108960"/>
-            <a:ext cx="7223760" cy="274320"/>
-          </a:xfrm>
-          <a:prstGeom prst="rect">
-            <a:avLst/>
-          </a:prstGeom>
-          <a:noFill/>
-          <a:ln/>
-        </p:spPr>
-        <p:txBody>
-          <a:bodyPr wrap="square" lIns="0" tIns="0" rIns="0" bIns="0" rtlCol="0" anchor="ctr"/>
-          <a:lstStyle/>
-          <a:p>
-            <a:pPr indent="0" marL="0">
-              <a:buNone/>
-            </a:pPr>
-            <a:r>
-              <a:rPr lang="en-US" sz="1250" dirty="0">
-                <a:solidFill>
-                  <a:srgbClr val="36454F"/>
-                </a:solidFill>
-                <a:latin typeface="Calibri" pitchFamily="34" charset="0"/>
-                <a:ea typeface="Calibri" pitchFamily="34" charset="-122"/>
-                <a:cs typeface="Calibri" pitchFamily="34" charset="-120"/>
-              </a:rPr>
-              <a:t>3 a 5 pessoas, nomes completos</a:t>
-            </a:r>
-            <a:endParaRPr lang="en-US" sz="1250" dirty="0"/>
-          </a:p>
-        </p:txBody>
-      </p:sp>
-      <p:sp>
-        <p:nvSpPr>
-          <p:cNvPr id="14" name="Shape 12"/>
-          <p:cNvSpPr/>
-          <p:nvPr/>
-        </p:nvSpPr>
-        <p:spPr>
-          <a:xfrm>
-            <a:off x="457200" y="3584448"/>
-            <a:ext cx="8229600" cy="749808"/>
-          </a:xfrm>
-          <a:prstGeom prst="roundRect">
-            <a:avLst>
-              <a:gd name="adj" fmla="val 14634"/>
-            </a:avLst>
-          </a:prstGeom>
-          <a:solidFill>
-            <a:srgbClr val="F1F5EF"/>
-          </a:solidFill>
-          <a:ln w="19050">
-            <a:solidFill>
-              <a:srgbClr val="97BC62"/>
-            </a:solidFill>
-            <a:prstDash val="solid"/>
-          </a:ln>
-        </p:spPr>
-      </p:sp>
-      <p:sp>
-        <p:nvSpPr>
-          <p:cNvPr id="15" name="Shape 13"/>
-          <p:cNvSpPr/>
-          <p:nvPr/>
-        </p:nvSpPr>
-        <p:spPr>
-          <a:xfrm>
-            <a:off x="658368" y="3767328"/>
-            <a:ext cx="384048" cy="384048"/>
-          </a:xfrm>
-          <a:prstGeom prst="ellipse">
-            <a:avLst/>
-          </a:prstGeom>
-          <a:solidFill>
-            <a:srgbClr val="2C5F2D"/>
-          </a:solidFill>
-          <a:ln/>
-        </p:spPr>
-      </p:sp>
-      <p:sp>
-        <p:nvSpPr>
-          <p:cNvPr id="16" name="Text 14"/>
-          <p:cNvSpPr/>
-          <p:nvPr/>
-        </p:nvSpPr>
-        <p:spPr>
-          <a:xfrm>
-            <a:off x="658368" y="3767328"/>
-            <a:ext cx="384048" cy="384048"/>
-          </a:xfrm>
-          <a:prstGeom prst="rect">
-            <a:avLst/>
-          </a:prstGeom>
-          <a:noFill/>
-          <a:ln/>
-        </p:spPr>
-        <p:txBody>
-          <a:bodyPr wrap="square" lIns="0" tIns="0" rIns="0" bIns="0" rtlCol="0" anchor="ctr"/>
-          <a:lstStyle/>
-          <a:p>
-            <a:pPr algn="ctr" indent="0" marL="0">
-              <a:buNone/>
-            </a:pPr>
-            <a:r>
-              <a:rPr lang="en-US" sz="1500" b="1" dirty="0">
-                <a:solidFill>
-                  <a:srgbClr val="FFFFFF"/>
-                </a:solidFill>
-                <a:latin typeface="Calibri" pitchFamily="34" charset="0"/>
-                <a:ea typeface="Calibri" pitchFamily="34" charset="-122"/>
-                <a:cs typeface="Calibri" pitchFamily="34" charset="-120"/>
-              </a:rPr>
-              <a:t>3</a:t>
-            </a:r>
-            <a:endParaRPr lang="en-US" sz="1500" dirty="0"/>
-          </a:p>
-        </p:txBody>
-      </p:sp>
-      <p:sp>
-        <p:nvSpPr>
-          <p:cNvPr id="17" name="Text 15"/>
-          <p:cNvSpPr/>
-          <p:nvPr/>
-        </p:nvSpPr>
-        <p:spPr>
-          <a:xfrm>
-            <a:off x="1234440" y="3694176"/>
-            <a:ext cx="2834640" cy="292608"/>
-          </a:xfrm>
-          <a:prstGeom prst="rect">
-            <a:avLst/>
-          </a:prstGeom>
-          <a:noFill/>
-          <a:ln/>
-        </p:spPr>
-        <p:txBody>
-          <a:bodyPr wrap="square" lIns="0" tIns="0" rIns="0" bIns="0" rtlCol="0" anchor="ctr"/>
-          <a:lstStyle/>
-          <a:p>
-            <a:pPr indent="0" marL="0">
-              <a:buNone/>
-            </a:pPr>
-            <a:r>
-              <a:rPr lang="en-US" sz="1400" b="1" dirty="0">
-                <a:solidFill>
-                  <a:srgbClr val="2C5F2D"/>
-                </a:solidFill>
-                <a:latin typeface="Calibri" pitchFamily="34" charset="0"/>
-                <a:ea typeface="Calibri" pitchFamily="34" charset="-122"/>
-                <a:cs typeface="Calibri" pitchFamily="34" charset="-120"/>
-              </a:rPr>
-              <a:t>Repositório do grupo</a:t>
-            </a:r>
-            <a:endParaRPr lang="en-US" sz="1400" dirty="0"/>
-          </a:p>
-        </p:txBody>
-      </p:sp>
-      <p:sp>
-        <p:nvSpPr>
-          <p:cNvPr id="18" name="Text 16"/>
-          <p:cNvSpPr/>
-          <p:nvPr/>
-        </p:nvSpPr>
-        <p:spPr>
-          <a:xfrm>
-            <a:off x="1234440" y="3986784"/>
-            <a:ext cx="7223760" cy="274320"/>
-          </a:xfrm>
-          <a:prstGeom prst="rect">
-            <a:avLst/>
-          </a:prstGeom>
-          <a:noFill/>
-          <a:ln/>
-        </p:spPr>
-        <p:txBody>
-          <a:bodyPr wrap="square" lIns="0" tIns="0" rIns="0" bIns="0" rtlCol="0" anchor="ctr"/>
-          <a:lstStyle/>
-          <a:p>
-            <a:pPr indent="0" marL="0">
-              <a:buNone/>
-            </a:pPr>
-            <a:r>
-              <a:rPr lang="en-US" sz="1250" dirty="0">
-                <a:solidFill>
-                  <a:srgbClr val="36454F"/>
-                </a:solidFill>
-                <a:latin typeface="Calibri" pitchFamily="34" charset="0"/>
-                <a:ea typeface="Calibri" pitchFamily="34" charset="-122"/>
-                <a:cs typeface="Calibri" pitchFamily="34" charset="-120"/>
-              </a:rPr>
-              <a:t>Link do repositório público no GitHub</a:t>
-            </a:r>
-            <a:endParaRPr lang="en-US" sz="1250" dirty="0"/>
-          </a:p>
-        </p:txBody>
-      </p:sp>
-      <p:sp>
-        <p:nvSpPr>
-          <p:cNvPr id="19" name="Text 17"/>
-          <p:cNvSpPr/>
-          <p:nvPr/>
-        </p:nvSpPr>
-        <p:spPr>
-          <a:xfrm>
-            <a:off x="457200" y="4315968"/>
-            <a:ext cx="8229600" cy="411480"/>
-          </a:xfrm>
-          <a:prstGeom prst="rect">
-            <a:avLst/>
-          </a:prstGeom>
-          <a:noFill/>
-          <a:ln/>
-        </p:spPr>
-        <p:txBody>
-          <a:bodyPr wrap="square" lIns="0" tIns="0" rIns="0" bIns="0" rtlCol="0" anchor="ctr"/>
-          <a:lstStyle/>
-          <a:p>
-            <a:pPr indent="0" marL="0">
-              <a:buNone/>
-            </a:pPr>
-            <a:r>
-              <a:rPr lang="en-US" sz="1250" b="1" dirty="0">
-                <a:solidFill>
-                  <a:srgbClr val="2C5F2D"/>
-                </a:solidFill>
-                <a:latin typeface="Calibri" pitchFamily="34" charset="0"/>
-                <a:ea typeface="Calibri" pitchFamily="34" charset="-122"/>
-                <a:cs typeface="Calibri" pitchFamily="34" charset="-120"/>
-              </a:rPr>
-              <a:t>Prazo: até o fim da Aula 2 · Entrega individual — cada um entrega a sua, informando o mesmo time e o mesmo repositório.</a:t>
+              <a:rPr lang="en-US" sz="1250" i="1" dirty="0">
+                <a:solidFill>
+                  <a:srgbClr val="6E7D72"/>
+                </a:solidFill>
+                <a:latin typeface="Calibri" pitchFamily="34" charset="0"/>
+                <a:ea typeface="Calibri" pitchFamily="34" charset="-122"/>
+                <a:cs typeface="Calibri" pitchFamily="34" charset="-120"/>
+              </a:rPr>
+              <a:t>O aceite é registrado no Teams — próximo slide.</a:t>
             </a:r>
             <a:endParaRPr lang="en-US" sz="1250" dirty="0"/>
           </a:p>
@@ -6360,6 +6213,640 @@
 <file path=ppt/slides/slide16.xml><?xml version="1.0" encoding="utf-8"?>
 <p:sld xmlns:a="http://schemas.openxmlformats.org/drawingml/2006/main" xmlns:r="http://schemas.openxmlformats.org/officeDocument/2006/relationships" xmlns:p="http://schemas.openxmlformats.org/presentationml/2006/main">
   <p:cSld name="Slide 16">
+    <p:spTree>
+      <p:nvGrpSpPr>
+        <p:cNvPr id="1" name=""/>
+        <p:cNvGrpSpPr/>
+        <p:nvPr/>
+      </p:nvGrpSpPr>
+      <p:grpSpPr>
+        <a:xfrm>
+          <a:off x="0" y="0"/>
+          <a:ext cx="0" cy="0"/>
+          <a:chOff x="0" y="0"/>
+          <a:chExt cx="0" cy="0"/>
+        </a:xfrm>
+      </p:grpSpPr>
+      <p:sp>
+        <p:nvSpPr>
+          <p:cNvPr id="2" name="Text 0"/>
+          <p:cNvSpPr/>
+          <p:nvPr/>
+        </p:nvSpPr>
+        <p:spPr>
+          <a:xfrm>
+            <a:off x="457200" y="310896"/>
+            <a:ext cx="8229600" cy="548640"/>
+          </a:xfrm>
+          <a:prstGeom prst="rect">
+            <a:avLst/>
+          </a:prstGeom>
+          <a:noFill/>
+          <a:ln/>
+        </p:spPr>
+        <p:txBody>
+          <a:bodyPr wrap="square" lIns="0" tIns="0" rIns="0" bIns="0" rtlCol="0" anchor="ctr"/>
+          <a:lstStyle/>
+          <a:p>
+            <a:pPr indent="0" marL="0">
+              <a:buNone/>
+            </a:pPr>
+            <a:r>
+              <a:rPr lang="en-US" sz="3000" b="1" dirty="0">
+                <a:solidFill>
+                  <a:srgbClr val="2C5F2D"/>
+                </a:solidFill>
+                <a:latin typeface="Cambria" pitchFamily="34" charset="0"/>
+                <a:ea typeface="Cambria" pitchFamily="34" charset="-122"/>
+                <a:cs typeface="Cambria" pitchFamily="34" charset="-120"/>
+              </a:rPr>
+              <a:t>Sua primeira entrega: o aceite</a:t>
+            </a:r>
+            <a:endParaRPr lang="en-US" sz="3000" dirty="0"/>
+          </a:p>
+        </p:txBody>
+      </p:sp>
+      <p:sp>
+        <p:nvSpPr>
+          <p:cNvPr id="3" name="Text 1"/>
+          <p:cNvSpPr/>
+          <p:nvPr/>
+        </p:nvSpPr>
+        <p:spPr>
+          <a:xfrm>
+            <a:off x="457200" y="960120"/>
+            <a:ext cx="8229600" cy="685800"/>
+          </a:xfrm>
+          <a:prstGeom prst="rect">
+            <a:avLst/>
+          </a:prstGeom>
+          <a:noFill/>
+          <a:ln/>
+        </p:spPr>
+        <p:txBody>
+          <a:bodyPr wrap="square" lIns="0" tIns="0" rIns="0" bIns="0" rtlCol="0" anchor="ctr"/>
+          <a:lstStyle/>
+          <a:p>
+            <a:pPr indent="0" marL="0">
+              <a:buNone/>
+            </a:pPr>
+            <a:r>
+              <a:rPr lang="en-US" sz="1600" dirty="0">
+                <a:solidFill>
+                  <a:srgbClr val="36454F"/>
+                </a:solidFill>
+                <a:latin typeface="Calibri" pitchFamily="34" charset="0"/>
+                <a:ea typeface="Calibri" pitchFamily="34" charset="-122"/>
+                <a:cs typeface="Calibri" pitchFamily="34" charset="-120"/>
+              </a:rPr>
+              <a:t>No Teams, atividade "Aceite do contrato pedagógico". Ao entregar, você aceita o contrato — não há assinatura em papel.</a:t>
+            </a:r>
+            <a:endParaRPr lang="en-US" sz="1600" dirty="0"/>
+          </a:p>
+        </p:txBody>
+      </p:sp>
+      <p:sp>
+        <p:nvSpPr>
+          <p:cNvPr id="4" name="Shape 2"/>
+          <p:cNvSpPr/>
+          <p:nvPr/>
+        </p:nvSpPr>
+        <p:spPr>
+          <a:xfrm>
+            <a:off x="457200" y="1828800"/>
+            <a:ext cx="8229600" cy="749808"/>
+          </a:xfrm>
+          <a:prstGeom prst="roundRect">
+            <a:avLst>
+              <a:gd name="adj" fmla="val 14634"/>
+            </a:avLst>
+          </a:prstGeom>
+          <a:solidFill>
+            <a:srgbClr val="F1F5EF"/>
+          </a:solidFill>
+          <a:ln w="19050">
+            <a:solidFill>
+              <a:srgbClr val="97BC62"/>
+            </a:solidFill>
+            <a:prstDash val="solid"/>
+          </a:ln>
+        </p:spPr>
+      </p:sp>
+      <p:sp>
+        <p:nvSpPr>
+          <p:cNvPr id="5" name="Shape 3"/>
+          <p:cNvSpPr/>
+          <p:nvPr/>
+        </p:nvSpPr>
+        <p:spPr>
+          <a:xfrm>
+            <a:off x="658368" y="2011680"/>
+            <a:ext cx="384048" cy="384048"/>
+          </a:xfrm>
+          <a:prstGeom prst="ellipse">
+            <a:avLst/>
+          </a:prstGeom>
+          <a:solidFill>
+            <a:srgbClr val="2C5F2D"/>
+          </a:solidFill>
+          <a:ln/>
+        </p:spPr>
+      </p:sp>
+      <p:sp>
+        <p:nvSpPr>
+          <p:cNvPr id="6" name="Text 4"/>
+          <p:cNvSpPr/>
+          <p:nvPr/>
+        </p:nvSpPr>
+        <p:spPr>
+          <a:xfrm>
+            <a:off x="658368" y="2011680"/>
+            <a:ext cx="384048" cy="384048"/>
+          </a:xfrm>
+          <a:prstGeom prst="rect">
+            <a:avLst/>
+          </a:prstGeom>
+          <a:noFill/>
+          <a:ln/>
+        </p:spPr>
+        <p:txBody>
+          <a:bodyPr wrap="square" lIns="0" tIns="0" rIns="0" bIns="0" rtlCol="0" anchor="ctr"/>
+          <a:lstStyle/>
+          <a:p>
+            <a:pPr algn="ctr" indent="0" marL="0">
+              <a:buNone/>
+            </a:pPr>
+            <a:r>
+              <a:rPr lang="en-US" sz="1500" b="1" dirty="0">
+                <a:solidFill>
+                  <a:srgbClr val="FFFFFF"/>
+                </a:solidFill>
+                <a:latin typeface="Calibri" pitchFamily="34" charset="0"/>
+                <a:ea typeface="Calibri" pitchFamily="34" charset="-122"/>
+                <a:cs typeface="Calibri" pitchFamily="34" charset="-120"/>
+              </a:rPr>
+              <a:t>1</a:t>
+            </a:r>
+            <a:endParaRPr lang="en-US" sz="1500" dirty="0"/>
+          </a:p>
+        </p:txBody>
+      </p:sp>
+      <p:sp>
+        <p:nvSpPr>
+          <p:cNvPr id="7" name="Text 5"/>
+          <p:cNvSpPr/>
+          <p:nvPr/>
+        </p:nvSpPr>
+        <p:spPr>
+          <a:xfrm>
+            <a:off x="1234440" y="1938528"/>
+            <a:ext cx="2834640" cy="292608"/>
+          </a:xfrm>
+          <a:prstGeom prst="rect">
+            <a:avLst/>
+          </a:prstGeom>
+          <a:noFill/>
+          <a:ln/>
+        </p:spPr>
+        <p:txBody>
+          <a:bodyPr wrap="square" lIns="0" tIns="0" rIns="0" bIns="0" rtlCol="0" anchor="ctr"/>
+          <a:lstStyle/>
+          <a:p>
+            <a:pPr indent="0" marL="0">
+              <a:buNone/>
+            </a:pPr>
+            <a:r>
+              <a:rPr lang="en-US" sz="1400" b="1" dirty="0">
+                <a:solidFill>
+                  <a:srgbClr val="2C5F2D"/>
+                </a:solidFill>
+                <a:latin typeface="Calibri" pitchFamily="34" charset="0"/>
+                <a:ea typeface="Calibri" pitchFamily="34" charset="-122"/>
+                <a:cs typeface="Calibri" pitchFamily="34" charset="-120"/>
+              </a:rPr>
+              <a:t>Aceite do contrato</a:t>
+            </a:r>
+            <a:endParaRPr lang="en-US" sz="1400" dirty="0"/>
+          </a:p>
+        </p:txBody>
+      </p:sp>
+      <p:sp>
+        <p:nvSpPr>
+          <p:cNvPr id="8" name="Text 6"/>
+          <p:cNvSpPr/>
+          <p:nvPr/>
+        </p:nvSpPr>
+        <p:spPr>
+          <a:xfrm>
+            <a:off x="1234440" y="2231136"/>
+            <a:ext cx="7223760" cy="274320"/>
+          </a:xfrm>
+          <a:prstGeom prst="rect">
+            <a:avLst/>
+          </a:prstGeom>
+          <a:noFill/>
+          <a:ln/>
+        </p:spPr>
+        <p:txBody>
+          <a:bodyPr wrap="square" lIns="0" tIns="0" rIns="0" bIns="0" rtlCol="0" anchor="ctr"/>
+          <a:lstStyle/>
+          <a:p>
+            <a:pPr indent="0" marL="0">
+              <a:buNone/>
+            </a:pPr>
+            <a:r>
+              <a:rPr lang="en-US" sz="1250" dirty="0">
+                <a:solidFill>
+                  <a:srgbClr val="36454F"/>
+                </a:solidFill>
+                <a:latin typeface="Calibri" pitchFamily="34" charset="0"/>
+                <a:ea typeface="Calibri" pitchFamily="34" charset="-122"/>
+                <a:cs typeface="Calibri" pitchFamily="34" charset="-120"/>
+              </a:rPr>
+              <a:t>A própria entrega registra que você leu e aceita</a:t>
+            </a:r>
+            <a:endParaRPr lang="en-US" sz="1250" dirty="0"/>
+          </a:p>
+        </p:txBody>
+      </p:sp>
+      <p:sp>
+        <p:nvSpPr>
+          <p:cNvPr id="9" name="Shape 7"/>
+          <p:cNvSpPr/>
+          <p:nvPr/>
+        </p:nvSpPr>
+        <p:spPr>
+          <a:xfrm>
+            <a:off x="457200" y="2706624"/>
+            <a:ext cx="8229600" cy="749808"/>
+          </a:xfrm>
+          <a:prstGeom prst="roundRect">
+            <a:avLst>
+              <a:gd name="adj" fmla="val 14634"/>
+            </a:avLst>
+          </a:prstGeom>
+          <a:solidFill>
+            <a:srgbClr val="F1F5EF"/>
+          </a:solidFill>
+          <a:ln w="19050">
+            <a:solidFill>
+              <a:srgbClr val="97BC62"/>
+            </a:solidFill>
+            <a:prstDash val="solid"/>
+          </a:ln>
+        </p:spPr>
+      </p:sp>
+      <p:sp>
+        <p:nvSpPr>
+          <p:cNvPr id="10" name="Shape 8"/>
+          <p:cNvSpPr/>
+          <p:nvPr/>
+        </p:nvSpPr>
+        <p:spPr>
+          <a:xfrm>
+            <a:off x="658368" y="2889504"/>
+            <a:ext cx="384048" cy="384048"/>
+          </a:xfrm>
+          <a:prstGeom prst="ellipse">
+            <a:avLst/>
+          </a:prstGeom>
+          <a:solidFill>
+            <a:srgbClr val="2C5F2D"/>
+          </a:solidFill>
+          <a:ln/>
+        </p:spPr>
+      </p:sp>
+      <p:sp>
+        <p:nvSpPr>
+          <p:cNvPr id="11" name="Text 9"/>
+          <p:cNvSpPr/>
+          <p:nvPr/>
+        </p:nvSpPr>
+        <p:spPr>
+          <a:xfrm>
+            <a:off x="658368" y="2889504"/>
+            <a:ext cx="384048" cy="384048"/>
+          </a:xfrm>
+          <a:prstGeom prst="rect">
+            <a:avLst/>
+          </a:prstGeom>
+          <a:noFill/>
+          <a:ln/>
+        </p:spPr>
+        <p:txBody>
+          <a:bodyPr wrap="square" lIns="0" tIns="0" rIns="0" bIns="0" rtlCol="0" anchor="ctr"/>
+          <a:lstStyle/>
+          <a:p>
+            <a:pPr algn="ctr" indent="0" marL="0">
+              <a:buNone/>
+            </a:pPr>
+            <a:r>
+              <a:rPr lang="en-US" sz="1500" b="1" dirty="0">
+                <a:solidFill>
+                  <a:srgbClr val="FFFFFF"/>
+                </a:solidFill>
+                <a:latin typeface="Calibri" pitchFamily="34" charset="0"/>
+                <a:ea typeface="Calibri" pitchFamily="34" charset="-122"/>
+                <a:cs typeface="Calibri" pitchFamily="34" charset="-120"/>
+              </a:rPr>
+              <a:t>2</a:t>
+            </a:r>
+            <a:endParaRPr lang="en-US" sz="1500" dirty="0"/>
+          </a:p>
+        </p:txBody>
+      </p:sp>
+      <p:sp>
+        <p:nvSpPr>
+          <p:cNvPr id="12" name="Text 10"/>
+          <p:cNvSpPr/>
+          <p:nvPr/>
+        </p:nvSpPr>
+        <p:spPr>
+          <a:xfrm>
+            <a:off x="1234440" y="2816352"/>
+            <a:ext cx="2834640" cy="292608"/>
+          </a:xfrm>
+          <a:prstGeom prst="rect">
+            <a:avLst/>
+          </a:prstGeom>
+          <a:noFill/>
+          <a:ln/>
+        </p:spPr>
+        <p:txBody>
+          <a:bodyPr wrap="square" lIns="0" tIns="0" rIns="0" bIns="0" rtlCol="0" anchor="ctr"/>
+          <a:lstStyle/>
+          <a:p>
+            <a:pPr indent="0" marL="0">
+              <a:buNone/>
+            </a:pPr>
+            <a:r>
+              <a:rPr lang="en-US" sz="1400" b="1" dirty="0">
+                <a:solidFill>
+                  <a:srgbClr val="2C5F2D"/>
+                </a:solidFill>
+                <a:latin typeface="Calibri" pitchFamily="34" charset="0"/>
+                <a:ea typeface="Calibri" pitchFamily="34" charset="-122"/>
+                <a:cs typeface="Calibri" pitchFamily="34" charset="-120"/>
+              </a:rPr>
+              <a:t>Membros do time</a:t>
+            </a:r>
+            <a:endParaRPr lang="en-US" sz="1400" dirty="0"/>
+          </a:p>
+        </p:txBody>
+      </p:sp>
+      <p:sp>
+        <p:nvSpPr>
+          <p:cNvPr id="13" name="Text 11"/>
+          <p:cNvSpPr/>
+          <p:nvPr/>
+        </p:nvSpPr>
+        <p:spPr>
+          <a:xfrm>
+            <a:off x="1234440" y="3108960"/>
+            <a:ext cx="7223760" cy="274320"/>
+          </a:xfrm>
+          <a:prstGeom prst="rect">
+            <a:avLst/>
+          </a:prstGeom>
+          <a:noFill/>
+          <a:ln/>
+        </p:spPr>
+        <p:txBody>
+          <a:bodyPr wrap="square" lIns="0" tIns="0" rIns="0" bIns="0" rtlCol="0" anchor="ctr"/>
+          <a:lstStyle/>
+          <a:p>
+            <a:pPr indent="0" marL="0">
+              <a:buNone/>
+            </a:pPr>
+            <a:r>
+              <a:rPr lang="en-US" sz="1250" dirty="0">
+                <a:solidFill>
+                  <a:srgbClr val="36454F"/>
+                </a:solidFill>
+                <a:latin typeface="Calibri" pitchFamily="34" charset="0"/>
+                <a:ea typeface="Calibri" pitchFamily="34" charset="-122"/>
+                <a:cs typeface="Calibri" pitchFamily="34" charset="-120"/>
+              </a:rPr>
+              <a:t>3 a 5 pessoas, nomes completos</a:t>
+            </a:r>
+            <a:endParaRPr lang="en-US" sz="1250" dirty="0"/>
+          </a:p>
+        </p:txBody>
+      </p:sp>
+      <p:sp>
+        <p:nvSpPr>
+          <p:cNvPr id="14" name="Shape 12"/>
+          <p:cNvSpPr/>
+          <p:nvPr/>
+        </p:nvSpPr>
+        <p:spPr>
+          <a:xfrm>
+            <a:off x="457200" y="3584448"/>
+            <a:ext cx="8229600" cy="749808"/>
+          </a:xfrm>
+          <a:prstGeom prst="roundRect">
+            <a:avLst>
+              <a:gd name="adj" fmla="val 14634"/>
+            </a:avLst>
+          </a:prstGeom>
+          <a:solidFill>
+            <a:srgbClr val="F1F5EF"/>
+          </a:solidFill>
+          <a:ln w="19050">
+            <a:solidFill>
+              <a:srgbClr val="97BC62"/>
+            </a:solidFill>
+            <a:prstDash val="solid"/>
+          </a:ln>
+        </p:spPr>
+      </p:sp>
+      <p:sp>
+        <p:nvSpPr>
+          <p:cNvPr id="15" name="Shape 13"/>
+          <p:cNvSpPr/>
+          <p:nvPr/>
+        </p:nvSpPr>
+        <p:spPr>
+          <a:xfrm>
+            <a:off x="658368" y="3767328"/>
+            <a:ext cx="384048" cy="384048"/>
+          </a:xfrm>
+          <a:prstGeom prst="ellipse">
+            <a:avLst/>
+          </a:prstGeom>
+          <a:solidFill>
+            <a:srgbClr val="2C5F2D"/>
+          </a:solidFill>
+          <a:ln/>
+        </p:spPr>
+      </p:sp>
+      <p:sp>
+        <p:nvSpPr>
+          <p:cNvPr id="16" name="Text 14"/>
+          <p:cNvSpPr/>
+          <p:nvPr/>
+        </p:nvSpPr>
+        <p:spPr>
+          <a:xfrm>
+            <a:off x="658368" y="3767328"/>
+            <a:ext cx="384048" cy="384048"/>
+          </a:xfrm>
+          <a:prstGeom prst="rect">
+            <a:avLst/>
+          </a:prstGeom>
+          <a:noFill/>
+          <a:ln/>
+        </p:spPr>
+        <p:txBody>
+          <a:bodyPr wrap="square" lIns="0" tIns="0" rIns="0" bIns="0" rtlCol="0" anchor="ctr"/>
+          <a:lstStyle/>
+          <a:p>
+            <a:pPr algn="ctr" indent="0" marL="0">
+              <a:buNone/>
+            </a:pPr>
+            <a:r>
+              <a:rPr lang="en-US" sz="1500" b="1" dirty="0">
+                <a:solidFill>
+                  <a:srgbClr val="FFFFFF"/>
+                </a:solidFill>
+                <a:latin typeface="Calibri" pitchFamily="34" charset="0"/>
+                <a:ea typeface="Calibri" pitchFamily="34" charset="-122"/>
+                <a:cs typeface="Calibri" pitchFamily="34" charset="-120"/>
+              </a:rPr>
+              <a:t>3</a:t>
+            </a:r>
+            <a:endParaRPr lang="en-US" sz="1500" dirty="0"/>
+          </a:p>
+        </p:txBody>
+      </p:sp>
+      <p:sp>
+        <p:nvSpPr>
+          <p:cNvPr id="17" name="Text 15"/>
+          <p:cNvSpPr/>
+          <p:nvPr/>
+        </p:nvSpPr>
+        <p:spPr>
+          <a:xfrm>
+            <a:off x="1234440" y="3694176"/>
+            <a:ext cx="2834640" cy="292608"/>
+          </a:xfrm>
+          <a:prstGeom prst="rect">
+            <a:avLst/>
+          </a:prstGeom>
+          <a:noFill/>
+          <a:ln/>
+        </p:spPr>
+        <p:txBody>
+          <a:bodyPr wrap="square" lIns="0" tIns="0" rIns="0" bIns="0" rtlCol="0" anchor="ctr"/>
+          <a:lstStyle/>
+          <a:p>
+            <a:pPr indent="0" marL="0">
+              <a:buNone/>
+            </a:pPr>
+            <a:r>
+              <a:rPr lang="en-US" sz="1400" b="1" dirty="0">
+                <a:solidFill>
+                  <a:srgbClr val="2C5F2D"/>
+                </a:solidFill>
+                <a:latin typeface="Calibri" pitchFamily="34" charset="0"/>
+                <a:ea typeface="Calibri" pitchFamily="34" charset="-122"/>
+                <a:cs typeface="Calibri" pitchFamily="34" charset="-120"/>
+              </a:rPr>
+              <a:t>Repositório do grupo</a:t>
+            </a:r>
+            <a:endParaRPr lang="en-US" sz="1400" dirty="0"/>
+          </a:p>
+        </p:txBody>
+      </p:sp>
+      <p:sp>
+        <p:nvSpPr>
+          <p:cNvPr id="18" name="Text 16"/>
+          <p:cNvSpPr/>
+          <p:nvPr/>
+        </p:nvSpPr>
+        <p:spPr>
+          <a:xfrm>
+            <a:off x="1234440" y="3986784"/>
+            <a:ext cx="7223760" cy="274320"/>
+          </a:xfrm>
+          <a:prstGeom prst="rect">
+            <a:avLst/>
+          </a:prstGeom>
+          <a:noFill/>
+          <a:ln/>
+        </p:spPr>
+        <p:txBody>
+          <a:bodyPr wrap="square" lIns="0" tIns="0" rIns="0" bIns="0" rtlCol="0" anchor="ctr"/>
+          <a:lstStyle/>
+          <a:p>
+            <a:pPr indent="0" marL="0">
+              <a:buNone/>
+            </a:pPr>
+            <a:r>
+              <a:rPr lang="en-US" sz="1250" dirty="0">
+                <a:solidFill>
+                  <a:srgbClr val="36454F"/>
+                </a:solidFill>
+                <a:latin typeface="Calibri" pitchFamily="34" charset="0"/>
+                <a:ea typeface="Calibri" pitchFamily="34" charset="-122"/>
+                <a:cs typeface="Calibri" pitchFamily="34" charset="-120"/>
+              </a:rPr>
+              <a:t>Link do repositório público no GitHub</a:t>
+            </a:r>
+            <a:endParaRPr lang="en-US" sz="1250" dirty="0"/>
+          </a:p>
+        </p:txBody>
+      </p:sp>
+      <p:sp>
+        <p:nvSpPr>
+          <p:cNvPr id="19" name="Text 17"/>
+          <p:cNvSpPr/>
+          <p:nvPr/>
+        </p:nvSpPr>
+        <p:spPr>
+          <a:xfrm>
+            <a:off x="457200" y="4315968"/>
+            <a:ext cx="8229600" cy="411480"/>
+          </a:xfrm>
+          <a:prstGeom prst="rect">
+            <a:avLst/>
+          </a:prstGeom>
+          <a:noFill/>
+          <a:ln/>
+        </p:spPr>
+        <p:txBody>
+          <a:bodyPr wrap="square" lIns="0" tIns="0" rIns="0" bIns="0" rtlCol="0" anchor="ctr"/>
+          <a:lstStyle/>
+          <a:p>
+            <a:pPr indent="0" marL="0">
+              <a:buNone/>
+            </a:pPr>
+            <a:r>
+              <a:rPr lang="en-US" sz="1250" b="1" dirty="0">
+                <a:solidFill>
+                  <a:srgbClr val="2C5F2D"/>
+                </a:solidFill>
+                <a:latin typeface="Calibri" pitchFamily="34" charset="0"/>
+                <a:ea typeface="Calibri" pitchFamily="34" charset="-122"/>
+                <a:cs typeface="Calibri" pitchFamily="34" charset="-120"/>
+              </a:rPr>
+              <a:t>Prazo: até o fim da Aula 2 · Entrega individual, sem nota — cada um entrega a sua, informando o mesmo time e o mesmo repositório.</a:t>
+            </a:r>
+            <a:endParaRPr lang="en-US" sz="1250" dirty="0"/>
+          </a:p>
+        </p:txBody>
+      </p:sp>
+    </p:spTree>
+  </p:cSld>
+  <p:clrMapOvr>
+    <a:masterClrMapping/>
+  </p:clrMapOvr>
+</p:sld>
+</file>
+
+<file path=ppt/slides/slide17.xml><?xml version="1.0" encoding="utf-8"?>
+<p:sld xmlns:a="http://schemas.openxmlformats.org/drawingml/2006/main" xmlns:r="http://schemas.openxmlformats.org/officeDocument/2006/relationships" xmlns:p="http://schemas.openxmlformats.org/presentationml/2006/main">
+  <p:cSld name="Slide 17">
     <p:bg>
       <p:bgPr>
         <a:solidFill>
@@ -6493,432 +6980,6 @@
                 <a:cs typeface="Calibri" pitchFamily="34" charset="-120"/>
               </a:rPr>
               <a:t>Por que começar pelo problema, e não pela tela</a:t>
-            </a:r>
-            <a:endParaRPr lang="en-US" sz="1400" dirty="0"/>
-          </a:p>
-        </p:txBody>
-      </p:sp>
-    </p:spTree>
-  </p:cSld>
-  <p:clrMapOvr>
-    <a:masterClrMapping/>
-  </p:clrMapOvr>
-</p:sld>
-</file>
-
-<file path=ppt/slides/slide17.xml><?xml version="1.0" encoding="utf-8"?>
-<p:sld xmlns:a="http://schemas.openxmlformats.org/drawingml/2006/main" xmlns:r="http://schemas.openxmlformats.org/officeDocument/2006/relationships" xmlns:p="http://schemas.openxmlformats.org/presentationml/2006/main">
-  <p:cSld name="Slide 17">
-    <p:spTree>
-      <p:nvGrpSpPr>
-        <p:cNvPr id="1" name=""/>
-        <p:cNvGrpSpPr/>
-        <p:nvPr/>
-      </p:nvGrpSpPr>
-      <p:grpSpPr>
-        <a:xfrm>
-          <a:off x="0" y="0"/>
-          <a:ext cx="0" cy="0"/>
-          <a:chOff x="0" y="0"/>
-          <a:chExt cx="0" cy="0"/>
-        </a:xfrm>
-      </p:grpSpPr>
-      <p:sp>
-        <p:nvSpPr>
-          <p:cNvPr id="2" name="Shape 0"/>
-          <p:cNvSpPr/>
-          <p:nvPr/>
-        </p:nvSpPr>
-        <p:spPr>
-          <a:xfrm>
-            <a:off x="457200" y="310896"/>
-            <a:ext cx="384048" cy="384048"/>
-          </a:xfrm>
-          <a:prstGeom prst="ellipse">
-            <a:avLst/>
-          </a:prstGeom>
-          <a:solidFill>
-            <a:srgbClr val="2C5F2D"/>
-          </a:solidFill>
-          <a:ln/>
-        </p:spPr>
-      </p:sp>
-      <p:sp>
-        <p:nvSpPr>
-          <p:cNvPr id="3" name="Text 1"/>
-          <p:cNvSpPr/>
-          <p:nvPr/>
-        </p:nvSpPr>
-        <p:spPr>
-          <a:xfrm>
-            <a:off x="457200" y="310896"/>
-            <a:ext cx="384048" cy="384048"/>
-          </a:xfrm>
-          <a:prstGeom prst="rect">
-            <a:avLst/>
-          </a:prstGeom>
-          <a:noFill/>
-          <a:ln/>
-        </p:spPr>
-        <p:txBody>
-          <a:bodyPr wrap="square" lIns="0" tIns="0" rIns="0" bIns="0" rtlCol="0" anchor="ctr"/>
-          <a:lstStyle/>
-          <a:p>
-            <a:pPr algn="ctr" indent="0" marL="0">
-              <a:buNone/>
-            </a:pPr>
-            <a:r>
-              <a:rPr lang="en-US" sz="1500" b="1" dirty="0">
-                <a:solidFill>
-                  <a:srgbClr val="FFFFFF"/>
-                </a:solidFill>
-                <a:latin typeface="Calibri" pitchFamily="34" charset="0"/>
-                <a:ea typeface="Calibri" pitchFamily="34" charset="-122"/>
-                <a:cs typeface="Calibri" pitchFamily="34" charset="-120"/>
-              </a:rPr>
-              <a:t>2</a:t>
-            </a:r>
-            <a:endParaRPr lang="en-US" sz="1500" dirty="0"/>
-          </a:p>
-        </p:txBody>
-      </p:sp>
-      <p:sp>
-        <p:nvSpPr>
-          <p:cNvPr id="4" name="Text 2"/>
-          <p:cNvSpPr/>
-          <p:nvPr/>
-        </p:nvSpPr>
-        <p:spPr>
-          <a:xfrm>
-            <a:off x="987552" y="310896"/>
-            <a:ext cx="7699248" cy="457200"/>
-          </a:xfrm>
-          <a:prstGeom prst="rect">
-            <a:avLst/>
-          </a:prstGeom>
-          <a:noFill/>
-          <a:ln/>
-        </p:spPr>
-        <p:txBody>
-          <a:bodyPr wrap="square" lIns="0" tIns="0" rIns="0" bIns="0" rtlCol="0" anchor="ctr"/>
-          <a:lstStyle/>
-          <a:p>
-            <a:pPr indent="0" marL="0">
-              <a:buNone/>
-            </a:pPr>
-            <a:r>
-              <a:rPr lang="en-US" sz="2600" b="1" dirty="0">
-                <a:solidFill>
-                  <a:srgbClr val="2C5F2D"/>
-                </a:solidFill>
-                <a:latin typeface="Cambria" pitchFamily="34" charset="0"/>
-                <a:ea typeface="Cambria" pitchFamily="34" charset="-122"/>
-                <a:cs typeface="Cambria" pitchFamily="34" charset="-120"/>
-              </a:rPr>
-              <a:t>Ágil além das cerimônias</a:t>
-            </a:r>
-            <a:endParaRPr lang="en-US" sz="2600" dirty="0"/>
-          </a:p>
-        </p:txBody>
-      </p:sp>
-      <p:sp>
-        <p:nvSpPr>
-          <p:cNvPr id="5" name="Text 3"/>
-          <p:cNvSpPr/>
-          <p:nvPr/>
-        </p:nvSpPr>
-        <p:spPr>
-          <a:xfrm>
-            <a:off x="457200" y="1051560"/>
-            <a:ext cx="8229600" cy="1051560"/>
-          </a:xfrm>
-          <a:prstGeom prst="rect">
-            <a:avLst/>
-          </a:prstGeom>
-          <a:noFill/>
-          <a:ln/>
-        </p:spPr>
-        <p:txBody>
-          <a:bodyPr wrap="square" lIns="0" tIns="0" rIns="0" bIns="0" rtlCol="0" anchor="ctr"/>
-          <a:lstStyle/>
-          <a:p>
-            <a:pPr indent="0" marL="0">
-              <a:buNone/>
-            </a:pPr>
-            <a:r>
-              <a:rPr lang="en-US" sz="1800" dirty="0">
-                <a:solidFill>
-                  <a:srgbClr val="36454F"/>
-                </a:solidFill>
-                <a:latin typeface="Calibri" pitchFamily="34" charset="0"/>
-                <a:ea typeface="Calibri" pitchFamily="34" charset="-122"/>
-                <a:cs typeface="Calibri" pitchFamily="34" charset="-120"/>
-              </a:rPr>
-              <a:t>Ágil é decidir com informação incompleta e corrigir rápido — não é ter reunião em pé.</a:t>
-            </a:r>
-            <a:endParaRPr lang="en-US" sz="1800" dirty="0"/>
-          </a:p>
-        </p:txBody>
-      </p:sp>
-      <p:sp>
-        <p:nvSpPr>
-          <p:cNvPr id="6" name="Shape 4"/>
-          <p:cNvSpPr/>
-          <p:nvPr/>
-        </p:nvSpPr>
-        <p:spPr>
-          <a:xfrm>
-            <a:off x="457200" y="2286000"/>
-            <a:ext cx="1947672" cy="640080"/>
-          </a:xfrm>
-          <a:prstGeom prst="roundRect">
-            <a:avLst>
-              <a:gd name="adj" fmla="val 17143"/>
-            </a:avLst>
-          </a:prstGeom>
-          <a:solidFill>
-            <a:srgbClr val="F1F5EF"/>
-          </a:solidFill>
-          <a:ln w="12700">
-            <a:solidFill>
-              <a:srgbClr val="D6E0D2"/>
-            </a:solidFill>
-            <a:prstDash val="solid"/>
-          </a:ln>
-        </p:spPr>
-      </p:sp>
-      <p:sp>
-        <p:nvSpPr>
-          <p:cNvPr id="7" name="Text 5"/>
-          <p:cNvSpPr/>
-          <p:nvPr/>
-        </p:nvSpPr>
-        <p:spPr>
-          <a:xfrm>
-            <a:off x="457200" y="2286000"/>
-            <a:ext cx="1947672" cy="640080"/>
-          </a:xfrm>
-          <a:prstGeom prst="rect">
-            <a:avLst/>
-          </a:prstGeom>
-          <a:noFill/>
-          <a:ln/>
-        </p:spPr>
-        <p:txBody>
-          <a:bodyPr wrap="square" lIns="0" tIns="0" rIns="0" bIns="0" rtlCol="0" anchor="ctr"/>
-          <a:lstStyle/>
-          <a:p>
-            <a:pPr algn="ctr" indent="0" marL="0">
-              <a:buNone/>
-            </a:pPr>
-            <a:r>
-              <a:rPr lang="en-US" sz="1400" b="1" dirty="0">
-                <a:solidFill>
-                  <a:srgbClr val="2C5F2D"/>
-                </a:solidFill>
-                <a:latin typeface="Calibri" pitchFamily="34" charset="0"/>
-                <a:ea typeface="Calibri" pitchFamily="34" charset="-122"/>
-                <a:cs typeface="Calibri" pitchFamily="34" charset="-120"/>
-              </a:rPr>
-              <a:t>Decidir com pouco</a:t>
-            </a:r>
-            <a:endParaRPr lang="en-US" sz="1400" dirty="0"/>
-          </a:p>
-        </p:txBody>
-      </p:sp>
-      <p:sp>
-        <p:nvSpPr>
-          <p:cNvPr id="8" name="Shape 6"/>
-          <p:cNvSpPr/>
-          <p:nvPr/>
-        </p:nvSpPr>
-        <p:spPr>
-          <a:xfrm>
-            <a:off x="2551176" y="2286000"/>
-            <a:ext cx="1947672" cy="640080"/>
-          </a:xfrm>
-          <a:prstGeom prst="roundRect">
-            <a:avLst>
-              <a:gd name="adj" fmla="val 17143"/>
-            </a:avLst>
-          </a:prstGeom>
-          <a:solidFill>
-            <a:srgbClr val="F1F5EF"/>
-          </a:solidFill>
-          <a:ln w="12700">
-            <a:solidFill>
-              <a:srgbClr val="D6E0D2"/>
-            </a:solidFill>
-            <a:prstDash val="solid"/>
-          </a:ln>
-        </p:spPr>
-      </p:sp>
-      <p:sp>
-        <p:nvSpPr>
-          <p:cNvPr id="9" name="Text 7"/>
-          <p:cNvSpPr/>
-          <p:nvPr/>
-        </p:nvSpPr>
-        <p:spPr>
-          <a:xfrm>
-            <a:off x="2551176" y="2286000"/>
-            <a:ext cx="1947672" cy="640080"/>
-          </a:xfrm>
-          <a:prstGeom prst="rect">
-            <a:avLst/>
-          </a:prstGeom>
-          <a:noFill/>
-          <a:ln/>
-        </p:spPr>
-        <p:txBody>
-          <a:bodyPr wrap="square" lIns="0" tIns="0" rIns="0" bIns="0" rtlCol="0" anchor="ctr"/>
-          <a:lstStyle/>
-          <a:p>
-            <a:pPr algn="ctr" indent="0" marL="0">
-              <a:buNone/>
-            </a:pPr>
-            <a:r>
-              <a:rPr lang="en-US" sz="1400" b="1" dirty="0">
-                <a:solidFill>
-                  <a:srgbClr val="2C5F2D"/>
-                </a:solidFill>
-                <a:latin typeface="Calibri" pitchFamily="34" charset="0"/>
-                <a:ea typeface="Calibri" pitchFamily="34" charset="-122"/>
-                <a:cs typeface="Calibri" pitchFamily="34" charset="-120"/>
-              </a:rPr>
-              <a:t>Entregar uma fatia</a:t>
-            </a:r>
-            <a:endParaRPr lang="en-US" sz="1400" dirty="0"/>
-          </a:p>
-        </p:txBody>
-      </p:sp>
-      <p:sp>
-        <p:nvSpPr>
-          <p:cNvPr id="10" name="Shape 8"/>
-          <p:cNvSpPr/>
-          <p:nvPr/>
-        </p:nvSpPr>
-        <p:spPr>
-          <a:xfrm>
-            <a:off x="4645152" y="2286000"/>
-            <a:ext cx="1947672" cy="640080"/>
-          </a:xfrm>
-          <a:prstGeom prst="roundRect">
-            <a:avLst>
-              <a:gd name="adj" fmla="val 17143"/>
-            </a:avLst>
-          </a:prstGeom>
-          <a:solidFill>
-            <a:srgbClr val="F1F5EF"/>
-          </a:solidFill>
-          <a:ln w="12700">
-            <a:solidFill>
-              <a:srgbClr val="D6E0D2"/>
-            </a:solidFill>
-            <a:prstDash val="solid"/>
-          </a:ln>
-        </p:spPr>
-      </p:sp>
-      <p:sp>
-        <p:nvSpPr>
-          <p:cNvPr id="11" name="Text 9"/>
-          <p:cNvSpPr/>
-          <p:nvPr/>
-        </p:nvSpPr>
-        <p:spPr>
-          <a:xfrm>
-            <a:off x="4645152" y="2286000"/>
-            <a:ext cx="1947672" cy="640080"/>
-          </a:xfrm>
-          <a:prstGeom prst="rect">
-            <a:avLst/>
-          </a:prstGeom>
-          <a:noFill/>
-          <a:ln/>
-        </p:spPr>
-        <p:txBody>
-          <a:bodyPr wrap="square" lIns="0" tIns="0" rIns="0" bIns="0" rtlCol="0" anchor="ctr"/>
-          <a:lstStyle/>
-          <a:p>
-            <a:pPr algn="ctr" indent="0" marL="0">
-              <a:buNone/>
-            </a:pPr>
-            <a:r>
-              <a:rPr lang="en-US" sz="1400" b="1" dirty="0">
-                <a:solidFill>
-                  <a:srgbClr val="2C5F2D"/>
-                </a:solidFill>
-                <a:latin typeface="Calibri" pitchFamily="34" charset="0"/>
-                <a:ea typeface="Calibri" pitchFamily="34" charset="-122"/>
-                <a:cs typeface="Calibri" pitchFamily="34" charset="-120"/>
-              </a:rPr>
-              <a:t>Aprender com o uso</a:t>
-            </a:r>
-            <a:endParaRPr lang="en-US" sz="1400" dirty="0"/>
-          </a:p>
-        </p:txBody>
-      </p:sp>
-      <p:sp>
-        <p:nvSpPr>
-          <p:cNvPr id="12" name="Shape 10"/>
-          <p:cNvSpPr/>
-          <p:nvPr/>
-        </p:nvSpPr>
-        <p:spPr>
-          <a:xfrm>
-            <a:off x="6739128" y="2286000"/>
-            <a:ext cx="1947672" cy="640080"/>
-          </a:xfrm>
-          <a:prstGeom prst="roundRect">
-            <a:avLst>
-              <a:gd name="adj" fmla="val 17143"/>
-            </a:avLst>
-          </a:prstGeom>
-          <a:solidFill>
-            <a:srgbClr val="F1F5EF"/>
-          </a:solidFill>
-          <a:ln w="12700">
-            <a:solidFill>
-              <a:srgbClr val="D6E0D2"/>
-            </a:solidFill>
-            <a:prstDash val="solid"/>
-          </a:ln>
-        </p:spPr>
-      </p:sp>
-      <p:sp>
-        <p:nvSpPr>
-          <p:cNvPr id="13" name="Text 11"/>
-          <p:cNvSpPr/>
-          <p:nvPr/>
-        </p:nvSpPr>
-        <p:spPr>
-          <a:xfrm>
-            <a:off x="6739128" y="2286000"/>
-            <a:ext cx="1947672" cy="640080"/>
-          </a:xfrm>
-          <a:prstGeom prst="rect">
-            <a:avLst/>
-          </a:prstGeom>
-          <a:noFill/>
-          <a:ln/>
-        </p:spPr>
-        <p:txBody>
-          <a:bodyPr wrap="square" lIns="0" tIns="0" rIns="0" bIns="0" rtlCol="0" anchor="ctr"/>
-          <a:lstStyle/>
-          <a:p>
-            <a:pPr algn="ctr" indent="0" marL="0">
-              <a:buNone/>
-            </a:pPr>
-            <a:r>
-              <a:rPr lang="en-US" sz="1400" b="1" dirty="0">
-                <a:solidFill>
-                  <a:srgbClr val="2C5F2D"/>
-                </a:solidFill>
-                <a:latin typeface="Calibri" pitchFamily="34" charset="0"/>
-                <a:ea typeface="Calibri" pitchFamily="34" charset="-122"/>
-                <a:cs typeface="Calibri" pitchFamily="34" charset="-120"/>
-              </a:rPr>
-              <a:t>Ajustar a decisão</a:t>
             </a:r>
             <a:endParaRPr lang="en-US" sz="1400" dirty="0"/>
           </a:p>
@@ -7033,7 +7094,7 @@
               <a:buNone/>
             </a:pPr>
             <a:r>
-              <a:rPr lang="en-US" sz="2200" b="1" dirty="0">
+              <a:rPr lang="en-US" sz="2600" b="1" dirty="0">
                 <a:solidFill>
                   <a:srgbClr val="2C5F2D"/>
                 </a:solidFill>
@@ -7041,34 +7102,73 @@
                 <a:ea typeface="Cambria" pitchFamily="34" charset="-122"/>
                 <a:cs typeface="Cambria" pitchFamily="34" charset="-120"/>
               </a:rPr>
-              <a:t>No Prato Cheio — e o contraponto</a:t>
-            </a:r>
-            <a:endParaRPr lang="en-US" sz="2200" dirty="0"/>
-          </a:p>
-        </p:txBody>
-      </p:sp>
-      <p:sp>
-        <p:nvSpPr>
-          <p:cNvPr id="5" name="Shape 3"/>
-          <p:cNvSpPr/>
-          <p:nvPr/>
-        </p:nvSpPr>
-        <p:spPr>
-          <a:xfrm>
-            <a:off x="457200" y="1097280"/>
-            <a:ext cx="3977640" cy="2926080"/>
+              <a:t>Ágil além das cerimônias</a:t>
+            </a:r>
+            <a:endParaRPr lang="en-US" sz="2600" dirty="0"/>
+          </a:p>
+        </p:txBody>
+      </p:sp>
+      <p:sp>
+        <p:nvSpPr>
+          <p:cNvPr id="5" name="Text 3"/>
+          <p:cNvSpPr/>
+          <p:nvPr/>
+        </p:nvSpPr>
+        <p:spPr>
+          <a:xfrm>
+            <a:off x="457200" y="1051560"/>
+            <a:ext cx="8229600" cy="1051560"/>
+          </a:xfrm>
+          <a:prstGeom prst="rect">
+            <a:avLst/>
+          </a:prstGeom>
+          <a:noFill/>
+          <a:ln/>
+        </p:spPr>
+        <p:txBody>
+          <a:bodyPr wrap="square" lIns="0" tIns="0" rIns="0" bIns="0" rtlCol="0" anchor="ctr"/>
+          <a:lstStyle/>
+          <a:p>
+            <a:pPr indent="0" marL="0">
+              <a:buNone/>
+            </a:pPr>
+            <a:r>
+              <a:rPr lang="en-US" sz="1800" dirty="0">
+                <a:solidFill>
+                  <a:srgbClr val="36454F"/>
+                </a:solidFill>
+                <a:latin typeface="Calibri" pitchFamily="34" charset="0"/>
+                <a:ea typeface="Calibri" pitchFamily="34" charset="-122"/>
+                <a:cs typeface="Calibri" pitchFamily="34" charset="-120"/>
+              </a:rPr>
+              <a:t>Ágil é decidir com informação incompleta e corrigir rápido — não é ter reunião em pé.</a:t>
+            </a:r>
+            <a:endParaRPr lang="en-US" sz="1800" dirty="0"/>
+          </a:p>
+        </p:txBody>
+      </p:sp>
+      <p:sp>
+        <p:nvSpPr>
+          <p:cNvPr id="6" name="Shape 4"/>
+          <p:cNvSpPr/>
+          <p:nvPr/>
+        </p:nvSpPr>
+        <p:spPr>
+          <a:xfrm>
+            <a:off x="457200" y="2286000"/>
+            <a:ext cx="1947672" cy="640080"/>
           </a:xfrm>
           <a:prstGeom prst="roundRect">
             <a:avLst>
-              <a:gd name="adj" fmla="val 4375"/>
+              <a:gd name="adj" fmla="val 17143"/>
             </a:avLst>
           </a:prstGeom>
           <a:solidFill>
             <a:srgbClr val="F1F5EF"/>
           </a:solidFill>
-          <a:ln w="19050">
+          <a:ln w="12700">
             <a:solidFill>
-              <a:srgbClr val="97BC62"/>
+              <a:srgbClr val="D6E0D2"/>
             </a:solidFill>
             <a:prstDash val="solid"/>
           </a:ln>
@@ -7076,14 +7176,14 @@
       </p:sp>
       <p:sp>
         <p:nvSpPr>
-          <p:cNvPr id="6" name="Text 4"/>
-          <p:cNvSpPr/>
-          <p:nvPr/>
-        </p:nvSpPr>
-        <p:spPr>
-          <a:xfrm>
-            <a:off x="658368" y="1243584"/>
-            <a:ext cx="3575304" cy="365760"/>
+          <p:cNvPr id="7" name="Text 5"/>
+          <p:cNvSpPr/>
+          <p:nvPr/>
+        </p:nvSpPr>
+        <p:spPr>
+          <a:xfrm>
+            <a:off x="457200" y="2286000"/>
+            <a:ext cx="1947672" cy="640080"/>
           </a:xfrm>
           <a:prstGeom prst="rect">
             <a:avLst/>
@@ -7095,7 +7195,7 @@
           <a:bodyPr wrap="square" lIns="0" tIns="0" rIns="0" bIns="0" rtlCol="0" anchor="ctr"/>
           <a:lstStyle/>
           <a:p>
-            <a:pPr indent="0" marL="0">
+            <a:pPr algn="ctr" indent="0" marL="0">
               <a:buNone/>
             </a:pPr>
             <a:r>
@@ -7107,7 +7207,7 @@
                 <a:ea typeface="Calibri" pitchFamily="34" charset="-122"/>
                 <a:cs typeface="Calibri" pitchFamily="34" charset="-120"/>
               </a:rPr>
-              <a:t>No Prato Cheio</a:t>
+              <a:t>Decidir com pouco</a:t>
             </a:r>
             <a:endParaRPr lang="en-US" sz="1400" dirty="0"/>
           </a:p>
@@ -7115,111 +7215,26 @@
       </p:sp>
       <p:sp>
         <p:nvSpPr>
-          <p:cNvPr id="7" name="Text 5"/>
-          <p:cNvSpPr/>
-          <p:nvPr/>
-        </p:nvSpPr>
-        <p:spPr>
-          <a:xfrm>
-            <a:off x="658368" y="1645920"/>
-            <a:ext cx="3575304" cy="2194560"/>
-          </a:xfrm>
-          <a:prstGeom prst="rect">
-            <a:avLst/>
-          </a:prstGeom>
-          <a:noFill/>
-          <a:ln/>
-        </p:spPr>
-        <p:txBody>
-          <a:bodyPr wrap="square" lIns="0" tIns="0" rIns="0" bIns="0" rtlCol="0" anchor="t"/>
-          <a:lstStyle/>
-          <a:p>
-            <a:pPr marL="342900" indent="-342900">
-              <a:spcAft>
-                <a:spcPts val="800"/>
-              </a:spcAft>
-              <a:buSzPct val="100000"/>
-              <a:buChar char="•"/>
-            </a:pPr>
-            <a:r>
-              <a:rPr lang="en-US" sz="1350" dirty="0">
-                <a:solidFill>
-                  <a:srgbClr val="36454F"/>
-                </a:solidFill>
-                <a:latin typeface="Calibri" pitchFamily="34" charset="0"/>
-                <a:ea typeface="Calibri" pitchFamily="34" charset="-122"/>
-                <a:cs typeface="Calibri" pitchFamily="34" charset="-120"/>
-              </a:rPr>
-              <a:t>Não sabemos o volume real de doações</a:t>
-            </a:r>
-            <a:endParaRPr lang="en-US" sz="1350" dirty="0"/>
-          </a:p>
-          <a:p>
-            <a:pPr marL="342900" indent="-342900">
-              <a:spcAft>
-                <a:spcPts val="800"/>
-              </a:spcAft>
-              <a:buSzPct val="100000"/>
-              <a:buChar char="•"/>
-            </a:pPr>
-            <a:r>
-              <a:rPr lang="en-US" sz="1350" dirty="0">
-                <a:solidFill>
-                  <a:srgbClr val="36454F"/>
-                </a:solidFill>
-                <a:latin typeface="Calibri" pitchFamily="34" charset="0"/>
-                <a:ea typeface="Calibri" pitchFamily="34" charset="-122"/>
-                <a:cs typeface="Calibri" pitchFamily="34" charset="-120"/>
-              </a:rPr>
-              <a:t>Não sabemos se o gargalo é a coleta</a:t>
-            </a:r>
-            <a:endParaRPr lang="en-US" sz="1350" dirty="0"/>
-          </a:p>
-          <a:p>
-            <a:pPr marL="342900" indent="-342900">
-              <a:spcAft>
-                <a:spcPts val="800"/>
-              </a:spcAft>
-              <a:buSzPct val="100000"/>
-              <a:buChar char="•"/>
-            </a:pPr>
-            <a:r>
-              <a:rPr lang="en-US" sz="1350" dirty="0">
-                <a:solidFill>
-                  <a:srgbClr val="36454F"/>
-                </a:solidFill>
-                <a:latin typeface="Calibri" pitchFamily="34" charset="0"/>
-                <a:ea typeface="Calibri" pitchFamily="34" charset="-122"/>
-                <a:cs typeface="Calibri" pitchFamily="34" charset="-120"/>
-              </a:rPr>
-              <a:t>Ainda assim, precisamos começar</a:t>
-            </a:r>
-            <a:endParaRPr lang="en-US" sz="1350" dirty="0"/>
-          </a:p>
-        </p:txBody>
-      </p:sp>
-      <p:sp>
-        <p:nvSpPr>
           <p:cNvPr id="8" name="Shape 6"/>
           <p:cNvSpPr/>
           <p:nvPr/>
         </p:nvSpPr>
         <p:spPr>
           <a:xfrm>
-            <a:off x="4709160" y="1097280"/>
-            <a:ext cx="3977640" cy="2926080"/>
+            <a:off x="2551176" y="2286000"/>
+            <a:ext cx="1947672" cy="640080"/>
           </a:xfrm>
           <a:prstGeom prst="roundRect">
             <a:avLst>
-              <a:gd name="adj" fmla="val 4375"/>
+              <a:gd name="adj" fmla="val 17143"/>
             </a:avLst>
           </a:prstGeom>
           <a:solidFill>
-            <a:srgbClr val="FBF1EF"/>
+            <a:srgbClr val="F1F5EF"/>
           </a:solidFill>
-          <a:ln w="19050">
+          <a:ln w="12700">
             <a:solidFill>
-              <a:srgbClr val="B85042"/>
+              <a:srgbClr val="D6E0D2"/>
             </a:solidFill>
             <a:prstDash val="solid"/>
           </a:ln>
@@ -7233,8 +7248,8 @@
         </p:nvSpPr>
         <p:spPr>
           <a:xfrm>
-            <a:off x="4910328" y="1243584"/>
-            <a:ext cx="3575304" cy="365760"/>
+            <a:off x="2551176" y="2286000"/>
+            <a:ext cx="1947672" cy="640080"/>
           </a:xfrm>
           <a:prstGeom prst="rect">
             <a:avLst/>
@@ -7246,19 +7261,19 @@
           <a:bodyPr wrap="square" lIns="0" tIns="0" rIns="0" bIns="0" rtlCol="0" anchor="ctr"/>
           <a:lstStyle/>
           <a:p>
-            <a:pPr indent="0" marL="0">
+            <a:pPr algn="ctr" indent="0" marL="0">
               <a:buNone/>
             </a:pPr>
             <a:r>
               <a:rPr lang="en-US" sz="1400" b="1" dirty="0">
                 <a:solidFill>
-                  <a:srgbClr val="B85042"/>
-                </a:solidFill>
-                <a:latin typeface="Calibri" pitchFamily="34" charset="0"/>
-                <a:ea typeface="Calibri" pitchFamily="34" charset="-122"/>
-                <a:cs typeface="Calibri" pitchFamily="34" charset="-120"/>
-              </a:rPr>
-              <a:t>O erro comum</a:t>
+                  <a:srgbClr val="2C5F2D"/>
+                </a:solidFill>
+                <a:latin typeface="Calibri" pitchFamily="34" charset="0"/>
+                <a:ea typeface="Calibri" pitchFamily="34" charset="-122"/>
+                <a:cs typeface="Calibri" pitchFamily="34" charset="-120"/>
+              </a:rPr>
+              <a:t>Entregar uma fatia</a:t>
             </a:r>
             <a:endParaRPr lang="en-US" sz="1400" dirty="0"/>
           </a:p>
@@ -7266,14 +7281,41 @@
       </p:sp>
       <p:sp>
         <p:nvSpPr>
-          <p:cNvPr id="10" name="Text 8"/>
-          <p:cNvSpPr/>
-          <p:nvPr/>
-        </p:nvSpPr>
-        <p:spPr>
-          <a:xfrm>
-            <a:off x="4910328" y="1645920"/>
-            <a:ext cx="3575304" cy="2194560"/>
+          <p:cNvPr id="10" name="Shape 8"/>
+          <p:cNvSpPr/>
+          <p:nvPr/>
+        </p:nvSpPr>
+        <p:spPr>
+          <a:xfrm>
+            <a:off x="4645152" y="2286000"/>
+            <a:ext cx="1947672" cy="640080"/>
+          </a:xfrm>
+          <a:prstGeom prst="roundRect">
+            <a:avLst>
+              <a:gd name="adj" fmla="val 17143"/>
+            </a:avLst>
+          </a:prstGeom>
+          <a:solidFill>
+            <a:srgbClr val="F1F5EF"/>
+          </a:solidFill>
+          <a:ln w="12700">
+            <a:solidFill>
+              <a:srgbClr val="D6E0D2"/>
+            </a:solidFill>
+            <a:prstDash val="solid"/>
+          </a:ln>
+        </p:spPr>
+      </p:sp>
+      <p:sp>
+        <p:nvSpPr>
+          <p:cNvPr id="11" name="Text 9"/>
+          <p:cNvSpPr/>
+          <p:nvPr/>
+        </p:nvSpPr>
+        <p:spPr>
+          <a:xfrm>
+            <a:off x="4645152" y="2286000"/>
+            <a:ext cx="1947672" cy="640080"/>
           </a:xfrm>
           <a:prstGeom prst="rect">
             <a:avLst/>
@@ -7282,83 +7324,64 @@
           <a:ln/>
         </p:spPr>
         <p:txBody>
-          <a:bodyPr wrap="square" lIns="0" tIns="0" rIns="0" bIns="0" rtlCol="0" anchor="t"/>
-          <a:lstStyle/>
-          <a:p>
-            <a:pPr marL="342900" indent="-342900">
-              <a:spcAft>
-                <a:spcPts val="800"/>
-              </a:spcAft>
-              <a:buSzPct val="100000"/>
-              <a:buChar char="•"/>
-            </a:pPr>
-            <a:r>
-              <a:rPr lang="en-US" sz="1350" dirty="0">
-                <a:solidFill>
-                  <a:srgbClr val="7A3A31"/>
-                </a:solidFill>
-                <a:latin typeface="Calibri" pitchFamily="34" charset="0"/>
-                <a:ea typeface="Calibri" pitchFamily="34" charset="-122"/>
-                <a:cs typeface="Calibri" pitchFamily="34" charset="-120"/>
-              </a:rPr>
-              <a:t>Esperar ter todos os dados para decidir</a:t>
-            </a:r>
-            <a:endParaRPr lang="en-US" sz="1350" dirty="0"/>
-          </a:p>
-          <a:p>
-            <a:pPr marL="342900" indent="-342900">
-              <a:spcAft>
-                <a:spcPts val="800"/>
-              </a:spcAft>
-              <a:buSzPct val="100000"/>
-              <a:buChar char="•"/>
-            </a:pPr>
-            <a:r>
-              <a:rPr lang="en-US" sz="1350" dirty="0">
-                <a:solidFill>
-                  <a:srgbClr val="7A3A31"/>
-                </a:solidFill>
-                <a:latin typeface="Calibri" pitchFamily="34" charset="0"/>
-                <a:ea typeface="Calibri" pitchFamily="34" charset="-122"/>
-                <a:cs typeface="Calibri" pitchFamily="34" charset="-120"/>
-              </a:rPr>
-              <a:t>Levantar requisitos por seis semanas</a:t>
-            </a:r>
-            <a:endParaRPr lang="en-US" sz="1350" dirty="0"/>
-          </a:p>
-          <a:p>
-            <a:pPr marL="342900" indent="-342900">
-              <a:spcAft>
-                <a:spcPts val="800"/>
-              </a:spcAft>
-              <a:buSzPct val="100000"/>
-              <a:buChar char="•"/>
-            </a:pPr>
-            <a:r>
-              <a:rPr lang="en-US" sz="1350" dirty="0">
-                <a:solidFill>
-                  <a:srgbClr val="7A3A31"/>
-                </a:solidFill>
-                <a:latin typeface="Calibri" pitchFamily="34" charset="0"/>
-                <a:ea typeface="Calibri" pitchFamily="34" charset="-122"/>
-                <a:cs typeface="Calibri" pitchFamily="34" charset="-120"/>
-              </a:rPr>
-              <a:t>Começar pela tela, não pelo problema</a:t>
-            </a:r>
-            <a:endParaRPr lang="en-US" sz="1350" dirty="0"/>
-          </a:p>
-        </p:txBody>
-      </p:sp>
-      <p:sp>
-        <p:nvSpPr>
-          <p:cNvPr id="11" name="Text 9"/>
-          <p:cNvSpPr/>
-          <p:nvPr/>
-        </p:nvSpPr>
-        <p:spPr>
-          <a:xfrm>
-            <a:off x="457200" y="4759452"/>
-            <a:ext cx="8229600" cy="256032"/>
+          <a:bodyPr wrap="square" lIns="0" tIns="0" rIns="0" bIns="0" rtlCol="0" anchor="ctr"/>
+          <a:lstStyle/>
+          <a:p>
+            <a:pPr algn="ctr" indent="0" marL="0">
+              <a:buNone/>
+            </a:pPr>
+            <a:r>
+              <a:rPr lang="en-US" sz="1400" b="1" dirty="0">
+                <a:solidFill>
+                  <a:srgbClr val="2C5F2D"/>
+                </a:solidFill>
+                <a:latin typeface="Calibri" pitchFamily="34" charset="0"/>
+                <a:ea typeface="Calibri" pitchFamily="34" charset="-122"/>
+                <a:cs typeface="Calibri" pitchFamily="34" charset="-120"/>
+              </a:rPr>
+              <a:t>Aprender com o uso</a:t>
+            </a:r>
+            <a:endParaRPr lang="en-US" sz="1400" dirty="0"/>
+          </a:p>
+        </p:txBody>
+      </p:sp>
+      <p:sp>
+        <p:nvSpPr>
+          <p:cNvPr id="12" name="Shape 10"/>
+          <p:cNvSpPr/>
+          <p:nvPr/>
+        </p:nvSpPr>
+        <p:spPr>
+          <a:xfrm>
+            <a:off x="6739128" y="2286000"/>
+            <a:ext cx="1947672" cy="640080"/>
+          </a:xfrm>
+          <a:prstGeom prst="roundRect">
+            <a:avLst>
+              <a:gd name="adj" fmla="val 17143"/>
+            </a:avLst>
+          </a:prstGeom>
+          <a:solidFill>
+            <a:srgbClr val="F1F5EF"/>
+          </a:solidFill>
+          <a:ln w="12700">
+            <a:solidFill>
+              <a:srgbClr val="D6E0D2"/>
+            </a:solidFill>
+            <a:prstDash val="solid"/>
+          </a:ln>
+        </p:spPr>
+      </p:sp>
+      <p:sp>
+        <p:nvSpPr>
+          <p:cNvPr id="13" name="Text 11"/>
+          <p:cNvSpPr/>
+          <p:nvPr/>
+        </p:nvSpPr>
+        <p:spPr>
+          <a:xfrm>
+            <a:off x="6739128" y="2286000"/>
+            <a:ext cx="1947672" cy="640080"/>
           </a:xfrm>
           <a:prstGeom prst="rect">
             <a:avLst/>
@@ -7370,21 +7393,21 @@
           <a:bodyPr wrap="square" lIns="0" tIns="0" rIns="0" bIns="0" rtlCol="0" anchor="ctr"/>
           <a:lstStyle/>
           <a:p>
-            <a:pPr indent="0" marL="0">
+            <a:pPr algn="ctr" indent="0" marL="0">
               <a:buNone/>
             </a:pPr>
             <a:r>
-              <a:rPr lang="en-US" sz="1000" dirty="0">
-                <a:solidFill>
-                  <a:srgbClr val="6E7D72"/>
-                </a:solidFill>
-                <a:latin typeface="Calibri" pitchFamily="34" charset="0"/>
-                <a:ea typeface="Calibri" pitchFamily="34" charset="-122"/>
-                <a:cs typeface="Calibri" pitchFamily="34" charset="-120"/>
-              </a:rPr>
-              <a:t>Exemplo + contraponto</a:t>
-            </a:r>
-            <a:endParaRPr lang="en-US" sz="1000" dirty="0"/>
+              <a:rPr lang="en-US" sz="1400" b="1" dirty="0">
+                <a:solidFill>
+                  <a:srgbClr val="2C5F2D"/>
+                </a:solidFill>
+                <a:latin typeface="Calibri" pitchFamily="34" charset="0"/>
+                <a:ea typeface="Calibri" pitchFamily="34" charset="-122"/>
+                <a:cs typeface="Calibri" pitchFamily="34" charset="-120"/>
+              </a:rPr>
+              <a:t>Ajustar a decisão</a:t>
+            </a:r>
+            <a:endParaRPr lang="en-US" sz="1400" dirty="0"/>
           </a:p>
         </p:txBody>
       </p:sp>
@@ -7466,7 +7489,7 @@
                 <a:ea typeface="Calibri" pitchFamily="34" charset="-122"/>
                 <a:cs typeface="Calibri" pitchFamily="34" charset="-120"/>
               </a:rPr>
-              <a:t>3</a:t>
+              <a:t>2</a:t>
             </a:r>
             <a:endParaRPr lang="en-US" sz="1500" dirty="0"/>
           </a:p>
@@ -7497,7 +7520,7 @@
               <a:buNone/>
             </a:pPr>
             <a:r>
-              <a:rPr lang="en-US" sz="2600" b="1" dirty="0">
+              <a:rPr lang="en-US" sz="2200" b="1" dirty="0">
                 <a:solidFill>
                   <a:srgbClr val="2C5F2D"/>
                 </a:solidFill>
@@ -7505,22 +7528,49 @@
                 <a:ea typeface="Cambria" pitchFamily="34" charset="-122"/>
                 <a:cs typeface="Cambria" pitchFamily="34" charset="-120"/>
               </a:rPr>
-              <a:t>Problema não é requisito</a:t>
-            </a:r>
-            <a:endParaRPr lang="en-US" sz="2600" dirty="0"/>
-          </a:p>
-        </p:txBody>
-      </p:sp>
-      <p:sp>
-        <p:nvSpPr>
-          <p:cNvPr id="5" name="Text 3"/>
-          <p:cNvSpPr/>
-          <p:nvPr/>
-        </p:nvSpPr>
-        <p:spPr>
-          <a:xfrm>
-            <a:off x="457200" y="1051560"/>
-            <a:ext cx="8229600" cy="1051560"/>
+              <a:t>No Prato Cheio — e o contraponto</a:t>
+            </a:r>
+            <a:endParaRPr lang="en-US" sz="2200" dirty="0"/>
+          </a:p>
+        </p:txBody>
+      </p:sp>
+      <p:sp>
+        <p:nvSpPr>
+          <p:cNvPr id="5" name="Shape 3"/>
+          <p:cNvSpPr/>
+          <p:nvPr/>
+        </p:nvSpPr>
+        <p:spPr>
+          <a:xfrm>
+            <a:off x="457200" y="1097280"/>
+            <a:ext cx="3977640" cy="2926080"/>
+          </a:xfrm>
+          <a:prstGeom prst="roundRect">
+            <a:avLst>
+              <a:gd name="adj" fmla="val 4375"/>
+            </a:avLst>
+          </a:prstGeom>
+          <a:solidFill>
+            <a:srgbClr val="F1F5EF"/>
+          </a:solidFill>
+          <a:ln w="19050">
+            <a:solidFill>
+              <a:srgbClr val="97BC62"/>
+            </a:solidFill>
+            <a:prstDash val="solid"/>
+          </a:ln>
+        </p:spPr>
+      </p:sp>
+      <p:sp>
+        <p:nvSpPr>
+          <p:cNvPr id="6" name="Text 4"/>
+          <p:cNvSpPr/>
+          <p:nvPr/>
+        </p:nvSpPr>
+        <p:spPr>
+          <a:xfrm>
+            <a:off x="658368" y="1243584"/>
+            <a:ext cx="3575304" cy="365760"/>
           </a:xfrm>
           <a:prstGeom prst="rect">
             <a:avLst/>
@@ -7536,7 +7586,50 @@
               <a:buNone/>
             </a:pPr>
             <a:r>
-              <a:rPr lang="en-US" sz="1800" dirty="0">
+              <a:rPr lang="en-US" sz="1400" b="1" dirty="0">
+                <a:solidFill>
+                  <a:srgbClr val="2C5F2D"/>
+                </a:solidFill>
+                <a:latin typeface="Calibri" pitchFamily="34" charset="0"/>
+                <a:ea typeface="Calibri" pitchFamily="34" charset="-122"/>
+                <a:cs typeface="Calibri" pitchFamily="34" charset="-120"/>
+              </a:rPr>
+              <a:t>No Prato Cheio</a:t>
+            </a:r>
+            <a:endParaRPr lang="en-US" sz="1400" dirty="0"/>
+          </a:p>
+        </p:txBody>
+      </p:sp>
+      <p:sp>
+        <p:nvSpPr>
+          <p:cNvPr id="7" name="Text 5"/>
+          <p:cNvSpPr/>
+          <p:nvPr/>
+        </p:nvSpPr>
+        <p:spPr>
+          <a:xfrm>
+            <a:off x="658368" y="1645920"/>
+            <a:ext cx="3575304" cy="2194560"/>
+          </a:xfrm>
+          <a:prstGeom prst="rect">
+            <a:avLst/>
+          </a:prstGeom>
+          <a:noFill/>
+          <a:ln/>
+        </p:spPr>
+        <p:txBody>
+          <a:bodyPr wrap="square" lIns="0" tIns="0" rIns="0" bIns="0" rtlCol="0" anchor="t"/>
+          <a:lstStyle/>
+          <a:p>
+            <a:pPr marL="342900" indent="-342900">
+              <a:spcAft>
+                <a:spcPts val="800"/>
+              </a:spcAft>
+              <a:buSzPct val="100000"/>
+              <a:buChar char="•"/>
+            </a:pPr>
+            <a:r>
+              <a:rPr lang="en-US" sz="1350" dirty="0">
                 <a:solidFill>
                   <a:srgbClr val="36454F"/>
                 </a:solidFill>
@@ -7544,30 +7637,72 @@
                 <a:ea typeface="Calibri" pitchFamily="34" charset="-122"/>
                 <a:cs typeface="Calibri" pitchFamily="34" charset="-120"/>
               </a:rPr>
-              <a:t>O problema é o que dói. O requisito é uma resposta possível — e quase sempre chega disfarçado de pedido.</a:t>
-            </a:r>
-            <a:endParaRPr lang="en-US" sz="1800" dirty="0"/>
-          </a:p>
-        </p:txBody>
-      </p:sp>
-      <p:sp>
-        <p:nvSpPr>
-          <p:cNvPr id="6" name="Shape 4"/>
-          <p:cNvSpPr/>
-          <p:nvPr/>
-        </p:nvSpPr>
-        <p:spPr>
-          <a:xfrm>
-            <a:off x="457200" y="2286000"/>
-            <a:ext cx="3657600" cy="914400"/>
+              <a:t>Não sabemos o volume real de doações</a:t>
+            </a:r>
+            <a:endParaRPr lang="en-US" sz="1350" dirty="0"/>
+          </a:p>
+          <a:p>
+            <a:pPr marL="342900" indent="-342900">
+              <a:spcAft>
+                <a:spcPts val="800"/>
+              </a:spcAft>
+              <a:buSzPct val="100000"/>
+              <a:buChar char="•"/>
+            </a:pPr>
+            <a:r>
+              <a:rPr lang="en-US" sz="1350" dirty="0">
+                <a:solidFill>
+                  <a:srgbClr val="36454F"/>
+                </a:solidFill>
+                <a:latin typeface="Calibri" pitchFamily="34" charset="0"/>
+                <a:ea typeface="Calibri" pitchFamily="34" charset="-122"/>
+                <a:cs typeface="Calibri" pitchFamily="34" charset="-120"/>
+              </a:rPr>
+              <a:t>Não sabemos se o gargalo é a coleta</a:t>
+            </a:r>
+            <a:endParaRPr lang="en-US" sz="1350" dirty="0"/>
+          </a:p>
+          <a:p>
+            <a:pPr marL="342900" indent="-342900">
+              <a:spcAft>
+                <a:spcPts val="800"/>
+              </a:spcAft>
+              <a:buSzPct val="100000"/>
+              <a:buChar char="•"/>
+            </a:pPr>
+            <a:r>
+              <a:rPr lang="en-US" sz="1350" dirty="0">
+                <a:solidFill>
+                  <a:srgbClr val="36454F"/>
+                </a:solidFill>
+                <a:latin typeface="Calibri" pitchFamily="34" charset="0"/>
+                <a:ea typeface="Calibri" pitchFamily="34" charset="-122"/>
+                <a:cs typeface="Calibri" pitchFamily="34" charset="-120"/>
+              </a:rPr>
+              <a:t>Ainda assim, precisamos começar</a:t>
+            </a:r>
+            <a:endParaRPr lang="en-US" sz="1350" dirty="0"/>
+          </a:p>
+        </p:txBody>
+      </p:sp>
+      <p:sp>
+        <p:nvSpPr>
+          <p:cNvPr id="8" name="Shape 6"/>
+          <p:cNvSpPr/>
+          <p:nvPr/>
+        </p:nvSpPr>
+        <p:spPr>
+          <a:xfrm>
+            <a:off x="4709160" y="1097280"/>
+            <a:ext cx="3977640" cy="2926080"/>
           </a:xfrm>
           <a:prstGeom prst="roundRect">
             <a:avLst>
-              <a:gd name="adj" fmla="val 12000"/>
+              <a:gd name="adj" fmla="val 4375"/>
             </a:avLst>
           </a:prstGeom>
           <a:solidFill>
-            <a:srgbClr val="FFFFFF"/>
+            <a:srgbClr val="FBF1EF"/>
           </a:solidFill>
           <a:ln w="19050">
             <a:solidFill>
@@ -7579,14 +7714,14 @@
       </p:sp>
       <p:sp>
         <p:nvSpPr>
-          <p:cNvPr id="7" name="Text 5"/>
-          <p:cNvSpPr/>
-          <p:nvPr/>
-        </p:nvSpPr>
-        <p:spPr>
-          <a:xfrm>
-            <a:off x="566928" y="2286000"/>
-            <a:ext cx="3438144" cy="914400"/>
+          <p:cNvPr id="9" name="Text 7"/>
+          <p:cNvSpPr/>
+          <p:nvPr/>
+        </p:nvSpPr>
+        <p:spPr>
+          <a:xfrm>
+            <a:off x="4910328" y="1243584"/>
+            <a:ext cx="3575304" cy="365760"/>
           </a:xfrm>
           <a:prstGeom prst="rect">
             <a:avLst/>
@@ -7598,11 +7733,11 @@
           <a:bodyPr wrap="square" lIns="0" tIns="0" rIns="0" bIns="0" rtlCol="0" anchor="ctr"/>
           <a:lstStyle/>
           <a:p>
-            <a:pPr algn="ctr" indent="0" marL="0">
+            <a:pPr indent="0" marL="0">
               <a:buNone/>
             </a:pPr>
             <a:r>
-              <a:rPr lang="en-US" sz="1200" i="1" dirty="0">
+              <a:rPr lang="en-US" sz="1400" b="1" dirty="0">
                 <a:solidFill>
                   <a:srgbClr val="B85042"/>
                 </a:solidFill>
@@ -7610,58 +7745,11 @@
                 <a:ea typeface="Calibri" pitchFamily="34" charset="-122"/>
                 <a:cs typeface="Calibri" pitchFamily="34" charset="-120"/>
               </a:rPr>
-              <a:t>"Quero um app com login e cadastro"</a:t>
-            </a:r>
-            <a:endParaRPr lang="en-US" sz="1200" dirty="0"/>
-          </a:p>
-        </p:txBody>
-      </p:sp>
-      <p:sp>
-        <p:nvSpPr>
-          <p:cNvPr id="8" name="Shape 6"/>
-          <p:cNvSpPr/>
-          <p:nvPr/>
-        </p:nvSpPr>
-        <p:spPr>
-          <a:xfrm>
-            <a:off x="4279392" y="2542032"/>
-            <a:ext cx="502920" cy="411480"/>
-          </a:xfrm>
-          <a:prstGeom prst="chevron">
-            <a:avLst/>
-          </a:prstGeom>
-          <a:solidFill>
-            <a:srgbClr val="97BC62"/>
-          </a:solidFill>
-          <a:ln/>
-        </p:spPr>
-      </p:sp>
-      <p:sp>
-        <p:nvSpPr>
-          <p:cNvPr id="9" name="Shape 7"/>
-          <p:cNvSpPr/>
-          <p:nvPr/>
-        </p:nvSpPr>
-        <p:spPr>
-          <a:xfrm>
-            <a:off x="4983480" y="2286000"/>
-            <a:ext cx="3703320" cy="914400"/>
-          </a:xfrm>
-          <a:prstGeom prst="roundRect">
-            <a:avLst>
-              <a:gd name="adj" fmla="val 12000"/>
-            </a:avLst>
-          </a:prstGeom>
-          <a:solidFill>
-            <a:srgbClr val="F1F5EF"/>
-          </a:solidFill>
-          <a:ln w="19050">
-            <a:solidFill>
-              <a:srgbClr val="2C5F2D"/>
-            </a:solidFill>
-            <a:prstDash val="solid"/>
-          </a:ln>
-        </p:spPr>
+              <a:t>O erro comum</a:t>
+            </a:r>
+            <a:endParaRPr lang="en-US" sz="1400" dirty="0"/>
+          </a:p>
+        </p:txBody>
       </p:sp>
       <p:sp>
         <p:nvSpPr>
@@ -7671,8 +7759,8 @@
         </p:nvSpPr>
         <p:spPr>
           <a:xfrm>
-            <a:off x="5093208" y="2286000"/>
-            <a:ext cx="3483864" cy="914400"/>
+            <a:off x="4910328" y="1645920"/>
+            <a:ext cx="3575304" cy="2194560"/>
           </a:xfrm>
           <a:prstGeom prst="rect">
             <a:avLst/>
@@ -7681,24 +7769,109 @@
           <a:ln/>
         </p:spPr>
         <p:txBody>
+          <a:bodyPr wrap="square" lIns="0" tIns="0" rIns="0" bIns="0" rtlCol="0" anchor="t"/>
+          <a:lstStyle/>
+          <a:p>
+            <a:pPr marL="342900" indent="-342900">
+              <a:spcAft>
+                <a:spcPts val="800"/>
+              </a:spcAft>
+              <a:buSzPct val="100000"/>
+              <a:buChar char="•"/>
+            </a:pPr>
+            <a:r>
+              <a:rPr lang="en-US" sz="1350" dirty="0">
+                <a:solidFill>
+                  <a:srgbClr val="7A3A31"/>
+                </a:solidFill>
+                <a:latin typeface="Calibri" pitchFamily="34" charset="0"/>
+                <a:ea typeface="Calibri" pitchFamily="34" charset="-122"/>
+                <a:cs typeface="Calibri" pitchFamily="34" charset="-120"/>
+              </a:rPr>
+              <a:t>Esperar ter todos os dados para decidir</a:t>
+            </a:r>
+            <a:endParaRPr lang="en-US" sz="1350" dirty="0"/>
+          </a:p>
+          <a:p>
+            <a:pPr marL="342900" indent="-342900">
+              <a:spcAft>
+                <a:spcPts val="800"/>
+              </a:spcAft>
+              <a:buSzPct val="100000"/>
+              <a:buChar char="•"/>
+            </a:pPr>
+            <a:r>
+              <a:rPr lang="en-US" sz="1350" dirty="0">
+                <a:solidFill>
+                  <a:srgbClr val="7A3A31"/>
+                </a:solidFill>
+                <a:latin typeface="Calibri" pitchFamily="34" charset="0"/>
+                <a:ea typeface="Calibri" pitchFamily="34" charset="-122"/>
+                <a:cs typeface="Calibri" pitchFamily="34" charset="-120"/>
+              </a:rPr>
+              <a:t>Levantar requisitos por seis semanas</a:t>
+            </a:r>
+            <a:endParaRPr lang="en-US" sz="1350" dirty="0"/>
+          </a:p>
+          <a:p>
+            <a:pPr marL="342900" indent="-342900">
+              <a:spcAft>
+                <a:spcPts val="800"/>
+              </a:spcAft>
+              <a:buSzPct val="100000"/>
+              <a:buChar char="•"/>
+            </a:pPr>
+            <a:r>
+              <a:rPr lang="en-US" sz="1350" dirty="0">
+                <a:solidFill>
+                  <a:srgbClr val="7A3A31"/>
+                </a:solidFill>
+                <a:latin typeface="Calibri" pitchFamily="34" charset="0"/>
+                <a:ea typeface="Calibri" pitchFamily="34" charset="-122"/>
+                <a:cs typeface="Calibri" pitchFamily="34" charset="-120"/>
+              </a:rPr>
+              <a:t>Começar pela tela, não pelo problema</a:t>
+            </a:r>
+            <a:endParaRPr lang="en-US" sz="1350" dirty="0"/>
+          </a:p>
+        </p:txBody>
+      </p:sp>
+      <p:sp>
+        <p:nvSpPr>
+          <p:cNvPr id="11" name="Text 9"/>
+          <p:cNvSpPr/>
+          <p:nvPr/>
+        </p:nvSpPr>
+        <p:spPr>
+          <a:xfrm>
+            <a:off x="457200" y="4759452"/>
+            <a:ext cx="8229600" cy="256032"/>
+          </a:xfrm>
+          <a:prstGeom prst="rect">
+            <a:avLst/>
+          </a:prstGeom>
+          <a:noFill/>
+          <a:ln/>
+        </p:spPr>
+        <p:txBody>
           <a:bodyPr wrap="square" lIns="0" tIns="0" rIns="0" bIns="0" rtlCol="0" anchor="ctr"/>
           <a:lstStyle/>
           <a:p>
-            <a:pPr algn="ctr" indent="0" marL="0">
+            <a:pPr indent="0" marL="0">
               <a:buNone/>
             </a:pPr>
             <a:r>
-              <a:rPr lang="en-US" sz="1200" b="1" dirty="0">
-                <a:solidFill>
-                  <a:srgbClr val="2C5F2D"/>
-                </a:solidFill>
-                <a:latin typeface="Calibri" pitchFamily="34" charset="0"/>
-                <a:ea typeface="Calibri" pitchFamily="34" charset="-122"/>
-                <a:cs typeface="Calibri" pitchFamily="34" charset="-120"/>
-              </a:rPr>
-              <a:t>"Comida boa está sendo descartada enquanto ONGs ficam sem"</a:t>
-            </a:r>
-            <a:endParaRPr lang="en-US" sz="1200" dirty="0"/>
+              <a:rPr lang="en-US" sz="1000" dirty="0">
+                <a:solidFill>
+                  <a:srgbClr val="6E7D72"/>
+                </a:solidFill>
+                <a:latin typeface="Calibri" pitchFamily="34" charset="0"/>
+                <a:ea typeface="Calibri" pitchFamily="34" charset="-122"/>
+                <a:cs typeface="Calibri" pitchFamily="34" charset="-120"/>
+              </a:rPr>
+              <a:t>Exemplo + contraponto</a:t>
+            </a:r>
+            <a:endParaRPr lang="en-US" sz="1000" dirty="0"/>
           </a:p>
         </p:txBody>
       </p:sp>
@@ -8038,7 +8211,7 @@
               <a:buNone/>
             </a:pPr>
             <a:r>
-              <a:rPr lang="en-US" sz="2200" b="1" dirty="0">
+              <a:rPr lang="en-US" sz="2600" b="1" dirty="0">
                 <a:solidFill>
                   <a:srgbClr val="2C5F2D"/>
                 </a:solidFill>
@@ -8046,181 +8219,69 @@
                 <a:ea typeface="Cambria" pitchFamily="34" charset="-122"/>
                 <a:cs typeface="Cambria" pitchFamily="34" charset="-120"/>
               </a:rPr>
-              <a:t>No Prato Cheio — e o contraponto</a:t>
-            </a:r>
-            <a:endParaRPr lang="en-US" sz="2200" dirty="0"/>
-          </a:p>
-        </p:txBody>
-      </p:sp>
-      <p:sp>
-        <p:nvSpPr>
-          <p:cNvPr id="5" name="Shape 3"/>
-          <p:cNvSpPr/>
-          <p:nvPr/>
-        </p:nvSpPr>
-        <p:spPr>
-          <a:xfrm>
-            <a:off x="457200" y="1097280"/>
-            <a:ext cx="3977640" cy="2926080"/>
+              <a:t>Problema não é requisito</a:t>
+            </a:r>
+            <a:endParaRPr lang="en-US" sz="2600" dirty="0"/>
+          </a:p>
+        </p:txBody>
+      </p:sp>
+      <p:sp>
+        <p:nvSpPr>
+          <p:cNvPr id="5" name="Text 3"/>
+          <p:cNvSpPr/>
+          <p:nvPr/>
+        </p:nvSpPr>
+        <p:spPr>
+          <a:xfrm>
+            <a:off x="457200" y="1051560"/>
+            <a:ext cx="8229600" cy="1051560"/>
+          </a:xfrm>
+          <a:prstGeom prst="rect">
+            <a:avLst/>
+          </a:prstGeom>
+          <a:noFill/>
+          <a:ln/>
+        </p:spPr>
+        <p:txBody>
+          <a:bodyPr wrap="square" lIns="0" tIns="0" rIns="0" bIns="0" rtlCol="0" anchor="ctr"/>
+          <a:lstStyle/>
+          <a:p>
+            <a:pPr indent="0" marL="0">
+              <a:buNone/>
+            </a:pPr>
+            <a:r>
+              <a:rPr lang="en-US" sz="1800" dirty="0">
+                <a:solidFill>
+                  <a:srgbClr val="36454F"/>
+                </a:solidFill>
+                <a:latin typeface="Calibri" pitchFamily="34" charset="0"/>
+                <a:ea typeface="Calibri" pitchFamily="34" charset="-122"/>
+                <a:cs typeface="Calibri" pitchFamily="34" charset="-120"/>
+              </a:rPr>
+              <a:t>O problema é o que dói. O requisito é uma resposta possível — e quase sempre chega disfarçado de pedido.</a:t>
+            </a:r>
+            <a:endParaRPr lang="en-US" sz="1800" dirty="0"/>
+          </a:p>
+        </p:txBody>
+      </p:sp>
+      <p:sp>
+        <p:nvSpPr>
+          <p:cNvPr id="6" name="Shape 4"/>
+          <p:cNvSpPr/>
+          <p:nvPr/>
+        </p:nvSpPr>
+        <p:spPr>
+          <a:xfrm>
+            <a:off x="457200" y="2286000"/>
+            <a:ext cx="3657600" cy="914400"/>
           </a:xfrm>
           <a:prstGeom prst="roundRect">
             <a:avLst>
-              <a:gd name="adj" fmla="val 4375"/>
+              <a:gd name="adj" fmla="val 12000"/>
             </a:avLst>
           </a:prstGeom>
           <a:solidFill>
-            <a:srgbClr val="F1F5EF"/>
-          </a:solidFill>
-          <a:ln w="19050">
-            <a:solidFill>
-              <a:srgbClr val="97BC62"/>
-            </a:solidFill>
-            <a:prstDash val="solid"/>
-          </a:ln>
-        </p:spPr>
-      </p:sp>
-      <p:sp>
-        <p:nvSpPr>
-          <p:cNvPr id="6" name="Text 4"/>
-          <p:cNvSpPr/>
-          <p:nvPr/>
-        </p:nvSpPr>
-        <p:spPr>
-          <a:xfrm>
-            <a:off x="658368" y="1243584"/>
-            <a:ext cx="3575304" cy="365760"/>
-          </a:xfrm>
-          <a:prstGeom prst="rect">
-            <a:avLst/>
-          </a:prstGeom>
-          <a:noFill/>
-          <a:ln/>
-        </p:spPr>
-        <p:txBody>
-          <a:bodyPr wrap="square" lIns="0" tIns="0" rIns="0" bIns="0" rtlCol="0" anchor="ctr"/>
-          <a:lstStyle/>
-          <a:p>
-            <a:pPr indent="0" marL="0">
-              <a:buNone/>
-            </a:pPr>
-            <a:r>
-              <a:rPr lang="en-US" sz="1400" b="1" dirty="0">
-                <a:solidFill>
-                  <a:srgbClr val="2C5F2D"/>
-                </a:solidFill>
-                <a:latin typeface="Calibri" pitchFamily="34" charset="0"/>
-                <a:ea typeface="Calibri" pitchFamily="34" charset="-122"/>
-                <a:cs typeface="Calibri" pitchFamily="34" charset="-120"/>
-              </a:rPr>
-              <a:t>Análise de verdade</a:t>
-            </a:r>
-            <a:endParaRPr lang="en-US" sz="1400" dirty="0"/>
-          </a:p>
-        </p:txBody>
-      </p:sp>
-      <p:sp>
-        <p:nvSpPr>
-          <p:cNvPr id="7" name="Text 5"/>
-          <p:cNvSpPr/>
-          <p:nvPr/>
-        </p:nvSpPr>
-        <p:spPr>
-          <a:xfrm>
-            <a:off x="658368" y="1645920"/>
-            <a:ext cx="3575304" cy="2194560"/>
-          </a:xfrm>
-          <a:prstGeom prst="rect">
-            <a:avLst/>
-          </a:prstGeom>
-          <a:noFill/>
-          <a:ln/>
-        </p:spPr>
-        <p:txBody>
-          <a:bodyPr wrap="square" lIns="0" tIns="0" rIns="0" bIns="0" rtlCol="0" anchor="t"/>
-          <a:lstStyle/>
-          <a:p>
-            <a:pPr marL="342900" indent="-342900">
-              <a:spcAft>
-                <a:spcPts val="800"/>
-              </a:spcAft>
-              <a:buSzPct val="100000"/>
-              <a:buChar char="•"/>
-            </a:pPr>
-            <a:r>
-              <a:rPr lang="en-US" sz="1350" dirty="0">
-                <a:solidFill>
-                  <a:srgbClr val="36454F"/>
-                </a:solidFill>
-                <a:latin typeface="Calibri" pitchFamily="34" charset="0"/>
-                <a:ea typeface="Calibri" pitchFamily="34" charset="-122"/>
-                <a:cs typeface="Calibri" pitchFamily="34" charset="-120"/>
-              </a:rPr>
-              <a:t>Qual dor, de quem?</a:t>
-            </a:r>
-            <a:endParaRPr lang="en-US" sz="1350" dirty="0"/>
-          </a:p>
-          <a:p>
-            <a:pPr marL="342900" indent="-342900">
-              <a:spcAft>
-                <a:spcPts val="800"/>
-              </a:spcAft>
-              <a:buSzPct val="100000"/>
-              <a:buChar char="•"/>
-            </a:pPr>
-            <a:r>
-              <a:rPr lang="en-US" sz="1350" dirty="0">
-                <a:solidFill>
-                  <a:srgbClr val="36454F"/>
-                </a:solidFill>
-                <a:latin typeface="Calibri" pitchFamily="34" charset="0"/>
-                <a:ea typeface="Calibri" pitchFamily="34" charset="-122"/>
-                <a:cs typeface="Calibri" pitchFamily="34" charset="-120"/>
-              </a:rPr>
-              <a:t>O que muda se resolvermos?</a:t>
-            </a:r>
-            <a:endParaRPr lang="en-US" sz="1350" dirty="0"/>
-          </a:p>
-          <a:p>
-            <a:pPr marL="342900" indent="-342900">
-              <a:spcAft>
-                <a:spcPts val="800"/>
-              </a:spcAft>
-              <a:buSzPct val="100000"/>
-              <a:buChar char="•"/>
-            </a:pPr>
-            <a:r>
-              <a:rPr lang="en-US" sz="1350" dirty="0">
-                <a:solidFill>
-                  <a:srgbClr val="36454F"/>
-                </a:solidFill>
-                <a:latin typeface="Calibri" pitchFamily="34" charset="0"/>
-                <a:ea typeface="Calibri" pitchFamily="34" charset="-122"/>
-                <a:cs typeface="Calibri" pitchFamily="34" charset="-120"/>
-              </a:rPr>
-              <a:t>Que restrições limitam a solução?</a:t>
-            </a:r>
-            <a:endParaRPr lang="en-US" sz="1350" dirty="0"/>
-          </a:p>
-        </p:txBody>
-      </p:sp>
-      <p:sp>
-        <p:nvSpPr>
-          <p:cNvPr id="8" name="Shape 6"/>
-          <p:cNvSpPr/>
-          <p:nvPr/>
-        </p:nvSpPr>
-        <p:spPr>
-          <a:xfrm>
-            <a:off x="4709160" y="1097280"/>
-            <a:ext cx="3977640" cy="2926080"/>
-          </a:xfrm>
-          <a:prstGeom prst="roundRect">
-            <a:avLst>
-              <a:gd name="adj" fmla="val 4375"/>
-            </a:avLst>
-          </a:prstGeom>
-          <a:solidFill>
-            <a:srgbClr val="FBF1EF"/>
+            <a:srgbClr val="FFFFFF"/>
           </a:solidFill>
           <a:ln w="19050">
             <a:solidFill>
@@ -8232,14 +8293,14 @@
       </p:sp>
       <p:sp>
         <p:nvSpPr>
-          <p:cNvPr id="9" name="Text 7"/>
-          <p:cNvSpPr/>
-          <p:nvPr/>
-        </p:nvSpPr>
-        <p:spPr>
-          <a:xfrm>
-            <a:off x="4910328" y="1243584"/>
-            <a:ext cx="3575304" cy="365760"/>
+          <p:cNvPr id="7" name="Text 5"/>
+          <p:cNvSpPr/>
+          <p:nvPr/>
+        </p:nvSpPr>
+        <p:spPr>
+          <a:xfrm>
+            <a:off x="566928" y="2286000"/>
+            <a:ext cx="3438144" cy="914400"/>
           </a:xfrm>
           <a:prstGeom prst="rect">
             <a:avLst/>
@@ -8251,11 +8312,11 @@
           <a:bodyPr wrap="square" lIns="0" tIns="0" rIns="0" bIns="0" rtlCol="0" anchor="ctr"/>
           <a:lstStyle/>
           <a:p>
-            <a:pPr indent="0" marL="0">
+            <a:pPr algn="ctr" indent="0" marL="0">
               <a:buNone/>
             </a:pPr>
             <a:r>
-              <a:rPr lang="en-US" sz="1400" b="1" dirty="0">
+              <a:rPr lang="en-US" sz="1200" i="1" dirty="0">
                 <a:solidFill>
                   <a:srgbClr val="B85042"/>
                 </a:solidFill>
@@ -8263,11 +8324,58 @@
                 <a:ea typeface="Calibri" pitchFamily="34" charset="-122"/>
                 <a:cs typeface="Calibri" pitchFamily="34" charset="-120"/>
               </a:rPr>
-              <a:t>Pedido disfarçado</a:t>
-            </a:r>
-            <a:endParaRPr lang="en-US" sz="1400" dirty="0"/>
-          </a:p>
-        </p:txBody>
+              <a:t>"Quero um app com login e cadastro"</a:t>
+            </a:r>
+            <a:endParaRPr lang="en-US" sz="1200" dirty="0"/>
+          </a:p>
+        </p:txBody>
+      </p:sp>
+      <p:sp>
+        <p:nvSpPr>
+          <p:cNvPr id="8" name="Shape 6"/>
+          <p:cNvSpPr/>
+          <p:nvPr/>
+        </p:nvSpPr>
+        <p:spPr>
+          <a:xfrm>
+            <a:off x="4279392" y="2542032"/>
+            <a:ext cx="502920" cy="411480"/>
+          </a:xfrm>
+          <a:prstGeom prst="chevron">
+            <a:avLst/>
+          </a:prstGeom>
+          <a:solidFill>
+            <a:srgbClr val="97BC62"/>
+          </a:solidFill>
+          <a:ln/>
+        </p:spPr>
+      </p:sp>
+      <p:sp>
+        <p:nvSpPr>
+          <p:cNvPr id="9" name="Shape 7"/>
+          <p:cNvSpPr/>
+          <p:nvPr/>
+        </p:nvSpPr>
+        <p:spPr>
+          <a:xfrm>
+            <a:off x="4983480" y="2286000"/>
+            <a:ext cx="3703320" cy="914400"/>
+          </a:xfrm>
+          <a:prstGeom prst="roundRect">
+            <a:avLst>
+              <a:gd name="adj" fmla="val 12000"/>
+            </a:avLst>
+          </a:prstGeom>
+          <a:solidFill>
+            <a:srgbClr val="F1F5EF"/>
+          </a:solidFill>
+          <a:ln w="19050">
+            <a:solidFill>
+              <a:srgbClr val="2C5F2D"/>
+            </a:solidFill>
+            <a:prstDash val="solid"/>
+          </a:ln>
+        </p:spPr>
       </p:sp>
       <p:sp>
         <p:nvSpPr>
@@ -8277,8 +8385,8 @@
         </p:nvSpPr>
         <p:spPr>
           <a:xfrm>
-            <a:off x="4910328" y="1645920"/>
-            <a:ext cx="3575304" cy="2194560"/>
+            <a:off x="5093208" y="2286000"/>
+            <a:ext cx="3483864" cy="914400"/>
           </a:xfrm>
           <a:prstGeom prst="rect">
             <a:avLst/>
@@ -8287,109 +8395,24 @@
           <a:ln/>
         </p:spPr>
         <p:txBody>
-          <a:bodyPr wrap="square" lIns="0" tIns="0" rIns="0" bIns="0" rtlCol="0" anchor="t"/>
-          <a:lstStyle/>
-          <a:p>
-            <a:pPr marL="342900" indent="-342900">
-              <a:spcAft>
-                <a:spcPts val="800"/>
-              </a:spcAft>
-              <a:buSzPct val="100000"/>
-              <a:buChar char="•"/>
-            </a:pPr>
-            <a:r>
-              <a:rPr lang="en-US" sz="1350" dirty="0">
-                <a:solidFill>
-                  <a:srgbClr val="7A3A31"/>
-                </a:solidFill>
-                <a:latin typeface="Calibri" pitchFamily="34" charset="0"/>
-                <a:ea typeface="Calibri" pitchFamily="34" charset="-122"/>
-                <a:cs typeface="Calibri" pitchFamily="34" charset="-120"/>
-              </a:rPr>
-              <a:t>"Preciso de um dashboard"</a:t>
-            </a:r>
-            <a:endParaRPr lang="en-US" sz="1350" dirty="0"/>
-          </a:p>
-          <a:p>
-            <a:pPr marL="342900" indent="-342900">
-              <a:spcAft>
-                <a:spcPts val="800"/>
-              </a:spcAft>
-              <a:buSzPct val="100000"/>
-              <a:buChar char="•"/>
-            </a:pPr>
-            <a:r>
-              <a:rPr lang="en-US" sz="1350" dirty="0">
-                <a:solidFill>
-                  <a:srgbClr val="7A3A31"/>
-                </a:solidFill>
-                <a:latin typeface="Calibri" pitchFamily="34" charset="0"/>
-                <a:ea typeface="Calibri" pitchFamily="34" charset="-122"/>
-                <a:cs typeface="Calibri" pitchFamily="34" charset="-120"/>
-              </a:rPr>
-              <a:t>"Tem que ter notificação push"</a:t>
-            </a:r>
-            <a:endParaRPr lang="en-US" sz="1350" dirty="0"/>
-          </a:p>
-          <a:p>
-            <a:pPr marL="342900" indent="-342900">
-              <a:spcAft>
-                <a:spcPts val="800"/>
-              </a:spcAft>
-              <a:buSzPct val="100000"/>
-              <a:buChar char="•"/>
-            </a:pPr>
-            <a:r>
-              <a:rPr lang="en-US" sz="1350" dirty="0">
-                <a:solidFill>
-                  <a:srgbClr val="7A3A31"/>
-                </a:solidFill>
-                <a:latin typeface="Calibri" pitchFamily="34" charset="0"/>
-                <a:ea typeface="Calibri" pitchFamily="34" charset="-122"/>
-                <a:cs typeface="Calibri" pitchFamily="34" charset="-120"/>
-              </a:rPr>
-              <a:t>A solução já vem embutida no pedido</a:t>
-            </a:r>
-            <a:endParaRPr lang="en-US" sz="1350" dirty="0"/>
-          </a:p>
-        </p:txBody>
-      </p:sp>
-      <p:sp>
-        <p:nvSpPr>
-          <p:cNvPr id="11" name="Text 9"/>
-          <p:cNvSpPr/>
-          <p:nvPr/>
-        </p:nvSpPr>
-        <p:spPr>
-          <a:xfrm>
-            <a:off x="457200" y="4759452"/>
-            <a:ext cx="8229600" cy="256032"/>
-          </a:xfrm>
-          <a:prstGeom prst="rect">
-            <a:avLst/>
-          </a:prstGeom>
-          <a:noFill/>
-          <a:ln/>
-        </p:spPr>
-        <p:txBody>
           <a:bodyPr wrap="square" lIns="0" tIns="0" rIns="0" bIns="0" rtlCol="0" anchor="ctr"/>
           <a:lstStyle/>
           <a:p>
-            <a:pPr indent="0" marL="0">
+            <a:pPr algn="ctr" indent="0" marL="0">
               <a:buNone/>
             </a:pPr>
             <a:r>
-              <a:rPr lang="en-US" sz="1000" dirty="0">
-                <a:solidFill>
-                  <a:srgbClr val="6E7D72"/>
-                </a:solidFill>
-                <a:latin typeface="Calibri" pitchFamily="34" charset="0"/>
-                <a:ea typeface="Calibri" pitchFamily="34" charset="-122"/>
-                <a:cs typeface="Calibri" pitchFamily="34" charset="-120"/>
-              </a:rPr>
-              <a:t>Exemplo + contraponto</a:t>
-            </a:r>
-            <a:endParaRPr lang="en-US" sz="1000" dirty="0"/>
+              <a:rPr lang="en-US" sz="1200" b="1" dirty="0">
+                <a:solidFill>
+                  <a:srgbClr val="2C5F2D"/>
+                </a:solidFill>
+                <a:latin typeface="Calibri" pitchFamily="34" charset="0"/>
+                <a:ea typeface="Calibri" pitchFamily="34" charset="-122"/>
+                <a:cs typeface="Calibri" pitchFamily="34" charset="-120"/>
+              </a:rPr>
+              <a:t>"Comida boa está sendo descartada enquanto ONGs ficam sem"</a:t>
+            </a:r>
+            <a:endParaRPr lang="en-US" sz="1200" dirty="0"/>
           </a:p>
         </p:txBody>
       </p:sp>
@@ -8471,7 +8494,7 @@
                 <a:ea typeface="Calibri" pitchFamily="34" charset="-122"/>
                 <a:cs typeface="Calibri" pitchFamily="34" charset="-120"/>
               </a:rPr>
-              <a:t>4</a:t>
+              <a:t>3</a:t>
             </a:r>
             <a:endParaRPr lang="en-US" sz="1500" dirty="0"/>
           </a:p>
@@ -8502,7 +8525,7 @@
               <a:buNone/>
             </a:pPr>
             <a:r>
-              <a:rPr lang="en-US" sz="2600" b="1" dirty="0">
+              <a:rPr lang="en-US" sz="2200" b="1" dirty="0">
                 <a:solidFill>
                   <a:srgbClr val="2C5F2D"/>
                 </a:solidFill>
@@ -8510,327 +8533,30 @@
                 <a:ea typeface="Cambria" pitchFamily="34" charset="-122"/>
                 <a:cs typeface="Cambria" pitchFamily="34" charset="-120"/>
               </a:rPr>
-              <a:t>Produto vivo: o software roda desde já</a:t>
-            </a:r>
-            <a:endParaRPr lang="en-US" sz="2600" dirty="0"/>
-          </a:p>
-        </p:txBody>
-      </p:sp>
-      <p:sp>
-        <p:nvSpPr>
-          <p:cNvPr id="5" name="Text 3"/>
-          <p:cNvSpPr/>
-          <p:nvPr/>
-        </p:nvSpPr>
-        <p:spPr>
-          <a:xfrm>
-            <a:off x="457200" y="1051560"/>
-            <a:ext cx="8229600" cy="1051560"/>
-          </a:xfrm>
-          <a:prstGeom prst="rect">
-            <a:avLst/>
-          </a:prstGeom>
-          <a:noFill/>
-          <a:ln/>
-        </p:spPr>
-        <p:txBody>
-          <a:bodyPr wrap="square" lIns="0" tIns="0" rIns="0" bIns="0" rtlCol="0" anchor="ctr"/>
-          <a:lstStyle/>
-          <a:p>
-            <a:pPr indent="0" marL="0">
-              <a:buNone/>
-            </a:pPr>
-            <a:r>
-              <a:rPr lang="en-US" sz="1800" dirty="0">
-                <a:solidFill>
-                  <a:srgbClr val="36454F"/>
-                </a:solidFill>
-                <a:latin typeface="Calibri" pitchFamily="34" charset="0"/>
-                <a:ea typeface="Calibri" pitchFamily="34" charset="-122"/>
-                <a:cs typeface="Calibri" pitchFamily="34" charset="-120"/>
-              </a:rPr>
-              <a:t>Na aula 4 uma fatia fina atravessa todas as camadas e executa. É o walking skeleton.</a:t>
-            </a:r>
-            <a:endParaRPr lang="en-US" sz="1800" dirty="0"/>
-          </a:p>
-        </p:txBody>
-      </p:sp>
-      <p:sp>
-        <p:nvSpPr>
-          <p:cNvPr id="6" name="Shape 4"/>
-          <p:cNvSpPr/>
-          <p:nvPr/>
-        </p:nvSpPr>
-        <p:spPr>
-          <a:xfrm>
-            <a:off x="457200" y="2286000"/>
-            <a:ext cx="1714500" cy="713232"/>
+              <a:t>No Prato Cheio — e o contraponto</a:t>
+            </a:r>
+            <a:endParaRPr lang="en-US" sz="2200" dirty="0"/>
+          </a:p>
+        </p:txBody>
+      </p:sp>
+      <p:sp>
+        <p:nvSpPr>
+          <p:cNvPr id="5" name="Shape 3"/>
+          <p:cNvSpPr/>
+          <p:nvPr/>
+        </p:nvSpPr>
+        <p:spPr>
+          <a:xfrm>
+            <a:off x="457200" y="1097280"/>
+            <a:ext cx="3977640" cy="2926080"/>
           </a:xfrm>
           <a:prstGeom prst="roundRect">
             <a:avLst>
-              <a:gd name="adj" fmla="val 15385"/>
+              <a:gd name="adj" fmla="val 4375"/>
             </a:avLst>
           </a:prstGeom>
           <a:solidFill>
             <a:srgbClr val="F1F5EF"/>
-          </a:solidFill>
-          <a:ln w="19050">
-            <a:solidFill>
-              <a:srgbClr val="2C5F2D"/>
-            </a:solidFill>
-            <a:prstDash val="solid"/>
-          </a:ln>
-        </p:spPr>
-      </p:sp>
-      <p:sp>
-        <p:nvSpPr>
-          <p:cNvPr id="7" name="Text 5"/>
-          <p:cNvSpPr/>
-          <p:nvPr/>
-        </p:nvSpPr>
-        <p:spPr>
-          <a:xfrm>
-            <a:off x="457200" y="2286000"/>
-            <a:ext cx="1714500" cy="713232"/>
-          </a:xfrm>
-          <a:prstGeom prst="rect">
-            <a:avLst/>
-          </a:prstGeom>
-          <a:noFill/>
-          <a:ln/>
-        </p:spPr>
-        <p:txBody>
-          <a:bodyPr wrap="square" lIns="0" tIns="0" rIns="0" bIns="0" rtlCol="0" anchor="ctr"/>
-          <a:lstStyle/>
-          <a:p>
-            <a:pPr algn="ctr" indent="0" marL="0">
-              <a:buNone/>
-            </a:pPr>
-            <a:r>
-              <a:rPr lang="en-US" sz="1300" b="1" dirty="0">
-                <a:solidFill>
-                  <a:srgbClr val="2C5F2D"/>
-                </a:solidFill>
-                <a:latin typeface="Calibri" pitchFamily="34" charset="0"/>
-                <a:ea typeface="Calibri" pitchFamily="34" charset="-122"/>
-                <a:cs typeface="Calibri" pitchFamily="34" charset="-120"/>
-              </a:rPr>
-              <a:t>Interface</a:t>
-            </a:r>
-            <a:endParaRPr lang="en-US" sz="1300" dirty="0"/>
-          </a:p>
-        </p:txBody>
-      </p:sp>
-      <p:sp>
-        <p:nvSpPr>
-          <p:cNvPr id="8" name="Shape 6"/>
-          <p:cNvSpPr/>
-          <p:nvPr/>
-        </p:nvSpPr>
-        <p:spPr>
-          <a:xfrm>
-            <a:off x="2226564" y="2478024"/>
-            <a:ext cx="347472" cy="329184"/>
-          </a:xfrm>
-          <a:prstGeom prst="chevron">
-            <a:avLst/>
-          </a:prstGeom>
-          <a:solidFill>
-            <a:srgbClr val="97BC62"/>
-          </a:solidFill>
-          <a:ln/>
-        </p:spPr>
-      </p:sp>
-      <p:sp>
-        <p:nvSpPr>
-          <p:cNvPr id="9" name="Shape 7"/>
-          <p:cNvSpPr/>
-          <p:nvPr/>
-        </p:nvSpPr>
-        <p:spPr>
-          <a:xfrm>
-            <a:off x="2628900" y="2286000"/>
-            <a:ext cx="1714500" cy="713232"/>
-          </a:xfrm>
-          <a:prstGeom prst="roundRect">
-            <a:avLst>
-              <a:gd name="adj" fmla="val 15385"/>
-            </a:avLst>
-          </a:prstGeom>
-          <a:solidFill>
-            <a:srgbClr val="F1F5EF"/>
-          </a:solidFill>
-          <a:ln w="19050">
-            <a:solidFill>
-              <a:srgbClr val="2C5F2D"/>
-            </a:solidFill>
-            <a:prstDash val="solid"/>
-          </a:ln>
-        </p:spPr>
-      </p:sp>
-      <p:sp>
-        <p:nvSpPr>
-          <p:cNvPr id="10" name="Text 8"/>
-          <p:cNvSpPr/>
-          <p:nvPr/>
-        </p:nvSpPr>
-        <p:spPr>
-          <a:xfrm>
-            <a:off x="2628900" y="2286000"/>
-            <a:ext cx="1714500" cy="713232"/>
-          </a:xfrm>
-          <a:prstGeom prst="rect">
-            <a:avLst/>
-          </a:prstGeom>
-          <a:noFill/>
-          <a:ln/>
-        </p:spPr>
-        <p:txBody>
-          <a:bodyPr wrap="square" lIns="0" tIns="0" rIns="0" bIns="0" rtlCol="0" anchor="ctr"/>
-          <a:lstStyle/>
-          <a:p>
-            <a:pPr algn="ctr" indent="0" marL="0">
-              <a:buNone/>
-            </a:pPr>
-            <a:r>
-              <a:rPr lang="en-US" sz="1300" b="1" dirty="0">
-                <a:solidFill>
-                  <a:srgbClr val="2C5F2D"/>
-                </a:solidFill>
-                <a:latin typeface="Calibri" pitchFamily="34" charset="0"/>
-                <a:ea typeface="Calibri" pitchFamily="34" charset="-122"/>
-                <a:cs typeface="Calibri" pitchFamily="34" charset="-120"/>
-              </a:rPr>
-              <a:t>Regra de negócio</a:t>
-            </a:r>
-            <a:endParaRPr lang="en-US" sz="1300" dirty="0"/>
-          </a:p>
-        </p:txBody>
-      </p:sp>
-      <p:sp>
-        <p:nvSpPr>
-          <p:cNvPr id="11" name="Shape 9"/>
-          <p:cNvSpPr/>
-          <p:nvPr/>
-        </p:nvSpPr>
-        <p:spPr>
-          <a:xfrm>
-            <a:off x="4398264" y="2478024"/>
-            <a:ext cx="347472" cy="329184"/>
-          </a:xfrm>
-          <a:prstGeom prst="chevron">
-            <a:avLst/>
-          </a:prstGeom>
-          <a:solidFill>
-            <a:srgbClr val="97BC62"/>
-          </a:solidFill>
-          <a:ln/>
-        </p:spPr>
-      </p:sp>
-      <p:sp>
-        <p:nvSpPr>
-          <p:cNvPr id="12" name="Shape 10"/>
-          <p:cNvSpPr/>
-          <p:nvPr/>
-        </p:nvSpPr>
-        <p:spPr>
-          <a:xfrm>
-            <a:off x="4800600" y="2286000"/>
-            <a:ext cx="1714500" cy="713232"/>
-          </a:xfrm>
-          <a:prstGeom prst="roundRect">
-            <a:avLst>
-              <a:gd name="adj" fmla="val 15385"/>
-            </a:avLst>
-          </a:prstGeom>
-          <a:solidFill>
-            <a:srgbClr val="F1F5EF"/>
-          </a:solidFill>
-          <a:ln w="19050">
-            <a:solidFill>
-              <a:srgbClr val="2C5F2D"/>
-            </a:solidFill>
-            <a:prstDash val="solid"/>
-          </a:ln>
-        </p:spPr>
-      </p:sp>
-      <p:sp>
-        <p:nvSpPr>
-          <p:cNvPr id="13" name="Text 11"/>
-          <p:cNvSpPr/>
-          <p:nvPr/>
-        </p:nvSpPr>
-        <p:spPr>
-          <a:xfrm>
-            <a:off x="4800600" y="2286000"/>
-            <a:ext cx="1714500" cy="713232"/>
-          </a:xfrm>
-          <a:prstGeom prst="rect">
-            <a:avLst/>
-          </a:prstGeom>
-          <a:noFill/>
-          <a:ln/>
-        </p:spPr>
-        <p:txBody>
-          <a:bodyPr wrap="square" lIns="0" tIns="0" rIns="0" bIns="0" rtlCol="0" anchor="ctr"/>
-          <a:lstStyle/>
-          <a:p>
-            <a:pPr algn="ctr" indent="0" marL="0">
-              <a:buNone/>
-            </a:pPr>
-            <a:r>
-              <a:rPr lang="en-US" sz="1300" b="1" dirty="0">
-                <a:solidFill>
-                  <a:srgbClr val="2C5F2D"/>
-                </a:solidFill>
-                <a:latin typeface="Calibri" pitchFamily="34" charset="0"/>
-                <a:ea typeface="Calibri" pitchFamily="34" charset="-122"/>
-                <a:cs typeface="Calibri" pitchFamily="34" charset="-120"/>
-              </a:rPr>
-              <a:t>Dados</a:t>
-            </a:r>
-            <a:endParaRPr lang="en-US" sz="1300" dirty="0"/>
-          </a:p>
-        </p:txBody>
-      </p:sp>
-      <p:sp>
-        <p:nvSpPr>
-          <p:cNvPr id="14" name="Shape 12"/>
-          <p:cNvSpPr/>
-          <p:nvPr/>
-        </p:nvSpPr>
-        <p:spPr>
-          <a:xfrm>
-            <a:off x="6569964" y="2478024"/>
-            <a:ext cx="347472" cy="329184"/>
-          </a:xfrm>
-          <a:prstGeom prst="chevron">
-            <a:avLst/>
-          </a:prstGeom>
-          <a:solidFill>
-            <a:srgbClr val="97BC62"/>
-          </a:solidFill>
-          <a:ln/>
-        </p:spPr>
-      </p:sp>
-      <p:sp>
-        <p:nvSpPr>
-          <p:cNvPr id="15" name="Shape 13"/>
-          <p:cNvSpPr/>
-          <p:nvPr/>
-        </p:nvSpPr>
-        <p:spPr>
-          <a:xfrm>
-            <a:off x="6972300" y="2286000"/>
-            <a:ext cx="1714500" cy="713232"/>
-          </a:xfrm>
-          <a:prstGeom prst="roundRect">
-            <a:avLst>
-              <a:gd name="adj" fmla="val 15385"/>
-            </a:avLst>
-          </a:prstGeom>
-          <a:solidFill>
-            <a:srgbClr val="97BC62"/>
           </a:solidFill>
           <a:ln w="19050">
             <a:solidFill>
@@ -8842,14 +8568,14 @@
       </p:sp>
       <p:sp>
         <p:nvSpPr>
-          <p:cNvPr id="16" name="Text 14"/>
-          <p:cNvSpPr/>
-          <p:nvPr/>
-        </p:nvSpPr>
-        <p:spPr>
-          <a:xfrm>
-            <a:off x="6972300" y="2286000"/>
-            <a:ext cx="1714500" cy="713232"/>
+          <p:cNvPr id="6" name="Text 4"/>
+          <p:cNvSpPr/>
+          <p:nvPr/>
+        </p:nvSpPr>
+        <p:spPr>
+          <a:xfrm>
+            <a:off x="658368" y="1243584"/>
+            <a:ext cx="3575304" cy="365760"/>
           </a:xfrm>
           <a:prstGeom prst="rect">
             <a:avLst/>
@@ -8861,21 +8587,296 @@
           <a:bodyPr wrap="square" lIns="0" tIns="0" rIns="0" bIns="0" rtlCol="0" anchor="ctr"/>
           <a:lstStyle/>
           <a:p>
-            <a:pPr algn="ctr" indent="0" marL="0">
+            <a:pPr indent="0" marL="0">
               <a:buNone/>
             </a:pPr>
             <a:r>
-              <a:rPr lang="en-US" sz="1300" b="1" dirty="0">
-                <a:solidFill>
-                  <a:srgbClr val="1F3D1F"/>
-                </a:solidFill>
-                <a:latin typeface="Calibri" pitchFamily="34" charset="0"/>
-                <a:ea typeface="Calibri" pitchFamily="34" charset="-122"/>
-                <a:cs typeface="Calibri" pitchFamily="34" charset="-120"/>
-              </a:rPr>
-              <a:t>CI verde</a:t>
-            </a:r>
-            <a:endParaRPr lang="en-US" sz="1300" dirty="0"/>
+              <a:rPr lang="en-US" sz="1400" b="1" dirty="0">
+                <a:solidFill>
+                  <a:srgbClr val="2C5F2D"/>
+                </a:solidFill>
+                <a:latin typeface="Calibri" pitchFamily="34" charset="0"/>
+                <a:ea typeface="Calibri" pitchFamily="34" charset="-122"/>
+                <a:cs typeface="Calibri" pitchFamily="34" charset="-120"/>
+              </a:rPr>
+              <a:t>Análise de verdade</a:t>
+            </a:r>
+            <a:endParaRPr lang="en-US" sz="1400" dirty="0"/>
+          </a:p>
+        </p:txBody>
+      </p:sp>
+      <p:sp>
+        <p:nvSpPr>
+          <p:cNvPr id="7" name="Text 5"/>
+          <p:cNvSpPr/>
+          <p:nvPr/>
+        </p:nvSpPr>
+        <p:spPr>
+          <a:xfrm>
+            <a:off x="658368" y="1645920"/>
+            <a:ext cx="3575304" cy="2194560"/>
+          </a:xfrm>
+          <a:prstGeom prst="rect">
+            <a:avLst/>
+          </a:prstGeom>
+          <a:noFill/>
+          <a:ln/>
+        </p:spPr>
+        <p:txBody>
+          <a:bodyPr wrap="square" lIns="0" tIns="0" rIns="0" bIns="0" rtlCol="0" anchor="t"/>
+          <a:lstStyle/>
+          <a:p>
+            <a:pPr marL="342900" indent="-342900">
+              <a:spcAft>
+                <a:spcPts val="800"/>
+              </a:spcAft>
+              <a:buSzPct val="100000"/>
+              <a:buChar char="•"/>
+            </a:pPr>
+            <a:r>
+              <a:rPr lang="en-US" sz="1350" dirty="0">
+                <a:solidFill>
+                  <a:srgbClr val="36454F"/>
+                </a:solidFill>
+                <a:latin typeface="Calibri" pitchFamily="34" charset="0"/>
+                <a:ea typeface="Calibri" pitchFamily="34" charset="-122"/>
+                <a:cs typeface="Calibri" pitchFamily="34" charset="-120"/>
+              </a:rPr>
+              <a:t>Qual dor, de quem?</a:t>
+            </a:r>
+            <a:endParaRPr lang="en-US" sz="1350" dirty="0"/>
+          </a:p>
+          <a:p>
+            <a:pPr marL="342900" indent="-342900">
+              <a:spcAft>
+                <a:spcPts val="800"/>
+              </a:spcAft>
+              <a:buSzPct val="100000"/>
+              <a:buChar char="•"/>
+            </a:pPr>
+            <a:r>
+              <a:rPr lang="en-US" sz="1350" dirty="0">
+                <a:solidFill>
+                  <a:srgbClr val="36454F"/>
+                </a:solidFill>
+                <a:latin typeface="Calibri" pitchFamily="34" charset="0"/>
+                <a:ea typeface="Calibri" pitchFamily="34" charset="-122"/>
+                <a:cs typeface="Calibri" pitchFamily="34" charset="-120"/>
+              </a:rPr>
+              <a:t>O que muda se resolvermos?</a:t>
+            </a:r>
+            <a:endParaRPr lang="en-US" sz="1350" dirty="0"/>
+          </a:p>
+          <a:p>
+            <a:pPr marL="342900" indent="-342900">
+              <a:spcAft>
+                <a:spcPts val="800"/>
+              </a:spcAft>
+              <a:buSzPct val="100000"/>
+              <a:buChar char="•"/>
+            </a:pPr>
+            <a:r>
+              <a:rPr lang="en-US" sz="1350" dirty="0">
+                <a:solidFill>
+                  <a:srgbClr val="36454F"/>
+                </a:solidFill>
+                <a:latin typeface="Calibri" pitchFamily="34" charset="0"/>
+                <a:ea typeface="Calibri" pitchFamily="34" charset="-122"/>
+                <a:cs typeface="Calibri" pitchFamily="34" charset="-120"/>
+              </a:rPr>
+              <a:t>Que restrições limitam a solução?</a:t>
+            </a:r>
+            <a:endParaRPr lang="en-US" sz="1350" dirty="0"/>
+          </a:p>
+        </p:txBody>
+      </p:sp>
+      <p:sp>
+        <p:nvSpPr>
+          <p:cNvPr id="8" name="Shape 6"/>
+          <p:cNvSpPr/>
+          <p:nvPr/>
+        </p:nvSpPr>
+        <p:spPr>
+          <a:xfrm>
+            <a:off x="4709160" y="1097280"/>
+            <a:ext cx="3977640" cy="2926080"/>
+          </a:xfrm>
+          <a:prstGeom prst="roundRect">
+            <a:avLst>
+              <a:gd name="adj" fmla="val 4375"/>
+            </a:avLst>
+          </a:prstGeom>
+          <a:solidFill>
+            <a:srgbClr val="FBF1EF"/>
+          </a:solidFill>
+          <a:ln w="19050">
+            <a:solidFill>
+              <a:srgbClr val="B85042"/>
+            </a:solidFill>
+            <a:prstDash val="solid"/>
+          </a:ln>
+        </p:spPr>
+      </p:sp>
+      <p:sp>
+        <p:nvSpPr>
+          <p:cNvPr id="9" name="Text 7"/>
+          <p:cNvSpPr/>
+          <p:nvPr/>
+        </p:nvSpPr>
+        <p:spPr>
+          <a:xfrm>
+            <a:off x="4910328" y="1243584"/>
+            <a:ext cx="3575304" cy="365760"/>
+          </a:xfrm>
+          <a:prstGeom prst="rect">
+            <a:avLst/>
+          </a:prstGeom>
+          <a:noFill/>
+          <a:ln/>
+        </p:spPr>
+        <p:txBody>
+          <a:bodyPr wrap="square" lIns="0" tIns="0" rIns="0" bIns="0" rtlCol="0" anchor="ctr"/>
+          <a:lstStyle/>
+          <a:p>
+            <a:pPr indent="0" marL="0">
+              <a:buNone/>
+            </a:pPr>
+            <a:r>
+              <a:rPr lang="en-US" sz="1400" b="1" dirty="0">
+                <a:solidFill>
+                  <a:srgbClr val="B85042"/>
+                </a:solidFill>
+                <a:latin typeface="Calibri" pitchFamily="34" charset="0"/>
+                <a:ea typeface="Calibri" pitchFamily="34" charset="-122"/>
+                <a:cs typeface="Calibri" pitchFamily="34" charset="-120"/>
+              </a:rPr>
+              <a:t>Pedido disfarçado</a:t>
+            </a:r>
+            <a:endParaRPr lang="en-US" sz="1400" dirty="0"/>
+          </a:p>
+        </p:txBody>
+      </p:sp>
+      <p:sp>
+        <p:nvSpPr>
+          <p:cNvPr id="10" name="Text 8"/>
+          <p:cNvSpPr/>
+          <p:nvPr/>
+        </p:nvSpPr>
+        <p:spPr>
+          <a:xfrm>
+            <a:off x="4910328" y="1645920"/>
+            <a:ext cx="3575304" cy="2194560"/>
+          </a:xfrm>
+          <a:prstGeom prst="rect">
+            <a:avLst/>
+          </a:prstGeom>
+          <a:noFill/>
+          <a:ln/>
+        </p:spPr>
+        <p:txBody>
+          <a:bodyPr wrap="square" lIns="0" tIns="0" rIns="0" bIns="0" rtlCol="0" anchor="t"/>
+          <a:lstStyle/>
+          <a:p>
+            <a:pPr marL="342900" indent="-342900">
+              <a:spcAft>
+                <a:spcPts val="800"/>
+              </a:spcAft>
+              <a:buSzPct val="100000"/>
+              <a:buChar char="•"/>
+            </a:pPr>
+            <a:r>
+              <a:rPr lang="en-US" sz="1350" dirty="0">
+                <a:solidFill>
+                  <a:srgbClr val="7A3A31"/>
+                </a:solidFill>
+                <a:latin typeface="Calibri" pitchFamily="34" charset="0"/>
+                <a:ea typeface="Calibri" pitchFamily="34" charset="-122"/>
+                <a:cs typeface="Calibri" pitchFamily="34" charset="-120"/>
+              </a:rPr>
+              <a:t>"Preciso de um dashboard"</a:t>
+            </a:r>
+            <a:endParaRPr lang="en-US" sz="1350" dirty="0"/>
+          </a:p>
+          <a:p>
+            <a:pPr marL="342900" indent="-342900">
+              <a:spcAft>
+                <a:spcPts val="800"/>
+              </a:spcAft>
+              <a:buSzPct val="100000"/>
+              <a:buChar char="•"/>
+            </a:pPr>
+            <a:r>
+              <a:rPr lang="en-US" sz="1350" dirty="0">
+                <a:solidFill>
+                  <a:srgbClr val="7A3A31"/>
+                </a:solidFill>
+                <a:latin typeface="Calibri" pitchFamily="34" charset="0"/>
+                <a:ea typeface="Calibri" pitchFamily="34" charset="-122"/>
+                <a:cs typeface="Calibri" pitchFamily="34" charset="-120"/>
+              </a:rPr>
+              <a:t>"Tem que ter notificação push"</a:t>
+            </a:r>
+            <a:endParaRPr lang="en-US" sz="1350" dirty="0"/>
+          </a:p>
+          <a:p>
+            <a:pPr marL="342900" indent="-342900">
+              <a:spcAft>
+                <a:spcPts val="800"/>
+              </a:spcAft>
+              <a:buSzPct val="100000"/>
+              <a:buChar char="•"/>
+            </a:pPr>
+            <a:r>
+              <a:rPr lang="en-US" sz="1350" dirty="0">
+                <a:solidFill>
+                  <a:srgbClr val="7A3A31"/>
+                </a:solidFill>
+                <a:latin typeface="Calibri" pitchFamily="34" charset="0"/>
+                <a:ea typeface="Calibri" pitchFamily="34" charset="-122"/>
+                <a:cs typeface="Calibri" pitchFamily="34" charset="-120"/>
+              </a:rPr>
+              <a:t>A solução já vem embutida no pedido</a:t>
+            </a:r>
+            <a:endParaRPr lang="en-US" sz="1350" dirty="0"/>
+          </a:p>
+        </p:txBody>
+      </p:sp>
+      <p:sp>
+        <p:nvSpPr>
+          <p:cNvPr id="11" name="Text 9"/>
+          <p:cNvSpPr/>
+          <p:nvPr/>
+        </p:nvSpPr>
+        <p:spPr>
+          <a:xfrm>
+            <a:off x="457200" y="4759452"/>
+            <a:ext cx="8229600" cy="256032"/>
+          </a:xfrm>
+          <a:prstGeom prst="rect">
+            <a:avLst/>
+          </a:prstGeom>
+          <a:noFill/>
+          <a:ln/>
+        </p:spPr>
+        <p:txBody>
+          <a:bodyPr wrap="square" lIns="0" tIns="0" rIns="0" bIns="0" rtlCol="0" anchor="ctr"/>
+          <a:lstStyle/>
+          <a:p>
+            <a:pPr indent="0" marL="0">
+              <a:buNone/>
+            </a:pPr>
+            <a:r>
+              <a:rPr lang="en-US" sz="1000" dirty="0">
+                <a:solidFill>
+                  <a:srgbClr val="6E7D72"/>
+                </a:solidFill>
+                <a:latin typeface="Calibri" pitchFamily="34" charset="0"/>
+                <a:ea typeface="Calibri" pitchFamily="34" charset="-122"/>
+                <a:cs typeface="Calibri" pitchFamily="34" charset="-120"/>
+              </a:rPr>
+              <a:t>Exemplo + contraponto</a:t>
+            </a:r>
+            <a:endParaRPr lang="en-US" sz="1000" dirty="0"/>
           </a:p>
         </p:txBody>
       </p:sp>
@@ -8988,7 +8989,7 @@
               <a:buNone/>
             </a:pPr>
             <a:r>
-              <a:rPr lang="en-US" sz="2200" b="1" dirty="0">
+              <a:rPr lang="en-US" sz="2600" b="1" dirty="0">
                 <a:solidFill>
                   <a:srgbClr val="2C5F2D"/>
                 </a:solidFill>
@@ -8996,30 +8997,327 @@
                 <a:ea typeface="Cambria" pitchFamily="34" charset="-122"/>
                 <a:cs typeface="Cambria" pitchFamily="34" charset="-120"/>
               </a:rPr>
-              <a:t>No Prato Cheio — e o contraponto</a:t>
-            </a:r>
-            <a:endParaRPr lang="en-US" sz="2200" dirty="0"/>
-          </a:p>
-        </p:txBody>
-      </p:sp>
-      <p:sp>
-        <p:nvSpPr>
-          <p:cNvPr id="5" name="Shape 3"/>
-          <p:cNvSpPr/>
-          <p:nvPr/>
-        </p:nvSpPr>
-        <p:spPr>
-          <a:xfrm>
-            <a:off x="457200" y="1097280"/>
-            <a:ext cx="3977640" cy="2926080"/>
+              <a:t>Produto vivo: o software roda desde já</a:t>
+            </a:r>
+            <a:endParaRPr lang="en-US" sz="2600" dirty="0"/>
+          </a:p>
+        </p:txBody>
+      </p:sp>
+      <p:sp>
+        <p:nvSpPr>
+          <p:cNvPr id="5" name="Text 3"/>
+          <p:cNvSpPr/>
+          <p:nvPr/>
+        </p:nvSpPr>
+        <p:spPr>
+          <a:xfrm>
+            <a:off x="457200" y="1051560"/>
+            <a:ext cx="8229600" cy="1051560"/>
+          </a:xfrm>
+          <a:prstGeom prst="rect">
+            <a:avLst/>
+          </a:prstGeom>
+          <a:noFill/>
+          <a:ln/>
+        </p:spPr>
+        <p:txBody>
+          <a:bodyPr wrap="square" lIns="0" tIns="0" rIns="0" bIns="0" rtlCol="0" anchor="ctr"/>
+          <a:lstStyle/>
+          <a:p>
+            <a:pPr indent="0" marL="0">
+              <a:buNone/>
+            </a:pPr>
+            <a:r>
+              <a:rPr lang="en-US" sz="1800" dirty="0">
+                <a:solidFill>
+                  <a:srgbClr val="36454F"/>
+                </a:solidFill>
+                <a:latin typeface="Calibri" pitchFamily="34" charset="0"/>
+                <a:ea typeface="Calibri" pitchFamily="34" charset="-122"/>
+                <a:cs typeface="Calibri" pitchFamily="34" charset="-120"/>
+              </a:rPr>
+              <a:t>Na aula 4 uma fatia fina atravessa todas as camadas e executa. É o walking skeleton.</a:t>
+            </a:r>
+            <a:endParaRPr lang="en-US" sz="1800" dirty="0"/>
+          </a:p>
+        </p:txBody>
+      </p:sp>
+      <p:sp>
+        <p:nvSpPr>
+          <p:cNvPr id="6" name="Shape 4"/>
+          <p:cNvSpPr/>
+          <p:nvPr/>
+        </p:nvSpPr>
+        <p:spPr>
+          <a:xfrm>
+            <a:off x="457200" y="2286000"/>
+            <a:ext cx="1714500" cy="713232"/>
           </a:xfrm>
           <a:prstGeom prst="roundRect">
             <a:avLst>
-              <a:gd name="adj" fmla="val 4375"/>
+              <a:gd name="adj" fmla="val 15385"/>
             </a:avLst>
           </a:prstGeom>
           <a:solidFill>
             <a:srgbClr val="F1F5EF"/>
+          </a:solidFill>
+          <a:ln w="19050">
+            <a:solidFill>
+              <a:srgbClr val="2C5F2D"/>
+            </a:solidFill>
+            <a:prstDash val="solid"/>
+          </a:ln>
+        </p:spPr>
+      </p:sp>
+      <p:sp>
+        <p:nvSpPr>
+          <p:cNvPr id="7" name="Text 5"/>
+          <p:cNvSpPr/>
+          <p:nvPr/>
+        </p:nvSpPr>
+        <p:spPr>
+          <a:xfrm>
+            <a:off x="457200" y="2286000"/>
+            <a:ext cx="1714500" cy="713232"/>
+          </a:xfrm>
+          <a:prstGeom prst="rect">
+            <a:avLst/>
+          </a:prstGeom>
+          <a:noFill/>
+          <a:ln/>
+        </p:spPr>
+        <p:txBody>
+          <a:bodyPr wrap="square" lIns="0" tIns="0" rIns="0" bIns="0" rtlCol="0" anchor="ctr"/>
+          <a:lstStyle/>
+          <a:p>
+            <a:pPr algn="ctr" indent="0" marL="0">
+              <a:buNone/>
+            </a:pPr>
+            <a:r>
+              <a:rPr lang="en-US" sz="1300" b="1" dirty="0">
+                <a:solidFill>
+                  <a:srgbClr val="2C5F2D"/>
+                </a:solidFill>
+                <a:latin typeface="Calibri" pitchFamily="34" charset="0"/>
+                <a:ea typeface="Calibri" pitchFamily="34" charset="-122"/>
+                <a:cs typeface="Calibri" pitchFamily="34" charset="-120"/>
+              </a:rPr>
+              <a:t>Interface</a:t>
+            </a:r>
+            <a:endParaRPr lang="en-US" sz="1300" dirty="0"/>
+          </a:p>
+        </p:txBody>
+      </p:sp>
+      <p:sp>
+        <p:nvSpPr>
+          <p:cNvPr id="8" name="Shape 6"/>
+          <p:cNvSpPr/>
+          <p:nvPr/>
+        </p:nvSpPr>
+        <p:spPr>
+          <a:xfrm>
+            <a:off x="2226564" y="2478024"/>
+            <a:ext cx="347472" cy="329184"/>
+          </a:xfrm>
+          <a:prstGeom prst="chevron">
+            <a:avLst/>
+          </a:prstGeom>
+          <a:solidFill>
+            <a:srgbClr val="97BC62"/>
+          </a:solidFill>
+          <a:ln/>
+        </p:spPr>
+      </p:sp>
+      <p:sp>
+        <p:nvSpPr>
+          <p:cNvPr id="9" name="Shape 7"/>
+          <p:cNvSpPr/>
+          <p:nvPr/>
+        </p:nvSpPr>
+        <p:spPr>
+          <a:xfrm>
+            <a:off x="2628900" y="2286000"/>
+            <a:ext cx="1714500" cy="713232"/>
+          </a:xfrm>
+          <a:prstGeom prst="roundRect">
+            <a:avLst>
+              <a:gd name="adj" fmla="val 15385"/>
+            </a:avLst>
+          </a:prstGeom>
+          <a:solidFill>
+            <a:srgbClr val="F1F5EF"/>
+          </a:solidFill>
+          <a:ln w="19050">
+            <a:solidFill>
+              <a:srgbClr val="2C5F2D"/>
+            </a:solidFill>
+            <a:prstDash val="solid"/>
+          </a:ln>
+        </p:spPr>
+      </p:sp>
+      <p:sp>
+        <p:nvSpPr>
+          <p:cNvPr id="10" name="Text 8"/>
+          <p:cNvSpPr/>
+          <p:nvPr/>
+        </p:nvSpPr>
+        <p:spPr>
+          <a:xfrm>
+            <a:off x="2628900" y="2286000"/>
+            <a:ext cx="1714500" cy="713232"/>
+          </a:xfrm>
+          <a:prstGeom prst="rect">
+            <a:avLst/>
+          </a:prstGeom>
+          <a:noFill/>
+          <a:ln/>
+        </p:spPr>
+        <p:txBody>
+          <a:bodyPr wrap="square" lIns="0" tIns="0" rIns="0" bIns="0" rtlCol="0" anchor="ctr"/>
+          <a:lstStyle/>
+          <a:p>
+            <a:pPr algn="ctr" indent="0" marL="0">
+              <a:buNone/>
+            </a:pPr>
+            <a:r>
+              <a:rPr lang="en-US" sz="1300" b="1" dirty="0">
+                <a:solidFill>
+                  <a:srgbClr val="2C5F2D"/>
+                </a:solidFill>
+                <a:latin typeface="Calibri" pitchFamily="34" charset="0"/>
+                <a:ea typeface="Calibri" pitchFamily="34" charset="-122"/>
+                <a:cs typeface="Calibri" pitchFamily="34" charset="-120"/>
+              </a:rPr>
+              <a:t>Regra de negócio</a:t>
+            </a:r>
+            <a:endParaRPr lang="en-US" sz="1300" dirty="0"/>
+          </a:p>
+        </p:txBody>
+      </p:sp>
+      <p:sp>
+        <p:nvSpPr>
+          <p:cNvPr id="11" name="Shape 9"/>
+          <p:cNvSpPr/>
+          <p:nvPr/>
+        </p:nvSpPr>
+        <p:spPr>
+          <a:xfrm>
+            <a:off x="4398264" y="2478024"/>
+            <a:ext cx="347472" cy="329184"/>
+          </a:xfrm>
+          <a:prstGeom prst="chevron">
+            <a:avLst/>
+          </a:prstGeom>
+          <a:solidFill>
+            <a:srgbClr val="97BC62"/>
+          </a:solidFill>
+          <a:ln/>
+        </p:spPr>
+      </p:sp>
+      <p:sp>
+        <p:nvSpPr>
+          <p:cNvPr id="12" name="Shape 10"/>
+          <p:cNvSpPr/>
+          <p:nvPr/>
+        </p:nvSpPr>
+        <p:spPr>
+          <a:xfrm>
+            <a:off x="4800600" y="2286000"/>
+            <a:ext cx="1714500" cy="713232"/>
+          </a:xfrm>
+          <a:prstGeom prst="roundRect">
+            <a:avLst>
+              <a:gd name="adj" fmla="val 15385"/>
+            </a:avLst>
+          </a:prstGeom>
+          <a:solidFill>
+            <a:srgbClr val="F1F5EF"/>
+          </a:solidFill>
+          <a:ln w="19050">
+            <a:solidFill>
+              <a:srgbClr val="2C5F2D"/>
+            </a:solidFill>
+            <a:prstDash val="solid"/>
+          </a:ln>
+        </p:spPr>
+      </p:sp>
+      <p:sp>
+        <p:nvSpPr>
+          <p:cNvPr id="13" name="Text 11"/>
+          <p:cNvSpPr/>
+          <p:nvPr/>
+        </p:nvSpPr>
+        <p:spPr>
+          <a:xfrm>
+            <a:off x="4800600" y="2286000"/>
+            <a:ext cx="1714500" cy="713232"/>
+          </a:xfrm>
+          <a:prstGeom prst="rect">
+            <a:avLst/>
+          </a:prstGeom>
+          <a:noFill/>
+          <a:ln/>
+        </p:spPr>
+        <p:txBody>
+          <a:bodyPr wrap="square" lIns="0" tIns="0" rIns="0" bIns="0" rtlCol="0" anchor="ctr"/>
+          <a:lstStyle/>
+          <a:p>
+            <a:pPr algn="ctr" indent="0" marL="0">
+              <a:buNone/>
+            </a:pPr>
+            <a:r>
+              <a:rPr lang="en-US" sz="1300" b="1" dirty="0">
+                <a:solidFill>
+                  <a:srgbClr val="2C5F2D"/>
+                </a:solidFill>
+                <a:latin typeface="Calibri" pitchFamily="34" charset="0"/>
+                <a:ea typeface="Calibri" pitchFamily="34" charset="-122"/>
+                <a:cs typeface="Calibri" pitchFamily="34" charset="-120"/>
+              </a:rPr>
+              <a:t>Dados</a:t>
+            </a:r>
+            <a:endParaRPr lang="en-US" sz="1300" dirty="0"/>
+          </a:p>
+        </p:txBody>
+      </p:sp>
+      <p:sp>
+        <p:nvSpPr>
+          <p:cNvPr id="14" name="Shape 12"/>
+          <p:cNvSpPr/>
+          <p:nvPr/>
+        </p:nvSpPr>
+        <p:spPr>
+          <a:xfrm>
+            <a:off x="6569964" y="2478024"/>
+            <a:ext cx="347472" cy="329184"/>
+          </a:xfrm>
+          <a:prstGeom prst="chevron">
+            <a:avLst/>
+          </a:prstGeom>
+          <a:solidFill>
+            <a:srgbClr val="97BC62"/>
+          </a:solidFill>
+          <a:ln/>
+        </p:spPr>
+      </p:sp>
+      <p:sp>
+        <p:nvSpPr>
+          <p:cNvPr id="15" name="Shape 13"/>
+          <p:cNvSpPr/>
+          <p:nvPr/>
+        </p:nvSpPr>
+        <p:spPr>
+          <a:xfrm>
+            <a:off x="6972300" y="2286000"/>
+            <a:ext cx="1714500" cy="713232"/>
+          </a:xfrm>
+          <a:prstGeom prst="roundRect">
+            <a:avLst>
+              <a:gd name="adj" fmla="val 15385"/>
+            </a:avLst>
+          </a:prstGeom>
+          <a:solidFill>
+            <a:srgbClr val="97BC62"/>
           </a:solidFill>
           <a:ln w="19050">
             <a:solidFill>
@@ -9031,14 +9329,14 @@
       </p:sp>
       <p:sp>
         <p:nvSpPr>
-          <p:cNvPr id="6" name="Text 4"/>
-          <p:cNvSpPr/>
-          <p:nvPr/>
-        </p:nvSpPr>
-        <p:spPr>
-          <a:xfrm>
-            <a:off x="658368" y="1243584"/>
-            <a:ext cx="3575304" cy="365760"/>
+          <p:cNvPr id="16" name="Text 14"/>
+          <p:cNvSpPr/>
+          <p:nvPr/>
+        </p:nvSpPr>
+        <p:spPr>
+          <a:xfrm>
+            <a:off x="6972300" y="2286000"/>
+            <a:ext cx="1714500" cy="713232"/>
           </a:xfrm>
           <a:prstGeom prst="rect">
             <a:avLst/>
@@ -9050,296 +9348,21 @@
           <a:bodyPr wrap="square" lIns="0" tIns="0" rIns="0" bIns="0" rtlCol="0" anchor="ctr"/>
           <a:lstStyle/>
           <a:p>
-            <a:pPr indent="0" marL="0">
+            <a:pPr algn="ctr" indent="0" marL="0">
               <a:buNone/>
             </a:pPr>
             <a:r>
-              <a:rPr lang="en-US" sz="1400" b="1" dirty="0">
-                <a:solidFill>
-                  <a:srgbClr val="2C5F2D"/>
-                </a:solidFill>
-                <a:latin typeface="Calibri" pitchFamily="34" charset="0"/>
-                <a:ea typeface="Calibri" pitchFamily="34" charset="-122"/>
-                <a:cs typeface="Calibri" pitchFamily="34" charset="-120"/>
-              </a:rPr>
-              <a:t>Por que assim</a:t>
-            </a:r>
-            <a:endParaRPr lang="en-US" sz="1400" dirty="0"/>
-          </a:p>
-        </p:txBody>
-      </p:sp>
-      <p:sp>
-        <p:nvSpPr>
-          <p:cNvPr id="7" name="Text 5"/>
-          <p:cNvSpPr/>
-          <p:nvPr/>
-        </p:nvSpPr>
-        <p:spPr>
-          <a:xfrm>
-            <a:off x="658368" y="1645920"/>
-            <a:ext cx="3575304" cy="2194560"/>
-          </a:xfrm>
-          <a:prstGeom prst="rect">
-            <a:avLst/>
-          </a:prstGeom>
-          <a:noFill/>
-          <a:ln/>
-        </p:spPr>
-        <p:txBody>
-          <a:bodyPr wrap="square" lIns="0" tIns="0" rIns="0" bIns="0" rtlCol="0" anchor="t"/>
-          <a:lstStyle/>
-          <a:p>
-            <a:pPr marL="342900" indent="-342900">
-              <a:spcAft>
-                <a:spcPts val="800"/>
-              </a:spcAft>
-              <a:buSzPct val="100000"/>
-              <a:buChar char="•"/>
-            </a:pPr>
-            <a:r>
-              <a:rPr lang="en-US" sz="1350" dirty="0">
-                <a:solidFill>
-                  <a:srgbClr val="36454F"/>
-                </a:solidFill>
-                <a:latin typeface="Calibri" pitchFamily="34" charset="0"/>
-                <a:ea typeface="Calibri" pitchFamily="34" charset="-122"/>
-                <a:cs typeface="Calibri" pitchFamily="34" charset="-120"/>
-              </a:rPr>
-              <a:t>Análise feita sobre algo que executa</a:t>
-            </a:r>
-            <a:endParaRPr lang="en-US" sz="1350" dirty="0"/>
-          </a:p>
-          <a:p>
-            <a:pPr marL="342900" indent="-342900">
-              <a:spcAft>
-                <a:spcPts val="800"/>
-              </a:spcAft>
-              <a:buSzPct val="100000"/>
-              <a:buChar char="•"/>
-            </a:pPr>
-            <a:r>
-              <a:rPr lang="en-US" sz="1350" dirty="0">
-                <a:solidFill>
-                  <a:srgbClr val="36454F"/>
-                </a:solidFill>
-                <a:latin typeface="Calibri" pitchFamily="34" charset="0"/>
-                <a:ea typeface="Calibri" pitchFamily="34" charset="-122"/>
-                <a:cs typeface="Calibri" pitchFamily="34" charset="-120"/>
-              </a:rPr>
-              <a:t>Risco aparece na semana 4, não na 15</a:t>
-            </a:r>
-            <a:endParaRPr lang="en-US" sz="1350" dirty="0"/>
-          </a:p>
-          <a:p>
-            <a:pPr marL="342900" indent="-342900">
-              <a:spcAft>
-                <a:spcPts val="800"/>
-              </a:spcAft>
-              <a:buSzPct val="100000"/>
-              <a:buChar char="•"/>
-            </a:pPr>
-            <a:r>
-              <a:rPr lang="en-US" sz="1350" dirty="0">
-                <a:solidFill>
-                  <a:srgbClr val="36454F"/>
-                </a:solidFill>
-                <a:latin typeface="Calibri" pitchFamily="34" charset="0"/>
-                <a:ea typeface="Calibri" pitchFamily="34" charset="-122"/>
-                <a:cs typeface="Calibri" pitchFamily="34" charset="-120"/>
-              </a:rPr>
-              <a:t>Cada unidade evolui o mesmo produto</a:t>
-            </a:r>
-            <a:endParaRPr lang="en-US" sz="1350" dirty="0"/>
-          </a:p>
-        </p:txBody>
-      </p:sp>
-      <p:sp>
-        <p:nvSpPr>
-          <p:cNvPr id="8" name="Shape 6"/>
-          <p:cNvSpPr/>
-          <p:nvPr/>
-        </p:nvSpPr>
-        <p:spPr>
-          <a:xfrm>
-            <a:off x="4709160" y="1097280"/>
-            <a:ext cx="3977640" cy="2926080"/>
-          </a:xfrm>
-          <a:prstGeom prst="roundRect">
-            <a:avLst>
-              <a:gd name="adj" fmla="val 4375"/>
-            </a:avLst>
-          </a:prstGeom>
-          <a:solidFill>
-            <a:srgbClr val="FBF1EF"/>
-          </a:solidFill>
-          <a:ln w="19050">
-            <a:solidFill>
-              <a:srgbClr val="B85042"/>
-            </a:solidFill>
-            <a:prstDash val="solid"/>
-          </a:ln>
-        </p:spPr>
-      </p:sp>
-      <p:sp>
-        <p:nvSpPr>
-          <p:cNvPr id="9" name="Text 7"/>
-          <p:cNvSpPr/>
-          <p:nvPr/>
-        </p:nvSpPr>
-        <p:spPr>
-          <a:xfrm>
-            <a:off x="4910328" y="1243584"/>
-            <a:ext cx="3575304" cy="365760"/>
-          </a:xfrm>
-          <a:prstGeom prst="rect">
-            <a:avLst/>
-          </a:prstGeom>
-          <a:noFill/>
-          <a:ln/>
-        </p:spPr>
-        <p:txBody>
-          <a:bodyPr wrap="square" lIns="0" tIns="0" rIns="0" bIns="0" rtlCol="0" anchor="ctr"/>
-          <a:lstStyle/>
-          <a:p>
-            <a:pPr indent="0" marL="0">
-              <a:buNone/>
-            </a:pPr>
-            <a:r>
-              <a:rPr lang="en-US" sz="1400" b="1" dirty="0">
-                <a:solidFill>
-                  <a:srgbClr val="B85042"/>
-                </a:solidFill>
-                <a:latin typeface="Calibri" pitchFamily="34" charset="0"/>
-                <a:ea typeface="Calibri" pitchFamily="34" charset="-122"/>
-                <a:cs typeface="Calibri" pitchFamily="34" charset="-120"/>
-              </a:rPr>
-              <a:t>O projeto que falha</a:t>
-            </a:r>
-            <a:endParaRPr lang="en-US" sz="1400" dirty="0"/>
-          </a:p>
-        </p:txBody>
-      </p:sp>
-      <p:sp>
-        <p:nvSpPr>
-          <p:cNvPr id="10" name="Text 8"/>
-          <p:cNvSpPr/>
-          <p:nvPr/>
-        </p:nvSpPr>
-        <p:spPr>
-          <a:xfrm>
-            <a:off x="4910328" y="1645920"/>
-            <a:ext cx="3575304" cy="2194560"/>
-          </a:xfrm>
-          <a:prstGeom prst="rect">
-            <a:avLst/>
-          </a:prstGeom>
-          <a:noFill/>
-          <a:ln/>
-        </p:spPr>
-        <p:txBody>
-          <a:bodyPr wrap="square" lIns="0" tIns="0" rIns="0" bIns="0" rtlCol="0" anchor="t"/>
-          <a:lstStyle/>
-          <a:p>
-            <a:pPr marL="342900" indent="-342900">
-              <a:spcAft>
-                <a:spcPts val="800"/>
-              </a:spcAft>
-              <a:buSzPct val="100000"/>
-              <a:buChar char="•"/>
-            </a:pPr>
-            <a:r>
-              <a:rPr lang="en-US" sz="1350" dirty="0">
-                <a:solidFill>
-                  <a:srgbClr val="7A3A31"/>
-                </a:solidFill>
-                <a:latin typeface="Calibri" pitchFamily="34" charset="0"/>
-                <a:ea typeface="Calibri" pitchFamily="34" charset="-122"/>
-                <a:cs typeface="Calibri" pitchFamily="34" charset="-120"/>
-              </a:rPr>
-              <a:t>Só integra na última semana</a:t>
-            </a:r>
-            <a:endParaRPr lang="en-US" sz="1350" dirty="0"/>
-          </a:p>
-          <a:p>
-            <a:pPr marL="342900" indent="-342900">
-              <a:spcAft>
-                <a:spcPts val="800"/>
-              </a:spcAft>
-              <a:buSzPct val="100000"/>
-              <a:buChar char="•"/>
-            </a:pPr>
-            <a:r>
-              <a:rPr lang="en-US" sz="1350" dirty="0">
-                <a:solidFill>
-                  <a:srgbClr val="7A3A31"/>
-                </a:solidFill>
-                <a:latin typeface="Calibri" pitchFamily="34" charset="0"/>
-                <a:ea typeface="Calibri" pitchFamily="34" charset="-122"/>
-                <a:cs typeface="Calibri" pitchFamily="34" charset="-120"/>
-              </a:rPr>
-              <a:t>"Na minha máquina funciona"</a:t>
-            </a:r>
-            <a:endParaRPr lang="en-US" sz="1350" dirty="0"/>
-          </a:p>
-          <a:p>
-            <a:pPr marL="342900" indent="-342900">
-              <a:spcAft>
-                <a:spcPts val="800"/>
-              </a:spcAft>
-              <a:buSzPct val="100000"/>
-              <a:buChar char="•"/>
-            </a:pPr>
-            <a:r>
-              <a:rPr lang="en-US" sz="1350" dirty="0">
-                <a:solidFill>
-                  <a:srgbClr val="7A3A31"/>
-                </a:solidFill>
-                <a:latin typeface="Calibri" pitchFamily="34" charset="0"/>
-                <a:ea typeface="Calibri" pitchFamily="34" charset="-122"/>
-                <a:cs typeface="Calibri" pitchFamily="34" charset="-120"/>
-              </a:rPr>
-              <a:t>Ninguém sabe se roda de verdade</a:t>
-            </a:r>
-            <a:endParaRPr lang="en-US" sz="1350" dirty="0"/>
-          </a:p>
-        </p:txBody>
-      </p:sp>
-      <p:sp>
-        <p:nvSpPr>
-          <p:cNvPr id="11" name="Text 9"/>
-          <p:cNvSpPr/>
-          <p:nvPr/>
-        </p:nvSpPr>
-        <p:spPr>
-          <a:xfrm>
-            <a:off x="457200" y="4759452"/>
-            <a:ext cx="8229600" cy="256032"/>
-          </a:xfrm>
-          <a:prstGeom prst="rect">
-            <a:avLst/>
-          </a:prstGeom>
-          <a:noFill/>
-          <a:ln/>
-        </p:spPr>
-        <p:txBody>
-          <a:bodyPr wrap="square" lIns="0" tIns="0" rIns="0" bIns="0" rtlCol="0" anchor="ctr"/>
-          <a:lstStyle/>
-          <a:p>
-            <a:pPr indent="0" marL="0">
-              <a:buNone/>
-            </a:pPr>
-            <a:r>
-              <a:rPr lang="en-US" sz="1000" dirty="0">
-                <a:solidFill>
-                  <a:srgbClr val="6E7D72"/>
-                </a:solidFill>
-                <a:latin typeface="Calibri" pitchFamily="34" charset="0"/>
-                <a:ea typeface="Calibri" pitchFamily="34" charset="-122"/>
-                <a:cs typeface="Calibri" pitchFamily="34" charset="-120"/>
-              </a:rPr>
-              <a:t>Exemplo + contraponto</a:t>
-            </a:r>
-            <a:endParaRPr lang="en-US" sz="1000" dirty="0"/>
+              <a:rPr lang="en-US" sz="1300" b="1" dirty="0">
+                <a:solidFill>
+                  <a:srgbClr val="1F3D1F"/>
+                </a:solidFill>
+                <a:latin typeface="Calibri" pitchFamily="34" charset="0"/>
+                <a:ea typeface="Calibri" pitchFamily="34" charset="-122"/>
+                <a:cs typeface="Calibri" pitchFamily="34" charset="-120"/>
+              </a:rPr>
+              <a:t>CI verde</a:t>
+            </a:r>
+            <a:endParaRPr lang="en-US" sz="1300" dirty="0"/>
           </a:p>
         </p:txBody>
       </p:sp>
@@ -9370,14 +9393,73 @@
       </p:grpSpPr>
       <p:sp>
         <p:nvSpPr>
-          <p:cNvPr id="2" name="Text 0"/>
+          <p:cNvPr id="2" name="Shape 0"/>
           <p:cNvSpPr/>
           <p:nvPr/>
         </p:nvSpPr>
         <p:spPr>
           <a:xfrm>
             <a:off x="457200" y="310896"/>
-            <a:ext cx="8229600" cy="548640"/>
+            <a:ext cx="384048" cy="384048"/>
+          </a:xfrm>
+          <a:prstGeom prst="ellipse">
+            <a:avLst/>
+          </a:prstGeom>
+          <a:solidFill>
+            <a:srgbClr val="2C5F2D"/>
+          </a:solidFill>
+          <a:ln/>
+        </p:spPr>
+      </p:sp>
+      <p:sp>
+        <p:nvSpPr>
+          <p:cNvPr id="3" name="Text 1"/>
+          <p:cNvSpPr/>
+          <p:nvPr/>
+        </p:nvSpPr>
+        <p:spPr>
+          <a:xfrm>
+            <a:off x="457200" y="310896"/>
+            <a:ext cx="384048" cy="384048"/>
+          </a:xfrm>
+          <a:prstGeom prst="rect">
+            <a:avLst/>
+          </a:prstGeom>
+          <a:noFill/>
+          <a:ln/>
+        </p:spPr>
+        <p:txBody>
+          <a:bodyPr wrap="square" lIns="0" tIns="0" rIns="0" bIns="0" rtlCol="0" anchor="ctr"/>
+          <a:lstStyle/>
+          <a:p>
+            <a:pPr algn="ctr" indent="0" marL="0">
+              <a:buNone/>
+            </a:pPr>
+            <a:r>
+              <a:rPr lang="en-US" sz="1500" b="1" dirty="0">
+                <a:solidFill>
+                  <a:srgbClr val="FFFFFF"/>
+                </a:solidFill>
+                <a:latin typeface="Calibri" pitchFamily="34" charset="0"/>
+                <a:ea typeface="Calibri" pitchFamily="34" charset="-122"/>
+                <a:cs typeface="Calibri" pitchFamily="34" charset="-120"/>
+              </a:rPr>
+              <a:t>4</a:t>
+            </a:r>
+            <a:endParaRPr lang="en-US" sz="1500" dirty="0"/>
+          </a:p>
+        </p:txBody>
+      </p:sp>
+      <p:sp>
+        <p:nvSpPr>
+          <p:cNvPr id="4" name="Text 2"/>
+          <p:cNvSpPr/>
+          <p:nvPr/>
+        </p:nvSpPr>
+        <p:spPr>
+          <a:xfrm>
+            <a:off x="987552" y="310896"/>
+            <a:ext cx="7699248" cy="457200"/>
           </a:xfrm>
           <a:prstGeom prst="rect">
             <a:avLst/>
@@ -9393,7 +9475,7 @@
               <a:buNone/>
             </a:pPr>
             <a:r>
-              <a:rPr lang="en-US" sz="3000" b="1" dirty="0">
+              <a:rPr lang="en-US" sz="2200" b="1" dirty="0">
                 <a:solidFill>
                   <a:srgbClr val="2C5F2D"/>
                 </a:solidFill>
@@ -9401,65 +9483,26 @@
                 <a:ea typeface="Cambria" pitchFamily="34" charset="-122"/>
                 <a:cs typeface="Cambria" pitchFamily="34" charset="-120"/>
               </a:rPr>
-              <a:t>Produção contínua</a:t>
-            </a:r>
-            <a:endParaRPr lang="en-US" sz="3000" dirty="0"/>
-          </a:p>
-        </p:txBody>
-      </p:sp>
-      <p:sp>
-        <p:nvSpPr>
-          <p:cNvPr id="3" name="Text 1"/>
-          <p:cNvSpPr/>
-          <p:nvPr/>
-        </p:nvSpPr>
-        <p:spPr>
-          <a:xfrm>
-            <a:off x="457200" y="868680"/>
-            <a:ext cx="8229600" cy="274320"/>
-          </a:xfrm>
-          <a:prstGeom prst="rect">
-            <a:avLst/>
-          </a:prstGeom>
-          <a:noFill/>
-          <a:ln/>
-        </p:spPr>
-        <p:txBody>
-          <a:bodyPr wrap="square" lIns="0" tIns="0" rIns="0" bIns="0" rtlCol="0" anchor="ctr"/>
-          <a:lstStyle/>
-          <a:p>
-            <a:pPr indent="0" marL="0">
-              <a:buNone/>
-            </a:pPr>
-            <a:r>
-              <a:rPr lang="en-US" sz="1300" i="1" dirty="0">
-                <a:solidFill>
-                  <a:srgbClr val="6E7D72"/>
-                </a:solidFill>
-                <a:latin typeface="Calibri" pitchFamily="34" charset="0"/>
-                <a:ea typeface="Calibri" pitchFamily="34" charset="-122"/>
-                <a:cs typeface="Calibri" pitchFamily="34" charset="-120"/>
-              </a:rPr>
-              <a:t>O que todos os grupos evoluem no produto hoje</a:t>
-            </a:r>
-            <a:endParaRPr lang="en-US" sz="1300" dirty="0"/>
-          </a:p>
-        </p:txBody>
-      </p:sp>
-      <p:sp>
-        <p:nvSpPr>
-          <p:cNvPr id="4" name="Shape 2"/>
-          <p:cNvSpPr/>
-          <p:nvPr/>
-        </p:nvSpPr>
-        <p:spPr>
-          <a:xfrm>
-            <a:off x="457200" y="1298448"/>
-            <a:ext cx="8229600" cy="2377440"/>
+              <a:t>No Prato Cheio — e o contraponto</a:t>
+            </a:r>
+            <a:endParaRPr lang="en-US" sz="2200" dirty="0"/>
+          </a:p>
+        </p:txBody>
+      </p:sp>
+      <p:sp>
+        <p:nvSpPr>
+          <p:cNvPr id="5" name="Shape 3"/>
+          <p:cNvSpPr/>
+          <p:nvPr/>
+        </p:nvSpPr>
+        <p:spPr>
+          <a:xfrm>
+            <a:off x="457200" y="1097280"/>
+            <a:ext cx="3977640" cy="2926080"/>
           </a:xfrm>
           <a:prstGeom prst="roundRect">
             <a:avLst>
-              <a:gd name="adj" fmla="val 5385"/>
+              <a:gd name="adj" fmla="val 4375"/>
             </a:avLst>
           </a:prstGeom>
           <a:solidFill>
@@ -9475,14 +9518,53 @@
       </p:sp>
       <p:sp>
         <p:nvSpPr>
-          <p:cNvPr id="5" name="Text 3"/>
-          <p:cNvSpPr/>
-          <p:nvPr/>
-        </p:nvSpPr>
-        <p:spPr>
-          <a:xfrm>
-            <a:off x="777240" y="1481328"/>
-            <a:ext cx="7589520" cy="2011680"/>
+          <p:cNvPr id="6" name="Text 4"/>
+          <p:cNvSpPr/>
+          <p:nvPr/>
+        </p:nvSpPr>
+        <p:spPr>
+          <a:xfrm>
+            <a:off x="658368" y="1243584"/>
+            <a:ext cx="3575304" cy="365760"/>
+          </a:xfrm>
+          <a:prstGeom prst="rect">
+            <a:avLst/>
+          </a:prstGeom>
+          <a:noFill/>
+          <a:ln/>
+        </p:spPr>
+        <p:txBody>
+          <a:bodyPr wrap="square" lIns="0" tIns="0" rIns="0" bIns="0" rtlCol="0" anchor="ctr"/>
+          <a:lstStyle/>
+          <a:p>
+            <a:pPr indent="0" marL="0">
+              <a:buNone/>
+            </a:pPr>
+            <a:r>
+              <a:rPr lang="en-US" sz="1400" b="1" dirty="0">
+                <a:solidFill>
+                  <a:srgbClr val="2C5F2D"/>
+                </a:solidFill>
+                <a:latin typeface="Calibri" pitchFamily="34" charset="0"/>
+                <a:ea typeface="Calibri" pitchFamily="34" charset="-122"/>
+                <a:cs typeface="Calibri" pitchFamily="34" charset="-120"/>
+              </a:rPr>
+              <a:t>Por que assim</a:t>
+            </a:r>
+            <a:endParaRPr lang="en-US" sz="1400" dirty="0"/>
+          </a:p>
+        </p:txBody>
+      </p:sp>
+      <p:sp>
+        <p:nvSpPr>
+          <p:cNvPr id="7" name="Text 5"/>
+          <p:cNvSpPr/>
+          <p:nvPr/>
+        </p:nvSpPr>
+        <p:spPr>
+          <a:xfrm>
+            <a:off x="658368" y="1645920"/>
+            <a:ext cx="3575304" cy="2194560"/>
           </a:xfrm>
           <a:prstGeom prst="rect">
             <a:avLst/>
@@ -9496,13 +9578,13 @@
           <a:p>
             <a:pPr marL="342900" indent="-342900">
               <a:spcAft>
-                <a:spcPts val="1000"/>
+                <a:spcPts val="800"/>
               </a:spcAft>
               <a:buSzPct val="100000"/>
               <a:buChar char="•"/>
             </a:pPr>
             <a:r>
-              <a:rPr lang="en-US" sz="1500" dirty="0">
+              <a:rPr lang="en-US" sz="1350" dirty="0">
                 <a:solidFill>
                   <a:srgbClr val="36454F"/>
                 </a:solidFill>
@@ -9510,20 +9592,20 @@
                 <a:ea typeface="Calibri" pitchFamily="34" charset="-122"/>
                 <a:cs typeface="Calibri" pitchFamily="34" charset="-120"/>
               </a:rPr>
-              <a:t>Formar o grupo (3 a 5 pessoas) e receber o caso Prato Cheio.</a:t>
-            </a:r>
-            <a:endParaRPr lang="en-US" sz="1500" dirty="0"/>
+              <a:t>Análise feita sobre algo que executa</a:t>
+            </a:r>
+            <a:endParaRPr lang="en-US" sz="1350" dirty="0"/>
           </a:p>
           <a:p>
             <a:pPr marL="342900" indent="-342900">
               <a:spcAft>
-                <a:spcPts val="1000"/>
+                <a:spcPts val="800"/>
               </a:spcAft>
               <a:buSzPct val="100000"/>
               <a:buChar char="•"/>
             </a:pPr>
             <a:r>
-              <a:rPr lang="en-US" sz="1500" dirty="0">
+              <a:rPr lang="en-US" sz="1350" dirty="0">
                 <a:solidFill>
                   <a:srgbClr val="36454F"/>
                 </a:solidFill>
@@ -9531,20 +9613,20 @@
                 <a:ea typeface="Calibri" pitchFamily="34" charset="-122"/>
                 <a:cs typeface="Calibri" pitchFamily="34" charset="-120"/>
               </a:rPr>
-              <a:t>Clonar o template-repo e subir o repositório do grupo.</a:t>
-            </a:r>
-            <a:endParaRPr lang="en-US" sz="1500" dirty="0"/>
+              <a:t>Risco aparece na semana 4, não na 15</a:t>
+            </a:r>
+            <a:endParaRPr lang="en-US" sz="1350" dirty="0"/>
           </a:p>
           <a:p>
             <a:pPr marL="342900" indent="-342900">
               <a:spcAft>
-                <a:spcPts val="1000"/>
+                <a:spcPts val="800"/>
               </a:spcAft>
               <a:buSzPct val="100000"/>
               <a:buChar char="•"/>
             </a:pPr>
             <a:r>
-              <a:rPr lang="en-US" sz="1500" dirty="0">
+              <a:rPr lang="en-US" sz="1350" dirty="0">
                 <a:solidFill>
                   <a:srgbClr val="36454F"/>
                 </a:solidFill>
@@ -9552,36 +9634,166 @@
                 <a:ea typeface="Calibri" pitchFamily="34" charset="-122"/>
                 <a:cs typeface="Calibri" pitchFamily="34" charset="-120"/>
               </a:rPr>
-              <a:t>Confirmar o CI verde no GitHub Actions e abrir um PR de teste.</a:t>
-            </a:r>
-            <a:endParaRPr lang="en-US" sz="1500" dirty="0"/>
-          </a:p>
+              <a:t>Cada unidade evolui o mesmo produto</a:t>
+            </a:r>
+            <a:endParaRPr lang="en-US" sz="1350" dirty="0"/>
+          </a:p>
+        </p:txBody>
+      </p:sp>
+      <p:sp>
+        <p:nvSpPr>
+          <p:cNvPr id="8" name="Shape 6"/>
+          <p:cNvSpPr/>
+          <p:nvPr/>
+        </p:nvSpPr>
+        <p:spPr>
+          <a:xfrm>
+            <a:off x="4709160" y="1097280"/>
+            <a:ext cx="3977640" cy="2926080"/>
+          </a:xfrm>
+          <a:prstGeom prst="roundRect">
+            <a:avLst>
+              <a:gd name="adj" fmla="val 4375"/>
+            </a:avLst>
+          </a:prstGeom>
+          <a:solidFill>
+            <a:srgbClr val="FBF1EF"/>
+          </a:solidFill>
+          <a:ln w="19050">
+            <a:solidFill>
+              <a:srgbClr val="B85042"/>
+            </a:solidFill>
+            <a:prstDash val="solid"/>
+          </a:ln>
+        </p:spPr>
+      </p:sp>
+      <p:sp>
+        <p:nvSpPr>
+          <p:cNvPr id="9" name="Text 7"/>
+          <p:cNvSpPr/>
+          <p:nvPr/>
+        </p:nvSpPr>
+        <p:spPr>
+          <a:xfrm>
+            <a:off x="4910328" y="1243584"/>
+            <a:ext cx="3575304" cy="365760"/>
+          </a:xfrm>
+          <a:prstGeom prst="rect">
+            <a:avLst/>
+          </a:prstGeom>
+          <a:noFill/>
+          <a:ln/>
+        </p:spPr>
+        <p:txBody>
+          <a:bodyPr wrap="square" lIns="0" tIns="0" rIns="0" bIns="0" rtlCol="0" anchor="ctr"/>
+          <a:lstStyle/>
+          <a:p>
+            <a:pPr indent="0" marL="0">
+              <a:buNone/>
+            </a:pPr>
+            <a:r>
+              <a:rPr lang="en-US" sz="1400" b="1" dirty="0">
+                <a:solidFill>
+                  <a:srgbClr val="B85042"/>
+                </a:solidFill>
+                <a:latin typeface="Calibri" pitchFamily="34" charset="0"/>
+                <a:ea typeface="Calibri" pitchFamily="34" charset="-122"/>
+                <a:cs typeface="Calibri" pitchFamily="34" charset="-120"/>
+              </a:rPr>
+              <a:t>O projeto que falha</a:t>
+            </a:r>
+            <a:endParaRPr lang="en-US" sz="1400" dirty="0"/>
+          </a:p>
+        </p:txBody>
+      </p:sp>
+      <p:sp>
+        <p:nvSpPr>
+          <p:cNvPr id="10" name="Text 8"/>
+          <p:cNvSpPr/>
+          <p:nvPr/>
+        </p:nvSpPr>
+        <p:spPr>
+          <a:xfrm>
+            <a:off x="4910328" y="1645920"/>
+            <a:ext cx="3575304" cy="2194560"/>
+          </a:xfrm>
+          <a:prstGeom prst="rect">
+            <a:avLst/>
+          </a:prstGeom>
+          <a:noFill/>
+          <a:ln/>
+        </p:spPr>
+        <p:txBody>
+          <a:bodyPr wrap="square" lIns="0" tIns="0" rIns="0" bIns="0" rtlCol="0" anchor="t"/>
+          <a:lstStyle/>
           <a:p>
             <a:pPr marL="342900" indent="-342900">
               <a:spcAft>
-                <a:spcPts val="1000"/>
+                <a:spcPts val="800"/>
               </a:spcAft>
               <a:buSzPct val="100000"/>
               <a:buChar char="•"/>
             </a:pPr>
             <a:r>
-              <a:rPr lang="en-US" sz="1500" dirty="0">
-                <a:solidFill>
-                  <a:srgbClr val="36454F"/>
-                </a:solidFill>
-                <a:latin typeface="Calibri" pitchFamily="34" charset="0"/>
-                <a:ea typeface="Calibri" pitchFamily="34" charset="-122"/>
-                <a:cs typeface="Calibri" pitchFamily="34" charset="-120"/>
-              </a:rPr>
-              <a:t>Rodar npm install, npm run db:migrar, npm test e npm start. O banco é SQLite, embutido no Node: nada a instalar.</a:t>
-            </a:r>
-            <a:endParaRPr lang="en-US" sz="1500" dirty="0"/>
-          </a:p>
-        </p:txBody>
-      </p:sp>
-      <p:sp>
-        <p:nvSpPr>
-          <p:cNvPr id="6" name="Text 4"/>
+              <a:rPr lang="en-US" sz="1350" dirty="0">
+                <a:solidFill>
+                  <a:srgbClr val="7A3A31"/>
+                </a:solidFill>
+                <a:latin typeface="Calibri" pitchFamily="34" charset="0"/>
+                <a:ea typeface="Calibri" pitchFamily="34" charset="-122"/>
+                <a:cs typeface="Calibri" pitchFamily="34" charset="-120"/>
+              </a:rPr>
+              <a:t>Só integra na última semana</a:t>
+            </a:r>
+            <a:endParaRPr lang="en-US" sz="1350" dirty="0"/>
+          </a:p>
+          <a:p>
+            <a:pPr marL="342900" indent="-342900">
+              <a:spcAft>
+                <a:spcPts val="800"/>
+              </a:spcAft>
+              <a:buSzPct val="100000"/>
+              <a:buChar char="•"/>
+            </a:pPr>
+            <a:r>
+              <a:rPr lang="en-US" sz="1350" dirty="0">
+                <a:solidFill>
+                  <a:srgbClr val="7A3A31"/>
+                </a:solidFill>
+                <a:latin typeface="Calibri" pitchFamily="34" charset="0"/>
+                <a:ea typeface="Calibri" pitchFamily="34" charset="-122"/>
+                <a:cs typeface="Calibri" pitchFamily="34" charset="-120"/>
+              </a:rPr>
+              <a:t>"Na minha máquina funciona"</a:t>
+            </a:r>
+            <a:endParaRPr lang="en-US" sz="1350" dirty="0"/>
+          </a:p>
+          <a:p>
+            <a:pPr marL="342900" indent="-342900">
+              <a:spcAft>
+                <a:spcPts val="800"/>
+              </a:spcAft>
+              <a:buSzPct val="100000"/>
+              <a:buChar char="•"/>
+            </a:pPr>
+            <a:r>
+              <a:rPr lang="en-US" sz="1350" dirty="0">
+                <a:solidFill>
+                  <a:srgbClr val="7A3A31"/>
+                </a:solidFill>
+                <a:latin typeface="Calibri" pitchFamily="34" charset="0"/>
+                <a:ea typeface="Calibri" pitchFamily="34" charset="-122"/>
+                <a:cs typeface="Calibri" pitchFamily="34" charset="-120"/>
+              </a:rPr>
+              <a:t>Ninguém sabe se roda de verdade</a:t>
+            </a:r>
+            <a:endParaRPr lang="en-US" sz="1350" dirty="0"/>
+          </a:p>
+        </p:txBody>
+      </p:sp>
+      <p:sp>
+        <p:nvSpPr>
+          <p:cNvPr id="11" name="Text 9"/>
           <p:cNvSpPr/>
           <p:nvPr/>
         </p:nvSpPr>
@@ -9612,7 +9824,7 @@
                 <a:ea typeface="Calibri" pitchFamily="34" charset="-122"/>
                 <a:cs typeface="Calibri" pitchFamily="34" charset="-120"/>
               </a:rPr>
-              <a:t>Produção · o produto vivo avança em toda aula</a:t>
+              <a:t>Exemplo + contraponto</a:t>
             </a:r>
             <a:endParaRPr lang="en-US" sz="1000" dirty="0"/>
           </a:p>
@@ -9676,7 +9888,7 @@
                 <a:ea typeface="Cambria" pitchFamily="34" charset="-122"/>
                 <a:cs typeface="Cambria" pitchFamily="34" charset="-120"/>
               </a:rPr>
-              <a:t>Trabalho em sala</a:t>
+              <a:t>Produção contínua</a:t>
             </a:r>
             <a:endParaRPr lang="en-US" sz="3000" dirty="0"/>
           </a:p>
@@ -9715,7 +9927,7 @@
                 <a:ea typeface="Calibri" pitchFamily="34" charset="-122"/>
                 <a:cs typeface="Calibri" pitchFamily="34" charset="-120"/>
               </a:rPr>
-              <a:t>Em grupo (3 a 5 pessoas) — escolham 1 das 3 opções</a:t>
+              <a:t>O que todos os grupos evoluem no produto hoje</a:t>
             </a:r>
             <a:endParaRPr lang="en-US" sz="1300" dirty="0"/>
           </a:p>
@@ -9730,19 +9942,19 @@
         <p:spPr>
           <a:xfrm>
             <a:off x="457200" y="1298448"/>
-            <a:ext cx="8229600" cy="960120"/>
+            <a:ext cx="8229600" cy="2377440"/>
           </a:xfrm>
           <a:prstGeom prst="roundRect">
             <a:avLst>
-              <a:gd name="adj" fmla="val 11429"/>
+              <a:gd name="adj" fmla="val 5385"/>
             </a:avLst>
           </a:prstGeom>
           <a:solidFill>
-            <a:srgbClr val="FFFFFF"/>
+            <a:srgbClr val="F1F5EF"/>
           </a:solidFill>
-          <a:ln w="12700">
+          <a:ln w="19050">
             <a:solidFill>
-              <a:srgbClr val="D6E0D2"/>
+              <a:srgbClr val="97BC62"/>
             </a:solidFill>
             <a:prstDash val="solid"/>
           </a:ln>
@@ -9750,23 +9962,109 @@
       </p:sp>
       <p:sp>
         <p:nvSpPr>
-          <p:cNvPr id="5" name="Shape 3"/>
-          <p:cNvSpPr/>
-          <p:nvPr/>
-        </p:nvSpPr>
-        <p:spPr>
-          <a:xfrm>
-            <a:off x="658368" y="1591056"/>
-            <a:ext cx="384048" cy="384048"/>
-          </a:xfrm>
-          <a:prstGeom prst="ellipse">
-            <a:avLst/>
-          </a:prstGeom>
-          <a:solidFill>
-            <a:srgbClr val="2C5F2D"/>
-          </a:solidFill>
-          <a:ln/>
-        </p:spPr>
+          <p:cNvPr id="5" name="Text 3"/>
+          <p:cNvSpPr/>
+          <p:nvPr/>
+        </p:nvSpPr>
+        <p:spPr>
+          <a:xfrm>
+            <a:off x="777240" y="1481328"/>
+            <a:ext cx="7589520" cy="2011680"/>
+          </a:xfrm>
+          <a:prstGeom prst="rect">
+            <a:avLst/>
+          </a:prstGeom>
+          <a:noFill/>
+          <a:ln/>
+        </p:spPr>
+        <p:txBody>
+          <a:bodyPr wrap="square" lIns="0" tIns="0" rIns="0" bIns="0" rtlCol="0" anchor="t"/>
+          <a:lstStyle/>
+          <a:p>
+            <a:pPr marL="342900" indent="-342900">
+              <a:spcAft>
+                <a:spcPts val="1000"/>
+              </a:spcAft>
+              <a:buSzPct val="100000"/>
+              <a:buChar char="•"/>
+            </a:pPr>
+            <a:r>
+              <a:rPr lang="en-US" sz="1500" dirty="0">
+                <a:solidFill>
+                  <a:srgbClr val="36454F"/>
+                </a:solidFill>
+                <a:latin typeface="Calibri" pitchFamily="34" charset="0"/>
+                <a:ea typeface="Calibri" pitchFamily="34" charset="-122"/>
+                <a:cs typeface="Calibri" pitchFamily="34" charset="-120"/>
+              </a:rPr>
+              <a:t>Formar o grupo (3 a 5 pessoas) e receber o caso Prato Cheio.</a:t>
+            </a:r>
+            <a:endParaRPr lang="en-US" sz="1500" dirty="0"/>
+          </a:p>
+          <a:p>
+            <a:pPr marL="342900" indent="-342900">
+              <a:spcAft>
+                <a:spcPts val="1000"/>
+              </a:spcAft>
+              <a:buSzPct val="100000"/>
+              <a:buChar char="•"/>
+            </a:pPr>
+            <a:r>
+              <a:rPr lang="en-US" sz="1500" dirty="0">
+                <a:solidFill>
+                  <a:srgbClr val="36454F"/>
+                </a:solidFill>
+                <a:latin typeface="Calibri" pitchFamily="34" charset="0"/>
+                <a:ea typeface="Calibri" pitchFamily="34" charset="-122"/>
+                <a:cs typeface="Calibri" pitchFamily="34" charset="-120"/>
+              </a:rPr>
+              <a:t>Criar o repositório público a partir do template-repo e confirmar o CI verde.</a:t>
+            </a:r>
+            <a:endParaRPr lang="en-US" sz="1500" dirty="0"/>
+          </a:p>
+          <a:p>
+            <a:pPr marL="342900" indent="-342900">
+              <a:spcAft>
+                <a:spcPts val="1000"/>
+              </a:spcAft>
+              <a:buSzPct val="100000"/>
+              <a:buChar char="•"/>
+            </a:pPr>
+            <a:r>
+              <a:rPr lang="en-US" sz="1500" dirty="0">
+                <a:solidFill>
+                  <a:srgbClr val="36454F"/>
+                </a:solidFill>
+                <a:latin typeface="Calibri" pitchFamily="34" charset="0"/>
+                <a:ea typeface="Calibri" pitchFamily="34" charset="-122"/>
+                <a:cs typeface="Calibri" pitchFamily="34" charset="-120"/>
+              </a:rPr>
+              <a:t>Rodar npm install, npm run db:migrar, npm test e npm start. O banco é SQLite, embutido no Node: nada a instalar.</a:t>
+            </a:r>
+            <a:endParaRPr lang="en-US" sz="1500" dirty="0"/>
+          </a:p>
+          <a:p>
+            <a:pPr marL="342900" indent="-342900">
+              <a:spcAft>
+                <a:spcPts val="1000"/>
+              </a:spcAft>
+              <a:buSzPct val="100000"/>
+              <a:buChar char="•"/>
+            </a:pPr>
+            <a:r>
+              <a:rPr lang="en-US" sz="1500" dirty="0">
+                <a:solidFill>
+                  <a:srgbClr val="36454F"/>
+                </a:solidFill>
+                <a:latin typeface="Calibri" pitchFamily="34" charset="0"/>
+                <a:ea typeface="Calibri" pitchFamily="34" charset="-122"/>
+                <a:cs typeface="Calibri" pitchFamily="34" charset="-120"/>
+              </a:rPr>
+              <a:t>Entregar no Teams a atividade de aceite, com os membros do time e o link do repositório.</a:t>
+            </a:r>
+            <a:endParaRPr lang="en-US" sz="1500" dirty="0"/>
+          </a:p>
+        </p:txBody>
       </p:sp>
       <p:sp>
         <p:nvSpPr>
@@ -9776,47 +10074,8 @@
         </p:nvSpPr>
         <p:spPr>
           <a:xfrm>
-            <a:off x="658368" y="1591056"/>
-            <a:ext cx="384048" cy="384048"/>
-          </a:xfrm>
-          <a:prstGeom prst="rect">
-            <a:avLst/>
-          </a:prstGeom>
-          <a:noFill/>
-          <a:ln/>
-        </p:spPr>
-        <p:txBody>
-          <a:bodyPr wrap="square" lIns="0" tIns="0" rIns="0" bIns="0" rtlCol="0" anchor="ctr"/>
-          <a:lstStyle/>
-          <a:p>
-            <a:pPr algn="ctr" indent="0" marL="0">
-              <a:buNone/>
-            </a:pPr>
-            <a:r>
-              <a:rPr lang="en-US" sz="1500" b="1" dirty="0">
-                <a:solidFill>
-                  <a:srgbClr val="FFFFFF"/>
-                </a:solidFill>
-                <a:latin typeface="Calibri" pitchFamily="34" charset="0"/>
-                <a:ea typeface="Calibri" pitchFamily="34" charset="-122"/>
-                <a:cs typeface="Calibri" pitchFamily="34" charset="-120"/>
-              </a:rPr>
-              <a:t>1</a:t>
-            </a:r>
-            <a:endParaRPr lang="en-US" sz="1500" dirty="0"/>
-          </a:p>
-        </p:txBody>
-      </p:sp>
-      <p:sp>
-        <p:nvSpPr>
-          <p:cNvPr id="7" name="Text 5"/>
-          <p:cNvSpPr/>
-          <p:nvPr/>
-        </p:nvSpPr>
-        <p:spPr>
-          <a:xfrm>
-            <a:off x="1234440" y="1298448"/>
-            <a:ext cx="7223760" cy="960120"/>
+            <a:off x="457200" y="4759452"/>
+            <a:ext cx="8229600" cy="256032"/>
           </a:xfrm>
           <a:prstGeom prst="rect">
             <a:avLst/>
@@ -9832,295 +10091,6 @@
               <a:buNone/>
             </a:pPr>
             <a:r>
-              <a:rPr lang="en-US" sz="1350" dirty="0">
-                <a:solidFill>
-                  <a:srgbClr val="36454F"/>
-                </a:solidFill>
-                <a:latin typeface="Calibri" pitchFamily="34" charset="0"/>
-                <a:ea typeface="Calibri" pitchFamily="34" charset="-122"/>
-                <a:cs typeface="Calibri" pitchFamily="34" charset="-120"/>
-              </a:rPr>
-              <a:t>Reescrever um pedido de cliente mal formulado, separando o problema real da solução embutida.</a:t>
-            </a:r>
-            <a:endParaRPr lang="en-US" sz="1350" dirty="0"/>
-          </a:p>
-        </p:txBody>
-      </p:sp>
-      <p:sp>
-        <p:nvSpPr>
-          <p:cNvPr id="8" name="Shape 6"/>
-          <p:cNvSpPr/>
-          <p:nvPr/>
-        </p:nvSpPr>
-        <p:spPr>
-          <a:xfrm>
-            <a:off x="457200" y="2404872"/>
-            <a:ext cx="8229600" cy="960120"/>
-          </a:xfrm>
-          <a:prstGeom prst="roundRect">
-            <a:avLst>
-              <a:gd name="adj" fmla="val 11429"/>
-            </a:avLst>
-          </a:prstGeom>
-          <a:solidFill>
-            <a:srgbClr val="FFFFFF"/>
-          </a:solidFill>
-          <a:ln w="12700">
-            <a:solidFill>
-              <a:srgbClr val="D6E0D2"/>
-            </a:solidFill>
-            <a:prstDash val="solid"/>
-          </a:ln>
-        </p:spPr>
-      </p:sp>
-      <p:sp>
-        <p:nvSpPr>
-          <p:cNvPr id="9" name="Shape 7"/>
-          <p:cNvSpPr/>
-          <p:nvPr/>
-        </p:nvSpPr>
-        <p:spPr>
-          <a:xfrm>
-            <a:off x="658368" y="2697480"/>
-            <a:ext cx="384048" cy="384048"/>
-          </a:xfrm>
-          <a:prstGeom prst="ellipse">
-            <a:avLst/>
-          </a:prstGeom>
-          <a:solidFill>
-            <a:srgbClr val="2C5F2D"/>
-          </a:solidFill>
-          <a:ln/>
-        </p:spPr>
-      </p:sp>
-      <p:sp>
-        <p:nvSpPr>
-          <p:cNvPr id="10" name="Text 8"/>
-          <p:cNvSpPr/>
-          <p:nvPr/>
-        </p:nvSpPr>
-        <p:spPr>
-          <a:xfrm>
-            <a:off x="658368" y="2697480"/>
-            <a:ext cx="384048" cy="384048"/>
-          </a:xfrm>
-          <a:prstGeom prst="rect">
-            <a:avLst/>
-          </a:prstGeom>
-          <a:noFill/>
-          <a:ln/>
-        </p:spPr>
-        <p:txBody>
-          <a:bodyPr wrap="square" lIns="0" tIns="0" rIns="0" bIns="0" rtlCol="0" anchor="ctr"/>
-          <a:lstStyle/>
-          <a:p>
-            <a:pPr algn="ctr" indent="0" marL="0">
-              <a:buNone/>
-            </a:pPr>
-            <a:r>
-              <a:rPr lang="en-US" sz="1500" b="1" dirty="0">
-                <a:solidFill>
-                  <a:srgbClr val="FFFFFF"/>
-                </a:solidFill>
-                <a:latin typeface="Calibri" pitchFamily="34" charset="0"/>
-                <a:ea typeface="Calibri" pitchFamily="34" charset="-122"/>
-                <a:cs typeface="Calibri" pitchFamily="34" charset="-120"/>
-              </a:rPr>
-              <a:t>2</a:t>
-            </a:r>
-            <a:endParaRPr lang="en-US" sz="1500" dirty="0"/>
-          </a:p>
-        </p:txBody>
-      </p:sp>
-      <p:sp>
-        <p:nvSpPr>
-          <p:cNvPr id="11" name="Text 9"/>
-          <p:cNvSpPr/>
-          <p:nvPr/>
-        </p:nvSpPr>
-        <p:spPr>
-          <a:xfrm>
-            <a:off x="1234440" y="2404872"/>
-            <a:ext cx="7223760" cy="960120"/>
-          </a:xfrm>
-          <a:prstGeom prst="rect">
-            <a:avLst/>
-          </a:prstGeom>
-          <a:noFill/>
-          <a:ln/>
-        </p:spPr>
-        <p:txBody>
-          <a:bodyPr wrap="square" lIns="0" tIns="0" rIns="0" bIns="0" rtlCol="0" anchor="ctr"/>
-          <a:lstStyle/>
-          <a:p>
-            <a:pPr indent="0" marL="0">
-              <a:buNone/>
-            </a:pPr>
-            <a:r>
-              <a:rPr lang="en-US" sz="1350" dirty="0">
-                <a:solidFill>
-                  <a:srgbClr val="36454F"/>
-                </a:solidFill>
-                <a:latin typeface="Calibri" pitchFamily="34" charset="0"/>
-                <a:ea typeface="Calibri" pitchFamily="34" charset="-122"/>
-                <a:cs typeface="Calibri" pitchFamily="34" charset="-120"/>
-              </a:rPr>
-              <a:t>Listar 5 incertezas que precisam ser resolvidas antes de projetar qualquer solução.</a:t>
-            </a:r>
-            <a:endParaRPr lang="en-US" sz="1350" dirty="0"/>
-          </a:p>
-        </p:txBody>
-      </p:sp>
-      <p:sp>
-        <p:nvSpPr>
-          <p:cNvPr id="12" name="Shape 10"/>
-          <p:cNvSpPr/>
-          <p:nvPr/>
-        </p:nvSpPr>
-        <p:spPr>
-          <a:xfrm>
-            <a:off x="457200" y="3511296"/>
-            <a:ext cx="8229600" cy="960120"/>
-          </a:xfrm>
-          <a:prstGeom prst="roundRect">
-            <a:avLst>
-              <a:gd name="adj" fmla="val 11429"/>
-            </a:avLst>
-          </a:prstGeom>
-          <a:solidFill>
-            <a:srgbClr val="FFFFFF"/>
-          </a:solidFill>
-          <a:ln w="12700">
-            <a:solidFill>
-              <a:srgbClr val="D6E0D2"/>
-            </a:solidFill>
-            <a:prstDash val="solid"/>
-          </a:ln>
-        </p:spPr>
-      </p:sp>
-      <p:sp>
-        <p:nvSpPr>
-          <p:cNvPr id="13" name="Shape 11"/>
-          <p:cNvSpPr/>
-          <p:nvPr/>
-        </p:nvSpPr>
-        <p:spPr>
-          <a:xfrm>
-            <a:off x="658368" y="3803904"/>
-            <a:ext cx="384048" cy="384048"/>
-          </a:xfrm>
-          <a:prstGeom prst="ellipse">
-            <a:avLst/>
-          </a:prstGeom>
-          <a:solidFill>
-            <a:srgbClr val="2C5F2D"/>
-          </a:solidFill>
-          <a:ln/>
-        </p:spPr>
-      </p:sp>
-      <p:sp>
-        <p:nvSpPr>
-          <p:cNvPr id="14" name="Text 12"/>
-          <p:cNvSpPr/>
-          <p:nvPr/>
-        </p:nvSpPr>
-        <p:spPr>
-          <a:xfrm>
-            <a:off x="658368" y="3803904"/>
-            <a:ext cx="384048" cy="384048"/>
-          </a:xfrm>
-          <a:prstGeom prst="rect">
-            <a:avLst/>
-          </a:prstGeom>
-          <a:noFill/>
-          <a:ln/>
-        </p:spPr>
-        <p:txBody>
-          <a:bodyPr wrap="square" lIns="0" tIns="0" rIns="0" bIns="0" rtlCol="0" anchor="ctr"/>
-          <a:lstStyle/>
-          <a:p>
-            <a:pPr algn="ctr" indent="0" marL="0">
-              <a:buNone/>
-            </a:pPr>
-            <a:r>
-              <a:rPr lang="en-US" sz="1500" b="1" dirty="0">
-                <a:solidFill>
-                  <a:srgbClr val="FFFFFF"/>
-                </a:solidFill>
-                <a:latin typeface="Calibri" pitchFamily="34" charset="0"/>
-                <a:ea typeface="Calibri" pitchFamily="34" charset="-122"/>
-                <a:cs typeface="Calibri" pitchFamily="34" charset="-120"/>
-              </a:rPr>
-              <a:t>3</a:t>
-            </a:r>
-            <a:endParaRPr lang="en-US" sz="1500" dirty="0"/>
-          </a:p>
-        </p:txBody>
-      </p:sp>
-      <p:sp>
-        <p:nvSpPr>
-          <p:cNvPr id="15" name="Text 13"/>
-          <p:cNvSpPr/>
-          <p:nvPr/>
-        </p:nvSpPr>
-        <p:spPr>
-          <a:xfrm>
-            <a:off x="1234440" y="3511296"/>
-            <a:ext cx="7223760" cy="960120"/>
-          </a:xfrm>
-          <a:prstGeom prst="rect">
-            <a:avLst/>
-          </a:prstGeom>
-          <a:noFill/>
-          <a:ln/>
-        </p:spPr>
-        <p:txBody>
-          <a:bodyPr wrap="square" lIns="0" tIns="0" rIns="0" bIns="0" rtlCol="0" anchor="ctr"/>
-          <a:lstStyle/>
-          <a:p>
-            <a:pPr indent="0" marL="0">
-              <a:buNone/>
-            </a:pPr>
-            <a:r>
-              <a:rPr lang="en-US" sz="1350" dirty="0">
-                <a:solidFill>
-                  <a:srgbClr val="36454F"/>
-                </a:solidFill>
-                <a:latin typeface="Calibri" pitchFamily="34" charset="0"/>
-                <a:ea typeface="Calibri" pitchFamily="34" charset="-122"/>
-                <a:cs typeface="Calibri" pitchFamily="34" charset="-120"/>
-              </a:rPr>
-              <a:t>Identificar três restrições do caso e explicar como cada uma limita as soluções possíveis.</a:t>
-            </a:r>
-            <a:endParaRPr lang="en-US" sz="1350" dirty="0"/>
-          </a:p>
-        </p:txBody>
-      </p:sp>
-      <p:sp>
-        <p:nvSpPr>
-          <p:cNvPr id="16" name="Text 14"/>
-          <p:cNvSpPr/>
-          <p:nvPr/>
-        </p:nvSpPr>
-        <p:spPr>
-          <a:xfrm>
-            <a:off x="457200" y="4759452"/>
-            <a:ext cx="8229600" cy="256032"/>
-          </a:xfrm>
-          <a:prstGeom prst="rect">
-            <a:avLst/>
-          </a:prstGeom>
-          <a:noFill/>
-          <a:ln/>
-        </p:spPr>
-        <p:txBody>
-          <a:bodyPr wrap="square" lIns="0" tIns="0" rIns="0" bIns="0" rtlCol="0" anchor="ctr"/>
-          <a:lstStyle/>
-          <a:p>
-            <a:pPr indent="0" marL="0">
-              <a:buNone/>
-            </a:pPr>
-            <a:r>
               <a:rPr lang="en-US" sz="1000" dirty="0">
                 <a:solidFill>
                   <a:srgbClr val="6E7D72"/>
@@ -10129,7 +10099,7 @@
                 <a:ea typeface="Calibri" pitchFamily="34" charset="-122"/>
                 <a:cs typeface="Calibri" pitchFamily="34" charset="-120"/>
               </a:rPr>
-              <a:t>Entrega ao final do encontro · vale 0,25</a:t>
+              <a:t>Produção · o produto vivo avança em toda aula</a:t>
             </a:r>
             <a:endParaRPr lang="en-US" sz="1000" dirty="0"/>
           </a:p>
@@ -10193,7 +10163,7 @@
                 <a:ea typeface="Cambria" pitchFamily="34" charset="-122"/>
                 <a:cs typeface="Cambria" pitchFamily="34" charset="-120"/>
               </a:rPr>
-              <a:t>Nível de IA nesta aula</a:t>
+              <a:t>Trabalho em sala</a:t>
             </a:r>
             <a:endParaRPr lang="en-US" sz="3000" dirty="0"/>
           </a:p>
@@ -10201,19 +10171,83 @@
       </p:sp>
       <p:sp>
         <p:nvSpPr>
-          <p:cNvPr id="3" name="Shape 1"/>
-          <p:cNvSpPr/>
-          <p:nvPr/>
-        </p:nvSpPr>
-        <p:spPr>
-          <a:xfrm>
-            <a:off x="457200" y="1143000"/>
-            <a:ext cx="8229600" cy="1051560"/>
+          <p:cNvPr id="3" name="Text 1"/>
+          <p:cNvSpPr/>
+          <p:nvPr/>
+        </p:nvSpPr>
+        <p:spPr>
+          <a:xfrm>
+            <a:off x="457200" y="868680"/>
+            <a:ext cx="8229600" cy="274320"/>
+          </a:xfrm>
+          <a:prstGeom prst="rect">
+            <a:avLst/>
+          </a:prstGeom>
+          <a:noFill/>
+          <a:ln/>
+        </p:spPr>
+        <p:txBody>
+          <a:bodyPr wrap="square" lIns="0" tIns="0" rIns="0" bIns="0" rtlCol="0" anchor="ctr"/>
+          <a:lstStyle/>
+          <a:p>
+            <a:pPr indent="0" marL="0">
+              <a:buNone/>
+            </a:pPr>
+            <a:r>
+              <a:rPr lang="en-US" sz="1300" i="1" dirty="0">
+                <a:solidFill>
+                  <a:srgbClr val="6E7D72"/>
+                </a:solidFill>
+                <a:latin typeface="Calibri" pitchFamily="34" charset="0"/>
+                <a:ea typeface="Calibri" pitchFamily="34" charset="-122"/>
+                <a:cs typeface="Calibri" pitchFamily="34" charset="-120"/>
+              </a:rPr>
+              <a:t>Em grupo (3 a 5 pessoas) — as três atividades, na ordem</a:t>
+            </a:r>
+            <a:endParaRPr lang="en-US" sz="1300" dirty="0"/>
+          </a:p>
+        </p:txBody>
+      </p:sp>
+      <p:sp>
+        <p:nvSpPr>
+          <p:cNvPr id="4" name="Shape 2"/>
+          <p:cNvSpPr/>
+          <p:nvPr/>
+        </p:nvSpPr>
+        <p:spPr>
+          <a:xfrm>
+            <a:off x="457200" y="1298448"/>
+            <a:ext cx="8229600" cy="960120"/>
           </a:xfrm>
           <a:prstGeom prst="roundRect">
             <a:avLst>
-              <a:gd name="adj" fmla="val 12174"/>
+              <a:gd name="adj" fmla="val 11429"/>
             </a:avLst>
+          </a:prstGeom>
+          <a:solidFill>
+            <a:srgbClr val="FFFFFF"/>
+          </a:solidFill>
+          <a:ln w="12700">
+            <a:solidFill>
+              <a:srgbClr val="D6E0D2"/>
+            </a:solidFill>
+            <a:prstDash val="solid"/>
+          </a:ln>
+        </p:spPr>
+      </p:sp>
+      <p:sp>
+        <p:nvSpPr>
+          <p:cNvPr id="5" name="Shape 3"/>
+          <p:cNvSpPr/>
+          <p:nvPr/>
+        </p:nvSpPr>
+        <p:spPr>
+          <a:xfrm>
+            <a:off x="658368" y="1591056"/>
+            <a:ext cx="384048" cy="384048"/>
+          </a:xfrm>
+          <a:prstGeom prst="ellipse">
+            <a:avLst/>
           </a:prstGeom>
           <a:solidFill>
             <a:srgbClr val="2C5F2D"/>
@@ -10223,14 +10257,14 @@
       </p:sp>
       <p:sp>
         <p:nvSpPr>
-          <p:cNvPr id="4" name="Text 2"/>
-          <p:cNvSpPr/>
-          <p:nvPr/>
-        </p:nvSpPr>
-        <p:spPr>
-          <a:xfrm>
-            <a:off x="457200" y="1143000"/>
-            <a:ext cx="8229600" cy="1051560"/>
+          <p:cNvPr id="6" name="Text 4"/>
+          <p:cNvSpPr/>
+          <p:nvPr/>
+        </p:nvSpPr>
+        <p:spPr>
+          <a:xfrm>
+            <a:off x="658368" y="1591056"/>
+            <a:ext cx="384048" cy="384048"/>
           </a:xfrm>
           <a:prstGeom prst="rect">
             <a:avLst/>
@@ -10246,30 +10280,30 @@
               <a:buNone/>
             </a:pPr>
             <a:r>
-              <a:rPr lang="en-US" sz="2600" b="1" dirty="0">
+              <a:rPr lang="en-US" sz="1500" b="1" dirty="0">
                 <a:solidFill>
                   <a:srgbClr val="FFFFFF"/>
                 </a:solidFill>
-                <a:latin typeface="Cambria" pitchFamily="34" charset="0"/>
-                <a:ea typeface="Cambria" pitchFamily="34" charset="-122"/>
-                <a:cs typeface="Cambria" pitchFamily="34" charset="-120"/>
-              </a:rPr>
-              <a:t>IA para consulta</a:t>
-            </a:r>
-            <a:endParaRPr lang="en-US" sz="2600" dirty="0"/>
-          </a:p>
-        </p:txBody>
-      </p:sp>
-      <p:sp>
-        <p:nvSpPr>
-          <p:cNvPr id="5" name="Text 3"/>
-          <p:cNvSpPr/>
-          <p:nvPr/>
-        </p:nvSpPr>
-        <p:spPr>
-          <a:xfrm>
-            <a:off x="457200" y="2377440"/>
-            <a:ext cx="8229600" cy="640080"/>
+                <a:latin typeface="Calibri" pitchFamily="34" charset="0"/>
+                <a:ea typeface="Calibri" pitchFamily="34" charset="-122"/>
+                <a:cs typeface="Calibri" pitchFamily="34" charset="-120"/>
+              </a:rPr>
+              <a:t>1</a:t>
+            </a:r>
+            <a:endParaRPr lang="en-US" sz="1500" dirty="0"/>
+          </a:p>
+        </p:txBody>
+      </p:sp>
+      <p:sp>
+        <p:nvSpPr>
+          <p:cNvPr id="7" name="Text 5"/>
+          <p:cNvSpPr/>
+          <p:nvPr/>
+        </p:nvSpPr>
+        <p:spPr>
+          <a:xfrm>
+            <a:off x="1234440" y="1298448"/>
+            <a:ext cx="7223760" cy="960120"/>
           </a:xfrm>
           <a:prstGeom prst="rect">
             <a:avLst/>
@@ -10285,7 +10319,7 @@
               <a:buNone/>
             </a:pPr>
             <a:r>
-              <a:rPr lang="en-US" sz="1500" dirty="0">
+              <a:rPr lang="en-US" sz="1350" dirty="0">
                 <a:solidFill>
                   <a:srgbClr val="36454F"/>
                 </a:solidFill>
@@ -10293,7 +10327,93 @@
                 <a:ea typeface="Calibri" pitchFamily="34" charset="-122"/>
                 <a:cs typeface="Calibri" pitchFamily="34" charset="-120"/>
               </a:rPr>
-              <a:t>Pode esclarecer conceitos e comparar alternativas. Não produz a entrega por você.</a:t>
+              <a:t>Reescrever um "pedido de cliente" mal formulado, separando o problema real da solução que já vinha embutida.</a:t>
+            </a:r>
+            <a:endParaRPr lang="en-US" sz="1350" dirty="0"/>
+          </a:p>
+        </p:txBody>
+      </p:sp>
+      <p:sp>
+        <p:nvSpPr>
+          <p:cNvPr id="8" name="Shape 6"/>
+          <p:cNvSpPr/>
+          <p:nvPr/>
+        </p:nvSpPr>
+        <p:spPr>
+          <a:xfrm>
+            <a:off x="457200" y="2404872"/>
+            <a:ext cx="8229600" cy="960120"/>
+          </a:xfrm>
+          <a:prstGeom prst="roundRect">
+            <a:avLst>
+              <a:gd name="adj" fmla="val 11429"/>
+            </a:avLst>
+          </a:prstGeom>
+          <a:solidFill>
+            <a:srgbClr val="FFFFFF"/>
+          </a:solidFill>
+          <a:ln w="12700">
+            <a:solidFill>
+              <a:srgbClr val="D6E0D2"/>
+            </a:solidFill>
+            <a:prstDash val="solid"/>
+          </a:ln>
+        </p:spPr>
+      </p:sp>
+      <p:sp>
+        <p:nvSpPr>
+          <p:cNvPr id="9" name="Shape 7"/>
+          <p:cNvSpPr/>
+          <p:nvPr/>
+        </p:nvSpPr>
+        <p:spPr>
+          <a:xfrm>
+            <a:off x="658368" y="2697480"/>
+            <a:ext cx="384048" cy="384048"/>
+          </a:xfrm>
+          <a:prstGeom prst="ellipse">
+            <a:avLst/>
+          </a:prstGeom>
+          <a:solidFill>
+            <a:srgbClr val="2C5F2D"/>
+          </a:solidFill>
+          <a:ln/>
+        </p:spPr>
+      </p:sp>
+      <p:sp>
+        <p:nvSpPr>
+          <p:cNvPr id="10" name="Text 8"/>
+          <p:cNvSpPr/>
+          <p:nvPr/>
+        </p:nvSpPr>
+        <p:spPr>
+          <a:xfrm>
+            <a:off x="658368" y="2697480"/>
+            <a:ext cx="384048" cy="384048"/>
+          </a:xfrm>
+          <a:prstGeom prst="rect">
+            <a:avLst/>
+          </a:prstGeom>
+          <a:noFill/>
+          <a:ln/>
+        </p:spPr>
+        <p:txBody>
+          <a:bodyPr wrap="square" lIns="0" tIns="0" rIns="0" bIns="0" rtlCol="0" anchor="ctr"/>
+          <a:lstStyle/>
+          <a:p>
+            <a:pPr algn="ctr" indent="0" marL="0">
+              <a:buNone/>
+            </a:pPr>
+            <a:r>
+              <a:rPr lang="en-US" sz="1500" b="1" dirty="0">
+                <a:solidFill>
+                  <a:srgbClr val="FFFFFF"/>
+                </a:solidFill>
+                <a:latin typeface="Calibri" pitchFamily="34" charset="0"/>
+                <a:ea typeface="Calibri" pitchFamily="34" charset="-122"/>
+                <a:cs typeface="Calibri" pitchFamily="34" charset="-120"/>
+              </a:rPr>
+              <a:t>2</a:t>
             </a:r>
             <a:endParaRPr lang="en-US" sz="1500" dirty="0"/>
           </a:p>
@@ -10301,14 +10421,14 @@
       </p:sp>
       <p:sp>
         <p:nvSpPr>
-          <p:cNvPr id="6" name="Text 4"/>
-          <p:cNvSpPr/>
-          <p:nvPr/>
-        </p:nvSpPr>
-        <p:spPr>
-          <a:xfrm>
-            <a:off x="457200" y="3108960"/>
-            <a:ext cx="8229600" cy="548640"/>
+          <p:cNvPr id="11" name="Text 9"/>
+          <p:cNvSpPr/>
+          <p:nvPr/>
+        </p:nvSpPr>
+        <p:spPr>
+          <a:xfrm>
+            <a:off x="1234440" y="2404872"/>
+            <a:ext cx="7223760" cy="960120"/>
           </a:xfrm>
           <a:prstGeom prst="rect">
             <a:avLst/>
@@ -10324,23 +10444,148 @@
               <a:buNone/>
             </a:pPr>
             <a:r>
-              <a:rPr lang="en-US" sz="1300" i="1" dirty="0">
-                <a:solidFill>
-                  <a:srgbClr val="6E7D72"/>
-                </a:solidFill>
-                <a:latin typeface="Calibri" pitchFamily="34" charset="0"/>
-                <a:ea typeface="Calibri" pitchFamily="34" charset="-122"/>
-                <a:cs typeface="Calibri" pitchFamily="34" charset="-120"/>
-              </a:rPr>
-              <a:t>Em qualquer nível, você continua responsável por verificar, testar, corrigir e defender o resultado.</a:t>
-            </a:r>
-            <a:endParaRPr lang="en-US" sz="1300" dirty="0"/>
-          </a:p>
-        </p:txBody>
-      </p:sp>
-      <p:sp>
-        <p:nvSpPr>
-          <p:cNvPr id="7" name="Text 5"/>
+              <a:rPr lang="en-US" sz="1350" dirty="0">
+                <a:solidFill>
+                  <a:srgbClr val="36454F"/>
+                </a:solidFill>
+                <a:latin typeface="Calibri" pitchFamily="34" charset="0"/>
+                <a:ea typeface="Calibri" pitchFamily="34" charset="-122"/>
+                <a:cs typeface="Calibri" pitchFamily="34" charset="-120"/>
+              </a:rPr>
+              <a:t>A partir de um caso curto, listar 5 incertezas que precisam ser resolvidas antes de projetar qualquer solução.</a:t>
+            </a:r>
+            <a:endParaRPr lang="en-US" sz="1350" dirty="0"/>
+          </a:p>
+        </p:txBody>
+      </p:sp>
+      <p:sp>
+        <p:nvSpPr>
+          <p:cNvPr id="12" name="Shape 10"/>
+          <p:cNvSpPr/>
+          <p:nvPr/>
+        </p:nvSpPr>
+        <p:spPr>
+          <a:xfrm>
+            <a:off x="457200" y="3511296"/>
+            <a:ext cx="8229600" cy="960120"/>
+          </a:xfrm>
+          <a:prstGeom prst="roundRect">
+            <a:avLst>
+              <a:gd name="adj" fmla="val 11429"/>
+            </a:avLst>
+          </a:prstGeom>
+          <a:solidFill>
+            <a:srgbClr val="FFFFFF"/>
+          </a:solidFill>
+          <a:ln w="12700">
+            <a:solidFill>
+              <a:srgbClr val="D6E0D2"/>
+            </a:solidFill>
+            <a:prstDash val="solid"/>
+          </a:ln>
+        </p:spPr>
+      </p:sp>
+      <p:sp>
+        <p:nvSpPr>
+          <p:cNvPr id="13" name="Shape 11"/>
+          <p:cNvSpPr/>
+          <p:nvPr/>
+        </p:nvSpPr>
+        <p:spPr>
+          <a:xfrm>
+            <a:off x="658368" y="3803904"/>
+            <a:ext cx="384048" cy="384048"/>
+          </a:xfrm>
+          <a:prstGeom prst="ellipse">
+            <a:avLst/>
+          </a:prstGeom>
+          <a:solidFill>
+            <a:srgbClr val="2C5F2D"/>
+          </a:solidFill>
+          <a:ln/>
+        </p:spPr>
+      </p:sp>
+      <p:sp>
+        <p:nvSpPr>
+          <p:cNvPr id="14" name="Text 12"/>
+          <p:cNvSpPr/>
+          <p:nvPr/>
+        </p:nvSpPr>
+        <p:spPr>
+          <a:xfrm>
+            <a:off x="658368" y="3803904"/>
+            <a:ext cx="384048" cy="384048"/>
+          </a:xfrm>
+          <a:prstGeom prst="rect">
+            <a:avLst/>
+          </a:prstGeom>
+          <a:noFill/>
+          <a:ln/>
+        </p:spPr>
+        <p:txBody>
+          <a:bodyPr wrap="square" lIns="0" tIns="0" rIns="0" bIns="0" rtlCol="0" anchor="ctr"/>
+          <a:lstStyle/>
+          <a:p>
+            <a:pPr algn="ctr" indent="0" marL="0">
+              <a:buNone/>
+            </a:pPr>
+            <a:r>
+              <a:rPr lang="en-US" sz="1500" b="1" dirty="0">
+                <a:solidFill>
+                  <a:srgbClr val="FFFFFF"/>
+                </a:solidFill>
+                <a:latin typeface="Calibri" pitchFamily="34" charset="0"/>
+                <a:ea typeface="Calibri" pitchFamily="34" charset="-122"/>
+                <a:cs typeface="Calibri" pitchFamily="34" charset="-120"/>
+              </a:rPr>
+              <a:t>3</a:t>
+            </a:r>
+            <a:endParaRPr lang="en-US" sz="1500" dirty="0"/>
+          </a:p>
+        </p:txBody>
+      </p:sp>
+      <p:sp>
+        <p:nvSpPr>
+          <p:cNvPr id="15" name="Text 13"/>
+          <p:cNvSpPr/>
+          <p:nvPr/>
+        </p:nvSpPr>
+        <p:spPr>
+          <a:xfrm>
+            <a:off x="1234440" y="3511296"/>
+            <a:ext cx="7223760" cy="960120"/>
+          </a:xfrm>
+          <a:prstGeom prst="rect">
+            <a:avLst/>
+          </a:prstGeom>
+          <a:noFill/>
+          <a:ln/>
+        </p:spPr>
+        <p:txBody>
+          <a:bodyPr wrap="square" lIns="0" tIns="0" rIns="0" bIns="0" rtlCol="0" anchor="ctr"/>
+          <a:lstStyle/>
+          <a:p>
+            <a:pPr indent="0" marL="0">
+              <a:buNone/>
+            </a:pPr>
+            <a:r>
+              <a:rPr lang="en-US" sz="1350" dirty="0">
+                <a:solidFill>
+                  <a:srgbClr val="36454F"/>
+                </a:solidFill>
+                <a:latin typeface="Calibri" pitchFamily="34" charset="0"/>
+                <a:ea typeface="Calibri" pitchFamily="34" charset="-122"/>
+                <a:cs typeface="Calibri" pitchFamily="34" charset="-120"/>
+              </a:rPr>
+              <a:t>Identificar no caso três restrições (prazo, técnica, negócio) e explicar como cada uma limita as soluções possíveis.</a:t>
+            </a:r>
+            <a:endParaRPr lang="en-US" sz="1350" dirty="0"/>
+          </a:p>
+        </p:txBody>
+      </p:sp>
+      <p:sp>
+        <p:nvSpPr>
+          <p:cNvPr id="16" name="Text 14"/>
           <p:cNvSpPr/>
           <p:nvPr/>
         </p:nvSpPr>
@@ -10371,7 +10616,7 @@
                 <a:ea typeface="Calibri" pitchFamily="34" charset="-122"/>
                 <a:cs typeface="Calibri" pitchFamily="34" charset="-120"/>
               </a:rPr>
-              <a:t>Premissa 3 · o nível é declarado em toda atividade</a:t>
+              <a:t>As três, entregues ao final do encontro · valem 0,25</a:t>
             </a:r>
             <a:endParaRPr lang="en-US" sz="1000" dirty="0"/>
           </a:p>
@@ -10388,6 +10633,248 @@
 <file path=ppt/slides/slide26.xml><?xml version="1.0" encoding="utf-8"?>
 <p:sld xmlns:a="http://schemas.openxmlformats.org/drawingml/2006/main" xmlns:r="http://schemas.openxmlformats.org/officeDocument/2006/relationships" xmlns:p="http://schemas.openxmlformats.org/presentationml/2006/main">
   <p:cSld name="Slide 26">
+    <p:spTree>
+      <p:nvGrpSpPr>
+        <p:cNvPr id="1" name=""/>
+        <p:cNvGrpSpPr/>
+        <p:nvPr/>
+      </p:nvGrpSpPr>
+      <p:grpSpPr>
+        <a:xfrm>
+          <a:off x="0" y="0"/>
+          <a:ext cx="0" cy="0"/>
+          <a:chOff x="0" y="0"/>
+          <a:chExt cx="0" cy="0"/>
+        </a:xfrm>
+      </p:grpSpPr>
+      <p:sp>
+        <p:nvSpPr>
+          <p:cNvPr id="2" name="Text 0"/>
+          <p:cNvSpPr/>
+          <p:nvPr/>
+        </p:nvSpPr>
+        <p:spPr>
+          <a:xfrm>
+            <a:off x="457200" y="310896"/>
+            <a:ext cx="8229600" cy="548640"/>
+          </a:xfrm>
+          <a:prstGeom prst="rect">
+            <a:avLst/>
+          </a:prstGeom>
+          <a:noFill/>
+          <a:ln/>
+        </p:spPr>
+        <p:txBody>
+          <a:bodyPr wrap="square" lIns="0" tIns="0" rIns="0" bIns="0" rtlCol="0" anchor="ctr"/>
+          <a:lstStyle/>
+          <a:p>
+            <a:pPr indent="0" marL="0">
+              <a:buNone/>
+            </a:pPr>
+            <a:r>
+              <a:rPr lang="en-US" sz="3000" b="1" dirty="0">
+                <a:solidFill>
+                  <a:srgbClr val="2C5F2D"/>
+                </a:solidFill>
+                <a:latin typeface="Cambria" pitchFamily="34" charset="0"/>
+                <a:ea typeface="Cambria" pitchFamily="34" charset="-122"/>
+                <a:cs typeface="Cambria" pitchFamily="34" charset="-120"/>
+              </a:rPr>
+              <a:t>Nível de IA nesta aula</a:t>
+            </a:r>
+            <a:endParaRPr lang="en-US" sz="3000" dirty="0"/>
+          </a:p>
+        </p:txBody>
+      </p:sp>
+      <p:sp>
+        <p:nvSpPr>
+          <p:cNvPr id="3" name="Shape 1"/>
+          <p:cNvSpPr/>
+          <p:nvPr/>
+        </p:nvSpPr>
+        <p:spPr>
+          <a:xfrm>
+            <a:off x="457200" y="1143000"/>
+            <a:ext cx="8229600" cy="1051560"/>
+          </a:xfrm>
+          <a:prstGeom prst="roundRect">
+            <a:avLst>
+              <a:gd name="adj" fmla="val 12174"/>
+            </a:avLst>
+          </a:prstGeom>
+          <a:solidFill>
+            <a:srgbClr val="2C5F2D"/>
+          </a:solidFill>
+          <a:ln/>
+        </p:spPr>
+      </p:sp>
+      <p:sp>
+        <p:nvSpPr>
+          <p:cNvPr id="4" name="Text 2"/>
+          <p:cNvSpPr/>
+          <p:nvPr/>
+        </p:nvSpPr>
+        <p:spPr>
+          <a:xfrm>
+            <a:off x="457200" y="1143000"/>
+            <a:ext cx="8229600" cy="1051560"/>
+          </a:xfrm>
+          <a:prstGeom prst="rect">
+            <a:avLst/>
+          </a:prstGeom>
+          <a:noFill/>
+          <a:ln/>
+        </p:spPr>
+        <p:txBody>
+          <a:bodyPr wrap="square" lIns="0" tIns="0" rIns="0" bIns="0" rtlCol="0" anchor="ctr"/>
+          <a:lstStyle/>
+          <a:p>
+            <a:pPr algn="ctr" indent="0" marL="0">
+              <a:buNone/>
+            </a:pPr>
+            <a:r>
+              <a:rPr lang="en-US" sz="2600" b="1" dirty="0">
+                <a:solidFill>
+                  <a:srgbClr val="FFFFFF"/>
+                </a:solidFill>
+                <a:latin typeface="Cambria" pitchFamily="34" charset="0"/>
+                <a:ea typeface="Cambria" pitchFamily="34" charset="-122"/>
+                <a:cs typeface="Cambria" pitchFamily="34" charset="-120"/>
+              </a:rPr>
+              <a:t>IA para consulta</a:t>
+            </a:r>
+            <a:endParaRPr lang="en-US" sz="2600" dirty="0"/>
+          </a:p>
+        </p:txBody>
+      </p:sp>
+      <p:sp>
+        <p:nvSpPr>
+          <p:cNvPr id="5" name="Text 3"/>
+          <p:cNvSpPr/>
+          <p:nvPr/>
+        </p:nvSpPr>
+        <p:spPr>
+          <a:xfrm>
+            <a:off x="457200" y="2377440"/>
+            <a:ext cx="8229600" cy="640080"/>
+          </a:xfrm>
+          <a:prstGeom prst="rect">
+            <a:avLst/>
+          </a:prstGeom>
+          <a:noFill/>
+          <a:ln/>
+        </p:spPr>
+        <p:txBody>
+          <a:bodyPr wrap="square" lIns="0" tIns="0" rIns="0" bIns="0" rtlCol="0" anchor="ctr"/>
+          <a:lstStyle/>
+          <a:p>
+            <a:pPr indent="0" marL="0">
+              <a:buNone/>
+            </a:pPr>
+            <a:r>
+              <a:rPr lang="en-US" sz="1500" dirty="0">
+                <a:solidFill>
+                  <a:srgbClr val="36454F"/>
+                </a:solidFill>
+                <a:latin typeface="Calibri" pitchFamily="34" charset="0"/>
+                <a:ea typeface="Calibri" pitchFamily="34" charset="-122"/>
+                <a:cs typeface="Calibri" pitchFamily="34" charset="-120"/>
+              </a:rPr>
+              <a:t>Pode esclarecer conceitos e comparar alternativas. Não produz a entrega por você.</a:t>
+            </a:r>
+            <a:endParaRPr lang="en-US" sz="1500" dirty="0"/>
+          </a:p>
+        </p:txBody>
+      </p:sp>
+      <p:sp>
+        <p:nvSpPr>
+          <p:cNvPr id="6" name="Text 4"/>
+          <p:cNvSpPr/>
+          <p:nvPr/>
+        </p:nvSpPr>
+        <p:spPr>
+          <a:xfrm>
+            <a:off x="457200" y="3108960"/>
+            <a:ext cx="8229600" cy="548640"/>
+          </a:xfrm>
+          <a:prstGeom prst="rect">
+            <a:avLst/>
+          </a:prstGeom>
+          <a:noFill/>
+          <a:ln/>
+        </p:spPr>
+        <p:txBody>
+          <a:bodyPr wrap="square" lIns="0" tIns="0" rIns="0" bIns="0" rtlCol="0" anchor="ctr"/>
+          <a:lstStyle/>
+          <a:p>
+            <a:pPr indent="0" marL="0">
+              <a:buNone/>
+            </a:pPr>
+            <a:r>
+              <a:rPr lang="en-US" sz="1300" i="1" dirty="0">
+                <a:solidFill>
+                  <a:srgbClr val="6E7D72"/>
+                </a:solidFill>
+                <a:latin typeface="Calibri" pitchFamily="34" charset="0"/>
+                <a:ea typeface="Calibri" pitchFamily="34" charset="-122"/>
+                <a:cs typeface="Calibri" pitchFamily="34" charset="-120"/>
+              </a:rPr>
+              <a:t>Em qualquer nível, você continua responsável por verificar, testar, corrigir e defender o resultado.</a:t>
+            </a:r>
+            <a:endParaRPr lang="en-US" sz="1300" dirty="0"/>
+          </a:p>
+        </p:txBody>
+      </p:sp>
+      <p:sp>
+        <p:nvSpPr>
+          <p:cNvPr id="7" name="Text 5"/>
+          <p:cNvSpPr/>
+          <p:nvPr/>
+        </p:nvSpPr>
+        <p:spPr>
+          <a:xfrm>
+            <a:off x="457200" y="4759452"/>
+            <a:ext cx="8229600" cy="256032"/>
+          </a:xfrm>
+          <a:prstGeom prst="rect">
+            <a:avLst/>
+          </a:prstGeom>
+          <a:noFill/>
+          <a:ln/>
+        </p:spPr>
+        <p:txBody>
+          <a:bodyPr wrap="square" lIns="0" tIns="0" rIns="0" bIns="0" rtlCol="0" anchor="ctr"/>
+          <a:lstStyle/>
+          <a:p>
+            <a:pPr indent="0" marL="0">
+              <a:buNone/>
+            </a:pPr>
+            <a:r>
+              <a:rPr lang="en-US" sz="1000" dirty="0">
+                <a:solidFill>
+                  <a:srgbClr val="6E7D72"/>
+                </a:solidFill>
+                <a:latin typeface="Calibri" pitchFamily="34" charset="0"/>
+                <a:ea typeface="Calibri" pitchFamily="34" charset="-122"/>
+                <a:cs typeface="Calibri" pitchFamily="34" charset="-120"/>
+              </a:rPr>
+              <a:t>Premissa 3 · o nível é declarado em toda atividade</a:t>
+            </a:r>
+            <a:endParaRPr lang="en-US" sz="1000" dirty="0"/>
+          </a:p>
+        </p:txBody>
+      </p:sp>
+    </p:spTree>
+  </p:cSld>
+  <p:clrMapOvr>
+    <a:masterClrMapping/>
+  </p:clrMapOvr>
+</p:sld>
+</file>
+
+<file path=ppt/slides/slide27.xml><?xml version="1.0" encoding="utf-8"?>
+<p:sld xmlns:a="http://schemas.openxmlformats.org/drawingml/2006/main" xmlns:r="http://schemas.openxmlformats.org/officeDocument/2006/relationships" xmlns:p="http://schemas.openxmlformats.org/presentationml/2006/main">
+  <p:cSld name="Slide 27">
     <p:bg>
       <p:bgPr>
         <a:solidFill>
